--- a/Cyclistic-Analysis.pptx
+++ b/Cyclistic-Analysis.pptx
@@ -1,18 +1,24 @@
 
 <file path=ppt/presentation.xml><?xml version="1.0" encoding="utf-8"?>
-<p:presentation xmlns:a="http://schemas.openxmlformats.org/drawingml/2006/main" xmlns:p="http://schemas.openxmlformats.org/presentationml/2006/main" xmlns:r="http://schemas.openxmlformats.org/officeDocument/2006/relationships" autoCompressPictures="0" saveSubsetFonts="1">
+<p:presentation xmlns:a="http://schemas.openxmlformats.org/drawingml/2006/main" xmlns:r="http://schemas.openxmlformats.org/officeDocument/2006/relationships" xmlns:p="http://schemas.openxmlformats.org/presentationml/2006/main" saveSubsetFonts="1" autoCompressPictures="0">
   <p:sldMasterIdLst>
-    <p:sldMasterId id="2147483648" r:id="rId1"/>
+    <p:sldMasterId id="2147483911" r:id="rId1"/>
   </p:sldMasterIdLst>
+  <p:notesMasterIdLst>
+    <p:notesMasterId r:id="rId13"/>
+  </p:notesMasterIdLst>
   <p:sldIdLst>
     <p:sldId id="256" r:id="rId2"/>
-    <p:sldId id="257" r:id="rId3"/>
-    <p:sldId id="258" r:id="rId4"/>
-    <p:sldId id="259" r:id="rId5"/>
-    <p:sldId id="260" r:id="rId6"/>
-    <p:sldId id="261" r:id="rId7"/>
-    <p:sldId id="262" r:id="rId8"/>
-    <p:sldId id="263" r:id="rId9"/>
+    <p:sldId id="268" r:id="rId3"/>
+    <p:sldId id="257" r:id="rId4"/>
+    <p:sldId id="263" r:id="rId5"/>
+    <p:sldId id="264" r:id="rId6"/>
+    <p:sldId id="265" r:id="rId7"/>
+    <p:sldId id="267" r:id="rId8"/>
+    <p:sldId id="266" r:id="rId9"/>
+    <p:sldId id="260" r:id="rId10"/>
+    <p:sldId id="261" r:id="rId11"/>
+    <p:sldId id="269" r:id="rId12"/>
   </p:sldIdLst>
   <p:sldSz cx="9144000" cy="5143500" type="screen16x9"/>
   <p:notesSz cx="6858000" cy="9144000"/>
@@ -20,8 +26,8 @@
     <a:defPPr>
       <a:defRPr lang="en-US"/>
     </a:defPPr>
-    <a:lvl1pPr algn="l" defTabSz="457200" eaLnBrk="1" hangingPunct="1" latinLnBrk="0" marL="0" rtl="0">
-      <a:defRPr kern="1200" sz="1800">
+    <a:lvl1pPr marL="0" algn="l" defTabSz="457200" rtl="0" eaLnBrk="1" latinLnBrk="0" hangingPunct="1">
+      <a:defRPr sz="1800" kern="1200">
         <a:solidFill>
           <a:schemeClr val="tx1"/>
         </a:solidFill>
@@ -30,8 +36,8 @@
         <a:cs typeface="+mn-cs"/>
       </a:defRPr>
     </a:lvl1pPr>
-    <a:lvl2pPr algn="l" defTabSz="457200" eaLnBrk="1" hangingPunct="1" latinLnBrk="0" marL="457200" rtl="0">
-      <a:defRPr kern="1200" sz="1800">
+    <a:lvl2pPr marL="457200" algn="l" defTabSz="457200" rtl="0" eaLnBrk="1" latinLnBrk="0" hangingPunct="1">
+      <a:defRPr sz="1800" kern="1200">
         <a:solidFill>
           <a:schemeClr val="tx1"/>
         </a:solidFill>
@@ -40,8 +46,8 @@
         <a:cs typeface="+mn-cs"/>
       </a:defRPr>
     </a:lvl2pPr>
-    <a:lvl3pPr algn="l" defTabSz="457200" eaLnBrk="1" hangingPunct="1" latinLnBrk="0" marL="914400" rtl="0">
-      <a:defRPr kern="1200" sz="1800">
+    <a:lvl3pPr marL="914400" algn="l" defTabSz="457200" rtl="0" eaLnBrk="1" latinLnBrk="0" hangingPunct="1">
+      <a:defRPr sz="1800" kern="1200">
         <a:solidFill>
           <a:schemeClr val="tx1"/>
         </a:solidFill>
@@ -50,8 +56,8 @@
         <a:cs typeface="+mn-cs"/>
       </a:defRPr>
     </a:lvl3pPr>
-    <a:lvl4pPr algn="l" defTabSz="457200" eaLnBrk="1" hangingPunct="1" latinLnBrk="0" marL="1371600" rtl="0">
-      <a:defRPr kern="1200" sz="1800">
+    <a:lvl4pPr marL="1371600" algn="l" defTabSz="457200" rtl="0" eaLnBrk="1" latinLnBrk="0" hangingPunct="1">
+      <a:defRPr sz="1800" kern="1200">
         <a:solidFill>
           <a:schemeClr val="tx1"/>
         </a:solidFill>
@@ -60,8 +66,8 @@
         <a:cs typeface="+mn-cs"/>
       </a:defRPr>
     </a:lvl4pPr>
-    <a:lvl5pPr algn="l" defTabSz="457200" eaLnBrk="1" hangingPunct="1" latinLnBrk="0" marL="1828800" rtl="0">
-      <a:defRPr kern="1200" sz="1800">
+    <a:lvl5pPr marL="1828800" algn="l" defTabSz="457200" rtl="0" eaLnBrk="1" latinLnBrk="0" hangingPunct="1">
+      <a:defRPr sz="1800" kern="1200">
         <a:solidFill>
           <a:schemeClr val="tx1"/>
         </a:solidFill>
@@ -70,8 +76,8 @@
         <a:cs typeface="+mn-cs"/>
       </a:defRPr>
     </a:lvl5pPr>
-    <a:lvl6pPr algn="l" defTabSz="457200" eaLnBrk="1" hangingPunct="1" latinLnBrk="0" marL="2286000" rtl="0">
-      <a:defRPr kern="1200" sz="1800">
+    <a:lvl6pPr marL="2286000" algn="l" defTabSz="457200" rtl="0" eaLnBrk="1" latinLnBrk="0" hangingPunct="1">
+      <a:defRPr sz="1800" kern="1200">
         <a:solidFill>
           <a:schemeClr val="tx1"/>
         </a:solidFill>
@@ -80,8 +86,8 @@
         <a:cs typeface="+mn-cs"/>
       </a:defRPr>
     </a:lvl6pPr>
-    <a:lvl7pPr algn="l" defTabSz="457200" eaLnBrk="1" hangingPunct="1" latinLnBrk="0" marL="2743200" rtl="0">
-      <a:defRPr kern="1200" sz="1800">
+    <a:lvl7pPr marL="2743200" algn="l" defTabSz="457200" rtl="0" eaLnBrk="1" latinLnBrk="0" hangingPunct="1">
+      <a:defRPr sz="1800" kern="1200">
         <a:solidFill>
           <a:schemeClr val="tx1"/>
         </a:solidFill>
@@ -90,8 +96,8 @@
         <a:cs typeface="+mn-cs"/>
       </a:defRPr>
     </a:lvl7pPr>
-    <a:lvl8pPr algn="l" defTabSz="457200" eaLnBrk="1" hangingPunct="1" latinLnBrk="0" marL="3200400" rtl="0">
-      <a:defRPr kern="1200" sz="1800">
+    <a:lvl8pPr marL="3200400" algn="l" defTabSz="457200" rtl="0" eaLnBrk="1" latinLnBrk="0" hangingPunct="1">
+      <a:defRPr sz="1800" kern="1200">
         <a:solidFill>
           <a:schemeClr val="tx1"/>
         </a:solidFill>
@@ -100,8 +106,8 @@
         <a:cs typeface="+mn-cs"/>
       </a:defRPr>
     </a:lvl8pPr>
-    <a:lvl9pPr algn="l" defTabSz="457200" eaLnBrk="1" hangingPunct="1" latinLnBrk="0" marL="3657600" rtl="0">
-      <a:defRPr kern="1200" sz="1800">
+    <a:lvl9pPr marL="3657600" algn="l" defTabSz="457200" rtl="0" eaLnBrk="1" latinLnBrk="0" hangingPunct="1">
+      <a:defRPr sz="1800" kern="1200">
         <a:solidFill>
           <a:schemeClr val="tx1"/>
         </a:solidFill>
@@ -130,8 +136,1626 @@
 </p:presentation>
 </file>
 
+<file path=ppt/charts/chart1.xml><?xml version="1.0" encoding="utf-8"?>
+<c:chartSpace xmlns:c="http://schemas.openxmlformats.org/drawingml/2006/chart" xmlns:a="http://schemas.openxmlformats.org/drawingml/2006/main" xmlns:r="http://schemas.openxmlformats.org/officeDocument/2006/relationships" xmlns:c16r2="http://schemas.microsoft.com/office/drawing/2015/06/chart">
+  <c:date1904 val="0"/>
+  <c:lang val="en-US"/>
+  <c:roundedCorners val="0"/>
+  <mc:AlternateContent xmlns:mc="http://schemas.openxmlformats.org/markup-compatibility/2006">
+    <mc:Choice xmlns:c14="http://schemas.microsoft.com/office/drawing/2007/8/2/chart" Requires="c14">
+      <c14:style val="102"/>
+    </mc:Choice>
+    <mc:Fallback>
+      <c:style val="2"/>
+    </mc:Fallback>
+  </mc:AlternateContent>
+  <c:chart>
+    <c:title>
+      <c:tx>
+        <c:rich>
+          <a:bodyPr rot="0" spcFirstLastPara="1" vertOverflow="ellipsis" vert="horz" wrap="square" anchor="ctr" anchorCtr="1"/>
+          <a:lstStyle/>
+          <a:p>
+            <a:pPr>
+              <a:defRPr sz="2200" b="1" i="0" u="none" strike="noStrike" kern="1200" baseline="0">
+                <a:solidFill>
+                  <a:schemeClr val="dk1">
+                    <a:lumMod val="75000"/>
+                    <a:lumOff val="25000"/>
+                  </a:schemeClr>
+                </a:solidFill>
+                <a:latin typeface="+mn-lt"/>
+                <a:ea typeface="+mn-ea"/>
+                <a:cs typeface="+mn-cs"/>
+              </a:defRPr>
+            </a:pPr>
+            <a:r>
+              <a:rPr lang="en-US"/>
+              <a:t>Average Ride Length: Subscribers vs. Customers</a:t>
+            </a:r>
+          </a:p>
+        </c:rich>
+      </c:tx>
+      <c:overlay val="0"/>
+      <c:spPr>
+        <a:noFill/>
+        <a:ln>
+          <a:noFill/>
+        </a:ln>
+        <a:effectLst/>
+      </c:spPr>
+      <c:txPr>
+        <a:bodyPr rot="0" spcFirstLastPara="1" vertOverflow="ellipsis" vert="horz" wrap="square" anchor="ctr" anchorCtr="1"/>
+        <a:lstStyle/>
+        <a:p>
+          <a:pPr>
+            <a:defRPr sz="2200" b="1" i="0" u="none" strike="noStrike" kern="1200" baseline="0">
+              <a:solidFill>
+                <a:schemeClr val="dk1">
+                  <a:lumMod val="75000"/>
+                  <a:lumOff val="25000"/>
+                </a:schemeClr>
+              </a:solidFill>
+              <a:latin typeface="+mn-lt"/>
+              <a:ea typeface="+mn-ea"/>
+              <a:cs typeface="+mn-cs"/>
+            </a:defRPr>
+          </a:pPr>
+          <a:endParaRPr lang="en-US"/>
+        </a:p>
+      </c:txPr>
+    </c:title>
+    <c:autoTitleDeleted val="0"/>
+    <c:plotArea>
+      <c:layout/>
+      <c:barChart>
+        <c:barDir val="col"/>
+        <c:grouping val="clustered"/>
+        <c:varyColors val="0"/>
+        <c:ser>
+          <c:idx val="0"/>
+          <c:order val="0"/>
+          <c:tx>
+            <c:strRef>
+              <c:f>Sheet1!$B$1</c:f>
+              <c:strCache>
+                <c:ptCount val="1"/>
+                <c:pt idx="0">
+                  <c:v>2019</c:v>
+                </c:pt>
+              </c:strCache>
+            </c:strRef>
+          </c:tx>
+          <c:spPr>
+            <a:solidFill>
+              <a:schemeClr val="accent1">
+                <a:alpha val="85000"/>
+              </a:schemeClr>
+            </a:solidFill>
+            <a:ln w="9525" cap="flat" cmpd="sng" algn="ctr">
+              <a:solidFill>
+                <a:schemeClr val="lt1">
+                  <a:alpha val="50000"/>
+                </a:schemeClr>
+              </a:solidFill>
+              <a:round/>
+            </a:ln>
+            <a:effectLst/>
+          </c:spPr>
+          <c:invertIfNegative val="0"/>
+          <c:dLbls>
+            <c:spPr>
+              <a:noFill/>
+              <a:ln>
+                <a:noFill/>
+              </a:ln>
+              <a:effectLst/>
+            </c:spPr>
+            <c:txPr>
+              <a:bodyPr rot="0" spcFirstLastPara="1" vertOverflow="ellipsis" vert="horz" wrap="square" lIns="38100" tIns="19050" rIns="38100" bIns="19050" anchor="ctr" anchorCtr="1">
+                <a:spAutoFit/>
+              </a:bodyPr>
+              <a:lstStyle/>
+              <a:p>
+                <a:pPr>
+                  <a:defRPr sz="1197" b="1" i="0" u="none" strike="noStrike" kern="1200" baseline="0">
+                    <a:solidFill>
+                      <a:schemeClr val="lt1"/>
+                    </a:solidFill>
+                    <a:latin typeface="+mn-lt"/>
+                    <a:ea typeface="+mn-ea"/>
+                    <a:cs typeface="+mn-cs"/>
+                  </a:defRPr>
+                </a:pPr>
+                <a:endParaRPr lang="en-US"/>
+              </a:p>
+            </c:txPr>
+            <c:dLblPos val="inEnd"/>
+            <c:showLegendKey val="0"/>
+            <c:showVal val="1"/>
+            <c:showCatName val="0"/>
+            <c:showSerName val="0"/>
+            <c:showPercent val="0"/>
+            <c:showBubbleSize val="0"/>
+            <c:showLeaderLines val="0"/>
+            <c:extLst>
+              <c:ext xmlns:c15="http://schemas.microsoft.com/office/drawing/2012/chart" uri="{CE6537A1-D6FC-4f65-9D91-7224C49458BB}">
+                <c15:showLeaderLines val="1"/>
+                <c15:leaderLines>
+                  <c:spPr>
+                    <a:ln w="9525">
+                      <a:solidFill>
+                        <a:schemeClr val="dk1">
+                          <a:lumMod val="50000"/>
+                          <a:lumOff val="50000"/>
+                        </a:schemeClr>
+                      </a:solidFill>
+                    </a:ln>
+                    <a:effectLst/>
+                  </c:spPr>
+                </c15:leaderLines>
+              </c:ext>
+            </c:extLst>
+          </c:dLbls>
+          <c:cat>
+            <c:strRef>
+              <c:f>Sheet1!$A$2:$A$5</c:f>
+              <c:strCache>
+                <c:ptCount val="2"/>
+                <c:pt idx="0">
+                  <c:v>Customers</c:v>
+                </c:pt>
+                <c:pt idx="1">
+                  <c:v>Subscribers</c:v>
+                </c:pt>
+              </c:strCache>
+            </c:strRef>
+          </c:cat>
+          <c:val>
+            <c:numRef>
+              <c:f>Sheet1!$B$2:$B$5</c:f>
+              <c:numCache>
+                <c:formatCode>General</c:formatCode>
+                <c:ptCount val="4"/>
+                <c:pt idx="0">
+                  <c:v>61.93</c:v>
+                </c:pt>
+                <c:pt idx="1">
+                  <c:v>13.89</c:v>
+                </c:pt>
+              </c:numCache>
+            </c:numRef>
+          </c:val>
+          <c:extLst>
+            <c:ext xmlns:c16="http://schemas.microsoft.com/office/drawing/2014/chart" uri="{C3380CC4-5D6E-409C-BE32-E72D297353CC}">
+              <c16:uniqueId val="{00000000-C9E2-4485-9D5B-AD8EA7BEF692}"/>
+            </c:ext>
+          </c:extLst>
+        </c:ser>
+        <c:ser>
+          <c:idx val="1"/>
+          <c:order val="1"/>
+          <c:tx>
+            <c:strRef>
+              <c:f>Sheet1!$C$1</c:f>
+              <c:strCache>
+                <c:ptCount val="1"/>
+                <c:pt idx="0">
+                  <c:v>2020</c:v>
+                </c:pt>
+              </c:strCache>
+            </c:strRef>
+          </c:tx>
+          <c:spPr>
+            <a:solidFill>
+              <a:schemeClr val="accent2">
+                <a:alpha val="85000"/>
+              </a:schemeClr>
+            </a:solidFill>
+            <a:ln w="9525" cap="flat" cmpd="sng" algn="ctr">
+              <a:solidFill>
+                <a:schemeClr val="lt1">
+                  <a:alpha val="50000"/>
+                </a:schemeClr>
+              </a:solidFill>
+              <a:round/>
+            </a:ln>
+            <a:effectLst/>
+          </c:spPr>
+          <c:invertIfNegative val="0"/>
+          <c:dLbls>
+            <c:spPr>
+              <a:noFill/>
+              <a:ln>
+                <a:noFill/>
+              </a:ln>
+              <a:effectLst/>
+            </c:spPr>
+            <c:txPr>
+              <a:bodyPr rot="0" spcFirstLastPara="1" vertOverflow="ellipsis" vert="horz" wrap="square" lIns="38100" tIns="19050" rIns="38100" bIns="19050" anchor="ctr" anchorCtr="1">
+                <a:spAutoFit/>
+              </a:bodyPr>
+              <a:lstStyle/>
+              <a:p>
+                <a:pPr>
+                  <a:defRPr sz="1197" b="1" i="0" u="none" strike="noStrike" kern="1200" baseline="0">
+                    <a:solidFill>
+                      <a:schemeClr val="lt1"/>
+                    </a:solidFill>
+                    <a:latin typeface="+mn-lt"/>
+                    <a:ea typeface="+mn-ea"/>
+                    <a:cs typeface="+mn-cs"/>
+                  </a:defRPr>
+                </a:pPr>
+                <a:endParaRPr lang="en-US"/>
+              </a:p>
+            </c:txPr>
+            <c:dLblPos val="inEnd"/>
+            <c:showLegendKey val="0"/>
+            <c:showVal val="1"/>
+            <c:showCatName val="0"/>
+            <c:showSerName val="0"/>
+            <c:showPercent val="0"/>
+            <c:showBubbleSize val="0"/>
+            <c:showLeaderLines val="0"/>
+            <c:extLst>
+              <c:ext xmlns:c15="http://schemas.microsoft.com/office/drawing/2012/chart" uri="{CE6537A1-D6FC-4f65-9D91-7224C49458BB}">
+                <c15:showLeaderLines val="1"/>
+                <c15:leaderLines>
+                  <c:spPr>
+                    <a:ln w="9525">
+                      <a:solidFill>
+                        <a:schemeClr val="dk1">
+                          <a:lumMod val="50000"/>
+                          <a:lumOff val="50000"/>
+                        </a:schemeClr>
+                      </a:solidFill>
+                    </a:ln>
+                    <a:effectLst/>
+                  </c:spPr>
+                </c15:leaderLines>
+              </c:ext>
+            </c:extLst>
+          </c:dLbls>
+          <c:cat>
+            <c:strRef>
+              <c:f>Sheet1!$A$2:$A$5</c:f>
+              <c:strCache>
+                <c:ptCount val="2"/>
+                <c:pt idx="0">
+                  <c:v>Customers</c:v>
+                </c:pt>
+                <c:pt idx="1">
+                  <c:v>Subscribers</c:v>
+                </c:pt>
+              </c:strCache>
+            </c:strRef>
+          </c:cat>
+          <c:val>
+            <c:numRef>
+              <c:f>Sheet1!$C$2:$C$5</c:f>
+              <c:numCache>
+                <c:formatCode>General</c:formatCode>
+                <c:ptCount val="4"/>
+                <c:pt idx="0">
+                  <c:v>95.79</c:v>
+                </c:pt>
+                <c:pt idx="1">
+                  <c:v>12.68</c:v>
+                </c:pt>
+              </c:numCache>
+            </c:numRef>
+          </c:val>
+          <c:extLst>
+            <c:ext xmlns:c16="http://schemas.microsoft.com/office/drawing/2014/chart" uri="{C3380CC4-5D6E-409C-BE32-E72D297353CC}">
+              <c16:uniqueId val="{00000001-C9E2-4485-9D5B-AD8EA7BEF692}"/>
+            </c:ext>
+          </c:extLst>
+        </c:ser>
+        <c:dLbls>
+          <c:dLblPos val="inEnd"/>
+          <c:showLegendKey val="0"/>
+          <c:showVal val="1"/>
+          <c:showCatName val="0"/>
+          <c:showSerName val="0"/>
+          <c:showPercent val="0"/>
+          <c:showBubbleSize val="0"/>
+        </c:dLbls>
+        <c:gapWidth val="65"/>
+        <c:axId val="372984048"/>
+        <c:axId val="372986208"/>
+      </c:barChart>
+      <c:catAx>
+        <c:axId val="372984048"/>
+        <c:scaling>
+          <c:orientation val="minMax"/>
+        </c:scaling>
+        <c:delete val="0"/>
+        <c:axPos val="b"/>
+        <c:numFmt formatCode="General" sourceLinked="1"/>
+        <c:majorTickMark val="none"/>
+        <c:minorTickMark val="none"/>
+        <c:tickLblPos val="nextTo"/>
+        <c:spPr>
+          <a:noFill/>
+          <a:ln w="19050" cap="flat" cmpd="sng" algn="ctr">
+            <a:solidFill>
+              <a:schemeClr val="dk1">
+                <a:lumMod val="75000"/>
+                <a:lumOff val="25000"/>
+              </a:schemeClr>
+            </a:solidFill>
+            <a:round/>
+          </a:ln>
+          <a:effectLst/>
+        </c:spPr>
+        <c:txPr>
+          <a:bodyPr rot="-60000000" spcFirstLastPara="1" vertOverflow="ellipsis" vert="horz" wrap="square" anchor="ctr" anchorCtr="1"/>
+          <a:lstStyle/>
+          <a:p>
+            <a:pPr>
+              <a:defRPr sz="1197" b="0" i="0" u="none" strike="noStrike" kern="1200" cap="all" baseline="0">
+                <a:solidFill>
+                  <a:schemeClr val="dk1">
+                    <a:lumMod val="75000"/>
+                    <a:lumOff val="25000"/>
+                  </a:schemeClr>
+                </a:solidFill>
+                <a:latin typeface="+mn-lt"/>
+                <a:ea typeface="+mn-ea"/>
+                <a:cs typeface="+mn-cs"/>
+              </a:defRPr>
+            </a:pPr>
+            <a:endParaRPr lang="en-US"/>
+          </a:p>
+        </c:txPr>
+        <c:crossAx val="372986208"/>
+        <c:crosses val="autoZero"/>
+        <c:auto val="1"/>
+        <c:lblAlgn val="ctr"/>
+        <c:lblOffset val="100"/>
+        <c:noMultiLvlLbl val="0"/>
+      </c:catAx>
+      <c:valAx>
+        <c:axId val="372986208"/>
+        <c:scaling>
+          <c:orientation val="minMax"/>
+        </c:scaling>
+        <c:delete val="1"/>
+        <c:axPos val="l"/>
+        <c:title>
+          <c:tx>
+            <c:rich>
+              <a:bodyPr rot="-5400000" spcFirstLastPara="1" vertOverflow="ellipsis" vert="horz" wrap="square" anchor="ctr" anchorCtr="1"/>
+              <a:lstStyle/>
+              <a:p>
+                <a:pPr>
+                  <a:defRPr sz="1197" b="1" i="0" u="none" strike="noStrike" kern="1200" baseline="0">
+                    <a:solidFill>
+                      <a:schemeClr val="dk1">
+                        <a:lumMod val="75000"/>
+                        <a:lumOff val="25000"/>
+                      </a:schemeClr>
+                    </a:solidFill>
+                    <a:latin typeface="+mn-lt"/>
+                    <a:ea typeface="+mn-ea"/>
+                    <a:cs typeface="+mn-cs"/>
+                  </a:defRPr>
+                </a:pPr>
+                <a:r>
+                  <a:rPr lang="en-US"/>
+                  <a:t>Average Ride Length (minutes)</a:t>
+                </a:r>
+              </a:p>
+            </c:rich>
+          </c:tx>
+          <c:overlay val="0"/>
+          <c:spPr>
+            <a:noFill/>
+            <a:ln>
+              <a:noFill/>
+            </a:ln>
+            <a:effectLst/>
+          </c:spPr>
+          <c:txPr>
+            <a:bodyPr rot="-5400000" spcFirstLastPara="1" vertOverflow="ellipsis" vert="horz" wrap="square" anchor="ctr" anchorCtr="1"/>
+            <a:lstStyle/>
+            <a:p>
+              <a:pPr>
+                <a:defRPr sz="1197" b="1" i="0" u="none" strike="noStrike" kern="1200" baseline="0">
+                  <a:solidFill>
+                    <a:schemeClr val="dk1">
+                      <a:lumMod val="75000"/>
+                      <a:lumOff val="25000"/>
+                    </a:schemeClr>
+                  </a:solidFill>
+                  <a:latin typeface="+mn-lt"/>
+                  <a:ea typeface="+mn-ea"/>
+                  <a:cs typeface="+mn-cs"/>
+                </a:defRPr>
+              </a:pPr>
+              <a:endParaRPr lang="en-US"/>
+            </a:p>
+          </c:txPr>
+        </c:title>
+        <c:numFmt formatCode="General" sourceLinked="1"/>
+        <c:majorTickMark val="none"/>
+        <c:minorTickMark val="none"/>
+        <c:tickLblPos val="nextTo"/>
+        <c:crossAx val="372984048"/>
+        <c:crosses val="autoZero"/>
+        <c:crossBetween val="between"/>
+      </c:valAx>
+      <c:spPr>
+        <a:noFill/>
+        <a:ln>
+          <a:noFill/>
+        </a:ln>
+        <a:effectLst/>
+      </c:spPr>
+    </c:plotArea>
+    <c:legend>
+      <c:legendPos val="b"/>
+      <c:overlay val="0"/>
+      <c:spPr>
+        <a:solidFill>
+          <a:schemeClr val="lt1">
+            <a:lumMod val="95000"/>
+            <a:alpha val="39000"/>
+          </a:schemeClr>
+        </a:solidFill>
+        <a:ln>
+          <a:noFill/>
+        </a:ln>
+        <a:effectLst/>
+      </c:spPr>
+      <c:txPr>
+        <a:bodyPr rot="0" spcFirstLastPara="1" vertOverflow="ellipsis" vert="horz" wrap="square" anchor="ctr" anchorCtr="1"/>
+        <a:lstStyle/>
+        <a:p>
+          <a:pPr>
+            <a:defRPr sz="1197" b="0" i="0" u="none" strike="noStrike" kern="1200" baseline="0">
+              <a:solidFill>
+                <a:schemeClr val="dk1">
+                  <a:lumMod val="75000"/>
+                  <a:lumOff val="25000"/>
+                </a:schemeClr>
+              </a:solidFill>
+              <a:latin typeface="+mn-lt"/>
+              <a:ea typeface="+mn-ea"/>
+              <a:cs typeface="+mn-cs"/>
+            </a:defRPr>
+          </a:pPr>
+          <a:endParaRPr lang="en-US"/>
+        </a:p>
+      </c:txPr>
+    </c:legend>
+    <c:plotVisOnly val="1"/>
+    <c:dispBlanksAs val="gap"/>
+    <c:showDLblsOverMax val="0"/>
+    <c:extLst>
+      <c:ext xmlns:c16r3="http://schemas.microsoft.com/office/drawing/2017/03/chart" uri="{56B9EC1D-385E-4148-901F-78D8002777C0}">
+        <c16r3:dataDisplayOptions16>
+          <c16r3:dispNaAsBlank val="1"/>
+        </c16r3:dataDisplayOptions16>
+      </c:ext>
+    </c:extLst>
+  </c:chart>
+  <c:spPr>
+    <a:gradFill flip="none" rotWithShape="1">
+      <a:gsLst>
+        <a:gs pos="0">
+          <a:schemeClr val="lt1"/>
+        </a:gs>
+        <a:gs pos="39000">
+          <a:schemeClr val="lt1"/>
+        </a:gs>
+        <a:gs pos="100000">
+          <a:schemeClr val="lt1">
+            <a:lumMod val="75000"/>
+          </a:schemeClr>
+        </a:gs>
+      </a:gsLst>
+      <a:path path="circle">
+        <a:fillToRect l="50000" t="-80000" r="50000" b="180000"/>
+      </a:path>
+      <a:tileRect/>
+    </a:gradFill>
+    <a:ln w="9525" cap="flat" cmpd="sng" algn="ctr">
+      <a:solidFill>
+        <a:schemeClr val="dk1">
+          <a:lumMod val="25000"/>
+          <a:lumOff val="75000"/>
+        </a:schemeClr>
+      </a:solidFill>
+      <a:round/>
+    </a:ln>
+    <a:effectLst/>
+  </c:spPr>
+  <c:txPr>
+    <a:bodyPr/>
+    <a:lstStyle/>
+    <a:p>
+      <a:pPr>
+        <a:defRPr/>
+      </a:pPr>
+      <a:endParaRPr lang="en-US"/>
+    </a:p>
+  </c:txPr>
+  <c:externalData r:id="rId3">
+    <c:autoUpdate val="0"/>
+  </c:externalData>
+</c:chartSpace>
+</file>
+
+<file path=ppt/charts/colors1.xml><?xml version="1.0" encoding="utf-8"?>
+<cs:colorStyle xmlns:cs="http://schemas.microsoft.com/office/drawing/2012/chartStyle" xmlns:a="http://schemas.openxmlformats.org/drawingml/2006/main" meth="cycle" id="10">
+  <a:schemeClr val="accent1"/>
+  <a:schemeClr val="accent2"/>
+  <a:schemeClr val="accent3"/>
+  <a:schemeClr val="accent4"/>
+  <a:schemeClr val="accent5"/>
+  <a:schemeClr val="accent6"/>
+  <cs:variation/>
+  <cs:variation>
+    <a:lumMod val="60000"/>
+  </cs:variation>
+  <cs:variation>
+    <a:lumMod val="80000"/>
+    <a:lumOff val="20000"/>
+  </cs:variation>
+  <cs:variation>
+    <a:lumMod val="80000"/>
+  </cs:variation>
+  <cs:variation>
+    <a:lumMod val="60000"/>
+    <a:lumOff val="40000"/>
+  </cs:variation>
+  <cs:variation>
+    <a:lumMod val="50000"/>
+  </cs:variation>
+  <cs:variation>
+    <a:lumMod val="70000"/>
+    <a:lumOff val="30000"/>
+  </cs:variation>
+  <cs:variation>
+    <a:lumMod val="70000"/>
+  </cs:variation>
+  <cs:variation>
+    <a:lumMod val="50000"/>
+    <a:lumOff val="50000"/>
+  </cs:variation>
+</cs:colorStyle>
+</file>
+
+<file path=ppt/charts/style1.xml><?xml version="1.0" encoding="utf-8"?>
+<cs:chartStyle xmlns:cs="http://schemas.microsoft.com/office/drawing/2012/chartStyle" xmlns:a="http://schemas.openxmlformats.org/drawingml/2006/main" id="205">
+  <cs:axisTitle>
+    <cs:lnRef idx="0"/>
+    <cs:fillRef idx="0"/>
+    <cs:effectRef idx="0"/>
+    <cs:fontRef idx="minor">
+      <a:schemeClr val="dk1">
+        <a:lumMod val="75000"/>
+        <a:lumOff val="25000"/>
+      </a:schemeClr>
+    </cs:fontRef>
+    <cs:defRPr sz="1197" b="1" kern="1200"/>
+  </cs:axisTitle>
+  <cs:categoryAxis>
+    <cs:lnRef idx="0"/>
+    <cs:fillRef idx="0"/>
+    <cs:effectRef idx="0"/>
+    <cs:fontRef idx="minor">
+      <a:schemeClr val="dk1">
+        <a:lumMod val="75000"/>
+        <a:lumOff val="25000"/>
+      </a:schemeClr>
+    </cs:fontRef>
+    <cs:spPr>
+      <a:ln w="19050" cap="flat" cmpd="sng" algn="ctr">
+        <a:solidFill>
+          <a:schemeClr val="dk1">
+            <a:lumMod val="75000"/>
+            <a:lumOff val="25000"/>
+          </a:schemeClr>
+        </a:solidFill>
+        <a:round/>
+      </a:ln>
+    </cs:spPr>
+    <cs:defRPr sz="1197" kern="1200" cap="all" baseline="0"/>
+  </cs:categoryAxis>
+  <cs:chartArea>
+    <cs:lnRef idx="0"/>
+    <cs:fillRef idx="0"/>
+    <cs:effectRef idx="0"/>
+    <cs:fontRef idx="minor">
+      <a:schemeClr val="dk1"/>
+    </cs:fontRef>
+    <cs:spPr>
+      <a:gradFill flip="none" rotWithShape="1">
+        <a:gsLst>
+          <a:gs pos="0">
+            <a:schemeClr val="lt1"/>
+          </a:gs>
+          <a:gs pos="39000">
+            <a:schemeClr val="lt1"/>
+          </a:gs>
+          <a:gs pos="100000">
+            <a:schemeClr val="lt1">
+              <a:lumMod val="75000"/>
+            </a:schemeClr>
+          </a:gs>
+        </a:gsLst>
+        <a:path path="circle">
+          <a:fillToRect l="50000" t="-80000" r="50000" b="180000"/>
+        </a:path>
+        <a:tileRect/>
+      </a:gradFill>
+      <a:ln w="9525" cap="flat" cmpd="sng" algn="ctr">
+        <a:solidFill>
+          <a:schemeClr val="dk1">
+            <a:lumMod val="25000"/>
+            <a:lumOff val="75000"/>
+          </a:schemeClr>
+        </a:solidFill>
+        <a:round/>
+      </a:ln>
+    </cs:spPr>
+    <cs:defRPr sz="1197" kern="1200"/>
+  </cs:chartArea>
+  <cs:dataLabel>
+    <cs:lnRef idx="0"/>
+    <cs:fillRef idx="0"/>
+    <cs:effectRef idx="0"/>
+    <cs:fontRef idx="minor">
+      <a:schemeClr val="lt1"/>
+    </cs:fontRef>
+    <cs:defRPr sz="1197" b="1" i="0" u="none" strike="noStrike" kern="1200" baseline="0"/>
+  </cs:dataLabel>
+  <cs:dataLabelCallout>
+    <cs:lnRef idx="0"/>
+    <cs:fillRef idx="0"/>
+    <cs:effectRef idx="0"/>
+    <cs:fontRef idx="minor">
+      <a:schemeClr val="lt1"/>
+    </cs:fontRef>
+    <cs:spPr>
+      <a:solidFill>
+        <a:schemeClr val="dk1">
+          <a:lumMod val="65000"/>
+          <a:lumOff val="35000"/>
+          <a:alpha val="75000"/>
+        </a:schemeClr>
+      </a:solidFill>
+    </cs:spPr>
+    <cs:defRPr sz="1197" b="1" kern="1200"/>
+    <cs:bodyPr rot="0" spcFirstLastPara="1" vertOverflow="clip" horzOverflow="clip" vert="horz" wrap="square" lIns="36576" tIns="18288" rIns="36576" bIns="18288" anchor="ctr" anchorCtr="1">
+      <a:spAutoFit/>
+    </cs:bodyPr>
+  </cs:dataLabelCallout>
+  <cs:dataPoint>
+    <cs:lnRef idx="0"/>
+    <cs:fillRef idx="0">
+      <cs:styleClr val="auto"/>
+    </cs:fillRef>
+    <cs:effectRef idx="0"/>
+    <cs:fontRef idx="minor">
+      <a:schemeClr val="dk1"/>
+    </cs:fontRef>
+    <cs:spPr>
+      <a:solidFill>
+        <a:schemeClr val="phClr">
+          <a:alpha val="85000"/>
+        </a:schemeClr>
+      </a:solidFill>
+      <a:ln w="9525" cap="flat" cmpd="sng" algn="ctr">
+        <a:solidFill>
+          <a:schemeClr val="lt1">
+            <a:alpha val="50000"/>
+          </a:schemeClr>
+        </a:solidFill>
+        <a:round/>
+      </a:ln>
+    </cs:spPr>
+  </cs:dataPoint>
+  <cs:dataPoint3D>
+    <cs:lnRef idx="0"/>
+    <cs:fillRef idx="0">
+      <cs:styleClr val="auto"/>
+    </cs:fillRef>
+    <cs:effectRef idx="0"/>
+    <cs:fontRef idx="minor">
+      <a:schemeClr val="dk1"/>
+    </cs:fontRef>
+    <cs:spPr>
+      <a:solidFill>
+        <a:schemeClr val="phClr">
+          <a:alpha val="85000"/>
+        </a:schemeClr>
+      </a:solidFill>
+      <a:ln w="9525" cap="flat" cmpd="sng" algn="ctr">
+        <a:solidFill>
+          <a:schemeClr val="lt1">
+            <a:alpha val="50000"/>
+          </a:schemeClr>
+        </a:solidFill>
+        <a:round/>
+      </a:ln>
+    </cs:spPr>
+  </cs:dataPoint3D>
+  <cs:dataPointLine>
+    <cs:lnRef idx="0">
+      <cs:styleClr val="auto"/>
+    </cs:lnRef>
+    <cs:fillRef idx="0"/>
+    <cs:effectRef idx="0"/>
+    <cs:fontRef idx="minor">
+      <a:schemeClr val="dk1"/>
+    </cs:fontRef>
+    <cs:spPr>
+      <a:ln w="31750" cap="rnd">
+        <a:solidFill>
+          <a:schemeClr val="phClr">
+            <a:alpha val="85000"/>
+          </a:schemeClr>
+        </a:solidFill>
+        <a:round/>
+      </a:ln>
+    </cs:spPr>
+  </cs:dataPointLine>
+  <cs:dataPointMarker>
+    <cs:lnRef idx="0"/>
+    <cs:fillRef idx="0">
+      <cs:styleClr val="auto"/>
+    </cs:fillRef>
+    <cs:effectRef idx="0"/>
+    <cs:fontRef idx="minor">
+      <a:schemeClr val="dk1"/>
+    </cs:fontRef>
+    <cs:spPr>
+      <a:solidFill>
+        <a:schemeClr val="phClr">
+          <a:alpha val="85000"/>
+        </a:schemeClr>
+      </a:solidFill>
+    </cs:spPr>
+  </cs:dataPointMarker>
+  <cs:dataPointMarkerLayout symbol="circle" size="6"/>
+  <cs:dataPointWireframe>
+    <cs:lnRef idx="0">
+      <cs:styleClr val="auto"/>
+    </cs:lnRef>
+    <cs:fillRef idx="0"/>
+    <cs:effectRef idx="0"/>
+    <cs:fontRef idx="minor">
+      <a:schemeClr val="dk1"/>
+    </cs:fontRef>
+    <cs:spPr>
+      <a:ln w="9525" cap="rnd">
+        <a:solidFill>
+          <a:schemeClr val="phClr"/>
+        </a:solidFill>
+        <a:round/>
+      </a:ln>
+    </cs:spPr>
+  </cs:dataPointWireframe>
+  <cs:dataTable>
+    <cs:lnRef idx="0"/>
+    <cs:fillRef idx="0"/>
+    <cs:effectRef idx="0"/>
+    <cs:fontRef idx="minor">
+      <a:schemeClr val="dk1">
+        <a:lumMod val="75000"/>
+        <a:lumOff val="25000"/>
+      </a:schemeClr>
+    </cs:fontRef>
+    <cs:spPr>
+      <a:ln w="9525">
+        <a:solidFill>
+          <a:schemeClr val="dk1">
+            <a:lumMod val="35000"/>
+            <a:lumOff val="65000"/>
+          </a:schemeClr>
+        </a:solidFill>
+      </a:ln>
+    </cs:spPr>
+    <cs:defRPr sz="1197" kern="1200"/>
+  </cs:dataTable>
+  <cs:downBar>
+    <cs:lnRef idx="0"/>
+    <cs:fillRef idx="0"/>
+    <cs:effectRef idx="0"/>
+    <cs:fontRef idx="minor">
+      <a:schemeClr val="dk1"/>
+    </cs:fontRef>
+    <cs:spPr>
+      <a:solidFill>
+        <a:schemeClr val="dk1">
+          <a:lumMod val="50000"/>
+          <a:lumOff val="50000"/>
+        </a:schemeClr>
+      </a:solidFill>
+      <a:ln w="9525">
+        <a:solidFill>
+          <a:schemeClr val="dk1">
+            <a:lumMod val="65000"/>
+            <a:lumOff val="35000"/>
+          </a:schemeClr>
+        </a:solidFill>
+      </a:ln>
+    </cs:spPr>
+  </cs:downBar>
+  <cs:dropLine>
+    <cs:lnRef idx="0"/>
+    <cs:fillRef idx="0"/>
+    <cs:effectRef idx="0"/>
+    <cs:fontRef idx="minor">
+      <a:schemeClr val="dk1"/>
+    </cs:fontRef>
+    <cs:spPr>
+      <a:ln w="9525">
+        <a:solidFill>
+          <a:schemeClr val="dk1">
+            <a:lumMod val="35000"/>
+            <a:lumOff val="65000"/>
+          </a:schemeClr>
+        </a:solidFill>
+        <a:prstDash val="dash"/>
+      </a:ln>
+    </cs:spPr>
+  </cs:dropLine>
+  <cs:errorBar>
+    <cs:lnRef idx="0"/>
+    <cs:fillRef idx="0"/>
+    <cs:effectRef idx="0"/>
+    <cs:fontRef idx="minor">
+      <a:schemeClr val="dk1"/>
+    </cs:fontRef>
+    <cs:spPr>
+      <a:ln w="9525">
+        <a:solidFill>
+          <a:schemeClr val="dk1">
+            <a:lumMod val="65000"/>
+            <a:lumOff val="35000"/>
+          </a:schemeClr>
+        </a:solidFill>
+        <a:round/>
+      </a:ln>
+    </cs:spPr>
+  </cs:errorBar>
+  <cs:floor>
+    <cs:lnRef idx="0"/>
+    <cs:fillRef idx="0"/>
+    <cs:effectRef idx="0"/>
+    <cs:fontRef idx="minor">
+      <a:schemeClr val="dk1"/>
+    </cs:fontRef>
+  </cs:floor>
+  <cs:gridlineMajor>
+    <cs:lnRef idx="0"/>
+    <cs:fillRef idx="0"/>
+    <cs:effectRef idx="0"/>
+    <cs:fontRef idx="minor">
+      <a:schemeClr val="dk1"/>
+    </cs:fontRef>
+    <cs:spPr>
+      <a:ln w="9525" cap="flat" cmpd="sng" algn="ctr">
+        <a:gradFill>
+          <a:gsLst>
+            <a:gs pos="100000">
+              <a:schemeClr val="dk1">
+                <a:lumMod val="95000"/>
+                <a:lumOff val="5000"/>
+                <a:alpha val="42000"/>
+              </a:schemeClr>
+            </a:gs>
+            <a:gs pos="0">
+              <a:schemeClr val="lt1">
+                <a:lumMod val="75000"/>
+                <a:alpha val="36000"/>
+              </a:schemeClr>
+            </a:gs>
+          </a:gsLst>
+          <a:lin ang="5400000" scaled="0"/>
+        </a:gradFill>
+        <a:round/>
+      </a:ln>
+    </cs:spPr>
+  </cs:gridlineMajor>
+  <cs:gridlineMinor>
+    <cs:lnRef idx="0"/>
+    <cs:fillRef idx="0"/>
+    <cs:effectRef idx="0"/>
+    <cs:fontRef idx="minor">
+      <a:schemeClr val="dk1"/>
+    </cs:fontRef>
+    <cs:spPr>
+      <a:ln>
+        <a:gradFill>
+          <a:gsLst>
+            <a:gs pos="100000">
+              <a:schemeClr val="dk1">
+                <a:lumMod val="95000"/>
+                <a:lumOff val="5000"/>
+                <a:alpha val="42000"/>
+              </a:schemeClr>
+            </a:gs>
+            <a:gs pos="0">
+              <a:schemeClr val="lt1">
+                <a:lumMod val="75000"/>
+                <a:alpha val="36000"/>
+              </a:schemeClr>
+            </a:gs>
+          </a:gsLst>
+          <a:lin ang="5400000" scaled="0"/>
+        </a:gradFill>
+      </a:ln>
+    </cs:spPr>
+  </cs:gridlineMinor>
+  <cs:hiLoLine>
+    <cs:lnRef idx="0"/>
+    <cs:fillRef idx="0"/>
+    <cs:effectRef idx="0"/>
+    <cs:fontRef idx="minor">
+      <a:schemeClr val="dk1"/>
+    </cs:fontRef>
+    <cs:spPr>
+      <a:ln w="9525">
+        <a:solidFill>
+          <a:schemeClr val="dk1">
+            <a:lumMod val="35000"/>
+            <a:lumOff val="65000"/>
+          </a:schemeClr>
+        </a:solidFill>
+        <a:prstDash val="dash"/>
+      </a:ln>
+    </cs:spPr>
+  </cs:hiLoLine>
+  <cs:leaderLine>
+    <cs:lnRef idx="0"/>
+    <cs:fillRef idx="0"/>
+    <cs:effectRef idx="0"/>
+    <cs:fontRef idx="minor">
+      <a:schemeClr val="dk1"/>
+    </cs:fontRef>
+    <cs:spPr>
+      <a:ln w="9525">
+        <a:solidFill>
+          <a:schemeClr val="dk1">
+            <a:lumMod val="50000"/>
+            <a:lumOff val="50000"/>
+          </a:schemeClr>
+        </a:solidFill>
+      </a:ln>
+    </cs:spPr>
+  </cs:leaderLine>
+  <cs:legend>
+    <cs:lnRef idx="0"/>
+    <cs:fillRef idx="0"/>
+    <cs:effectRef idx="0"/>
+    <cs:fontRef idx="minor">
+      <a:schemeClr val="dk1">
+        <a:lumMod val="75000"/>
+        <a:lumOff val="25000"/>
+      </a:schemeClr>
+    </cs:fontRef>
+    <cs:spPr>
+      <a:solidFill>
+        <a:schemeClr val="lt1">
+          <a:lumMod val="95000"/>
+          <a:alpha val="39000"/>
+        </a:schemeClr>
+      </a:solidFill>
+    </cs:spPr>
+    <cs:defRPr sz="1197" kern="1200"/>
+  </cs:legend>
+  <cs:plotArea>
+    <cs:lnRef idx="0"/>
+    <cs:fillRef idx="0"/>
+    <cs:effectRef idx="0"/>
+    <cs:fontRef idx="minor">
+      <a:schemeClr val="dk1"/>
+    </cs:fontRef>
+  </cs:plotArea>
+  <cs:plotArea3D>
+    <cs:lnRef idx="0"/>
+    <cs:fillRef idx="0"/>
+    <cs:effectRef idx="0"/>
+    <cs:fontRef idx="minor">
+      <a:schemeClr val="dk1"/>
+    </cs:fontRef>
+  </cs:plotArea3D>
+  <cs:seriesAxis>
+    <cs:lnRef idx="0"/>
+    <cs:fillRef idx="0"/>
+    <cs:effectRef idx="0"/>
+    <cs:fontRef idx="minor">
+      <a:schemeClr val="dk1">
+        <a:lumMod val="75000"/>
+        <a:lumOff val="25000"/>
+      </a:schemeClr>
+    </cs:fontRef>
+    <cs:spPr>
+      <a:ln w="31750" cap="flat" cmpd="sng" algn="ctr">
+        <a:solidFill>
+          <a:schemeClr val="dk1">
+            <a:lumMod val="75000"/>
+            <a:lumOff val="25000"/>
+          </a:schemeClr>
+        </a:solidFill>
+        <a:round/>
+      </a:ln>
+    </cs:spPr>
+    <cs:defRPr sz="1197" kern="1200"/>
+  </cs:seriesAxis>
+  <cs:seriesLine>
+    <cs:lnRef idx="0"/>
+    <cs:fillRef idx="0"/>
+    <cs:effectRef idx="0"/>
+    <cs:fontRef idx="minor">
+      <a:schemeClr val="dk1"/>
+    </cs:fontRef>
+    <cs:spPr>
+      <a:ln w="9525">
+        <a:solidFill>
+          <a:schemeClr val="dk1">
+            <a:lumMod val="50000"/>
+            <a:lumOff val="50000"/>
+          </a:schemeClr>
+        </a:solidFill>
+        <a:round/>
+      </a:ln>
+    </cs:spPr>
+  </cs:seriesLine>
+  <cs:title>
+    <cs:lnRef idx="0"/>
+    <cs:fillRef idx="0"/>
+    <cs:effectRef idx="0"/>
+    <cs:fontRef idx="minor">
+      <a:schemeClr val="dk1">
+        <a:lumMod val="75000"/>
+        <a:lumOff val="25000"/>
+      </a:schemeClr>
+    </cs:fontRef>
+    <cs:defRPr sz="2200" b="1" kern="1200" baseline="0"/>
+  </cs:title>
+  <cs:trendline>
+    <cs:lnRef idx="0">
+      <cs:styleClr val="auto"/>
+    </cs:lnRef>
+    <cs:fillRef idx="0"/>
+    <cs:effectRef idx="0"/>
+    <cs:fontRef idx="minor">
+      <a:schemeClr val="dk1"/>
+    </cs:fontRef>
+    <cs:spPr>
+      <a:ln w="19050" cap="rnd">
+        <a:solidFill>
+          <a:schemeClr val="phClr"/>
+        </a:solidFill>
+      </a:ln>
+    </cs:spPr>
+  </cs:trendline>
+  <cs:trendlineLabel>
+    <cs:lnRef idx="0"/>
+    <cs:fillRef idx="0"/>
+    <cs:effectRef idx="0"/>
+    <cs:fontRef idx="minor">
+      <a:schemeClr val="dk1">
+        <a:lumMod val="75000"/>
+        <a:lumOff val="25000"/>
+      </a:schemeClr>
+    </cs:fontRef>
+    <cs:defRPr sz="1197" kern="1200"/>
+  </cs:trendlineLabel>
+  <cs:upBar>
+    <cs:lnRef idx="0"/>
+    <cs:fillRef idx="0"/>
+    <cs:effectRef idx="0"/>
+    <cs:fontRef idx="minor">
+      <a:schemeClr val="dk1"/>
+    </cs:fontRef>
+    <cs:spPr>
+      <a:solidFill>
+        <a:schemeClr val="lt1"/>
+      </a:solidFill>
+      <a:ln w="9525">
+        <a:solidFill>
+          <a:schemeClr val="dk1">
+            <a:lumMod val="65000"/>
+            <a:lumOff val="35000"/>
+          </a:schemeClr>
+        </a:solidFill>
+      </a:ln>
+    </cs:spPr>
+  </cs:upBar>
+  <cs:valueAxis>
+    <cs:lnRef idx="0"/>
+    <cs:fillRef idx="0"/>
+    <cs:effectRef idx="0"/>
+    <cs:fontRef idx="minor">
+      <a:schemeClr val="dk1">
+        <a:lumMod val="75000"/>
+        <a:lumOff val="25000"/>
+      </a:schemeClr>
+    </cs:fontRef>
+    <cs:spPr>
+      <a:ln>
+        <a:noFill/>
+      </a:ln>
+    </cs:spPr>
+    <cs:defRPr sz="1197" kern="1200"/>
+  </cs:valueAxis>
+  <cs:wall>
+    <cs:lnRef idx="0"/>
+    <cs:fillRef idx="0"/>
+    <cs:effectRef idx="0"/>
+    <cs:fontRef idx="minor">
+      <a:schemeClr val="dk1"/>
+    </cs:fontRef>
+  </cs:wall>
+</cs:chartStyle>
+</file>
+
+<file path=ppt/notesMasters/notesMaster1.xml><?xml version="1.0" encoding="utf-8"?>
+<p:notesMaster xmlns:a="http://schemas.openxmlformats.org/drawingml/2006/main" xmlns:r="http://schemas.openxmlformats.org/officeDocument/2006/relationships" xmlns:p="http://schemas.openxmlformats.org/presentationml/2006/main">
+  <p:cSld>
+    <p:bg>
+      <p:bgRef idx="1001">
+        <a:schemeClr val="bg1"/>
+      </p:bgRef>
+    </p:bg>
+    <p:spTree>
+      <p:nvGrpSpPr>
+        <p:cNvPr id="1" name=""/>
+        <p:cNvGrpSpPr/>
+        <p:nvPr/>
+      </p:nvGrpSpPr>
+      <p:grpSpPr>
+        <a:xfrm>
+          <a:off x="0" y="0"/>
+          <a:ext cx="0" cy="0"/>
+          <a:chOff x="0" y="0"/>
+          <a:chExt cx="0" cy="0"/>
+        </a:xfrm>
+      </p:grpSpPr>
+      <p:sp>
+        <p:nvSpPr>
+          <p:cNvPr id="2" name="Header Placeholder 1"/>
+          <p:cNvSpPr>
+            <a:spLocks noGrp="1"/>
+          </p:cNvSpPr>
+          <p:nvPr>
+            <p:ph type="hdr" sz="quarter"/>
+          </p:nvPr>
+        </p:nvSpPr>
+        <p:spPr>
+          <a:xfrm>
+            <a:off x="0" y="0"/>
+            <a:ext cx="2971800" cy="458788"/>
+          </a:xfrm>
+          <a:prstGeom prst="rect">
+            <a:avLst/>
+          </a:prstGeom>
+        </p:spPr>
+        <p:txBody>
+          <a:bodyPr vert="horz" lIns="91440" tIns="45720" rIns="91440" bIns="45720" rtlCol="0"/>
+          <a:lstStyle>
+            <a:lvl1pPr algn="l">
+              <a:defRPr sz="1200"/>
+            </a:lvl1pPr>
+          </a:lstStyle>
+          <a:p>
+            <a:endParaRPr lang="en-US"/>
+          </a:p>
+        </p:txBody>
+      </p:sp>
+      <p:sp>
+        <p:nvSpPr>
+          <p:cNvPr id="3" name="Date Placeholder 2"/>
+          <p:cNvSpPr>
+            <a:spLocks noGrp="1"/>
+          </p:cNvSpPr>
+          <p:nvPr>
+            <p:ph type="dt" idx="1"/>
+          </p:nvPr>
+        </p:nvSpPr>
+        <p:spPr>
+          <a:xfrm>
+            <a:off x="3884613" y="0"/>
+            <a:ext cx="2971800" cy="458788"/>
+          </a:xfrm>
+          <a:prstGeom prst="rect">
+            <a:avLst/>
+          </a:prstGeom>
+        </p:spPr>
+        <p:txBody>
+          <a:bodyPr vert="horz" lIns="91440" tIns="45720" rIns="91440" bIns="45720" rtlCol="0"/>
+          <a:lstStyle>
+            <a:lvl1pPr algn="r">
+              <a:defRPr sz="1200"/>
+            </a:lvl1pPr>
+          </a:lstStyle>
+          <a:p>
+            <a:fld id="{15C719F3-7ED5-47B6-B3B2-F7A8782B8BD1}" type="datetimeFigureOut">
+              <a:rPr lang="en-US" smtClean="0"/>
+              <a:t>3/7/2026</a:t>
+            </a:fld>
+            <a:endParaRPr lang="en-US"/>
+          </a:p>
+        </p:txBody>
+      </p:sp>
+      <p:sp>
+        <p:nvSpPr>
+          <p:cNvPr id="4" name="Slide Image Placeholder 3"/>
+          <p:cNvSpPr>
+            <a:spLocks noGrp="1" noRot="1" noChangeAspect="1"/>
+          </p:cNvSpPr>
+          <p:nvPr>
+            <p:ph type="sldImg" idx="2"/>
+          </p:nvPr>
+        </p:nvSpPr>
+        <p:spPr>
+          <a:xfrm>
+            <a:off x="685800" y="1143000"/>
+            <a:ext cx="5486400" cy="3086100"/>
+          </a:xfrm>
+          <a:prstGeom prst="rect">
+            <a:avLst/>
+          </a:prstGeom>
+          <a:noFill/>
+          <a:ln w="12700">
+            <a:solidFill>
+              <a:prstClr val="black"/>
+            </a:solidFill>
+          </a:ln>
+        </p:spPr>
+        <p:txBody>
+          <a:bodyPr vert="horz" lIns="91440" tIns="45720" rIns="91440" bIns="45720" rtlCol="0" anchor="ctr"/>
+          <a:lstStyle/>
+          <a:p>
+            <a:endParaRPr lang="en-US"/>
+          </a:p>
+        </p:txBody>
+      </p:sp>
+      <p:sp>
+        <p:nvSpPr>
+          <p:cNvPr id="5" name="Notes Placeholder 4"/>
+          <p:cNvSpPr>
+            <a:spLocks noGrp="1"/>
+          </p:cNvSpPr>
+          <p:nvPr>
+            <p:ph type="body" sz="quarter" idx="3"/>
+          </p:nvPr>
+        </p:nvSpPr>
+        <p:spPr>
+          <a:xfrm>
+            <a:off x="685800" y="4400550"/>
+            <a:ext cx="5486400" cy="3600450"/>
+          </a:xfrm>
+          <a:prstGeom prst="rect">
+            <a:avLst/>
+          </a:prstGeom>
+        </p:spPr>
+        <p:txBody>
+          <a:bodyPr vert="horz" lIns="91440" tIns="45720" rIns="91440" bIns="45720" rtlCol="0"/>
+          <a:lstStyle/>
+          <a:p>
+            <a:pPr lvl="0"/>
+            <a:r>
+              <a:rPr lang="en-US"/>
+              <a:t>Click to edit Master text styles</a:t>
+            </a:r>
+          </a:p>
+          <a:p>
+            <a:pPr lvl="1"/>
+            <a:r>
+              <a:rPr lang="en-US"/>
+              <a:t>Second level</a:t>
+            </a:r>
+          </a:p>
+          <a:p>
+            <a:pPr lvl="2"/>
+            <a:r>
+              <a:rPr lang="en-US"/>
+              <a:t>Third level</a:t>
+            </a:r>
+          </a:p>
+          <a:p>
+            <a:pPr lvl="3"/>
+            <a:r>
+              <a:rPr lang="en-US"/>
+              <a:t>Fourth level</a:t>
+            </a:r>
+          </a:p>
+          <a:p>
+            <a:pPr lvl="4"/>
+            <a:r>
+              <a:rPr lang="en-US"/>
+              <a:t>Fifth level</a:t>
+            </a:r>
+          </a:p>
+        </p:txBody>
+      </p:sp>
+      <p:sp>
+        <p:nvSpPr>
+          <p:cNvPr id="6" name="Footer Placeholder 5"/>
+          <p:cNvSpPr>
+            <a:spLocks noGrp="1"/>
+          </p:cNvSpPr>
+          <p:nvPr>
+            <p:ph type="ftr" sz="quarter" idx="4"/>
+          </p:nvPr>
+        </p:nvSpPr>
+        <p:spPr>
+          <a:xfrm>
+            <a:off x="0" y="8685213"/>
+            <a:ext cx="2971800" cy="458787"/>
+          </a:xfrm>
+          <a:prstGeom prst="rect">
+            <a:avLst/>
+          </a:prstGeom>
+        </p:spPr>
+        <p:txBody>
+          <a:bodyPr vert="horz" lIns="91440" tIns="45720" rIns="91440" bIns="45720" rtlCol="0" anchor="b"/>
+          <a:lstStyle>
+            <a:lvl1pPr algn="l">
+              <a:defRPr sz="1200"/>
+            </a:lvl1pPr>
+          </a:lstStyle>
+          <a:p>
+            <a:endParaRPr lang="en-US"/>
+          </a:p>
+        </p:txBody>
+      </p:sp>
+      <p:sp>
+        <p:nvSpPr>
+          <p:cNvPr id="7" name="Slide Number Placeholder 6"/>
+          <p:cNvSpPr>
+            <a:spLocks noGrp="1"/>
+          </p:cNvSpPr>
+          <p:nvPr>
+            <p:ph type="sldNum" sz="quarter" idx="5"/>
+          </p:nvPr>
+        </p:nvSpPr>
+        <p:spPr>
+          <a:xfrm>
+            <a:off x="3884613" y="8685213"/>
+            <a:ext cx="2971800" cy="458787"/>
+          </a:xfrm>
+          <a:prstGeom prst="rect">
+            <a:avLst/>
+          </a:prstGeom>
+        </p:spPr>
+        <p:txBody>
+          <a:bodyPr vert="horz" lIns="91440" tIns="45720" rIns="91440" bIns="45720" rtlCol="0" anchor="b"/>
+          <a:lstStyle>
+            <a:lvl1pPr algn="r">
+              <a:defRPr sz="1200"/>
+            </a:lvl1pPr>
+          </a:lstStyle>
+          <a:p>
+            <a:fld id="{39BC37B4-3C80-4A9A-BE88-BA132B6FB665}" type="slidenum">
+              <a:rPr lang="en-US" smtClean="0"/>
+              <a:t>‹#›</a:t>
+            </a:fld>
+            <a:endParaRPr lang="en-US"/>
+          </a:p>
+        </p:txBody>
+      </p:sp>
+    </p:spTree>
+    <p:extLst>
+      <p:ext uri="{BB962C8B-B14F-4D97-AF65-F5344CB8AC3E}">
+        <p14:creationId xmlns:p14="http://schemas.microsoft.com/office/powerpoint/2010/main" val="1671639568"/>
+      </p:ext>
+    </p:extLst>
+  </p:cSld>
+  <p:clrMap bg1="lt1" tx1="dk1" bg2="lt2" tx2="dk2" accent1="accent1" accent2="accent2" accent3="accent3" accent4="accent4" accent5="accent5" accent6="accent6" hlink="hlink" folHlink="folHlink"/>
+  <p:notesStyle>
+    <a:lvl1pPr marL="0" algn="l" defTabSz="914400" rtl="0" eaLnBrk="1" latinLnBrk="0" hangingPunct="1">
+      <a:defRPr sz="1200" kern="1200">
+        <a:solidFill>
+          <a:schemeClr val="tx1"/>
+        </a:solidFill>
+        <a:latin typeface="+mn-lt"/>
+        <a:ea typeface="+mn-ea"/>
+        <a:cs typeface="+mn-cs"/>
+      </a:defRPr>
+    </a:lvl1pPr>
+    <a:lvl2pPr marL="457200" algn="l" defTabSz="914400" rtl="0" eaLnBrk="1" latinLnBrk="0" hangingPunct="1">
+      <a:defRPr sz="1200" kern="1200">
+        <a:solidFill>
+          <a:schemeClr val="tx1"/>
+        </a:solidFill>
+        <a:latin typeface="+mn-lt"/>
+        <a:ea typeface="+mn-ea"/>
+        <a:cs typeface="+mn-cs"/>
+      </a:defRPr>
+    </a:lvl2pPr>
+    <a:lvl3pPr marL="914400" algn="l" defTabSz="914400" rtl="0" eaLnBrk="1" latinLnBrk="0" hangingPunct="1">
+      <a:defRPr sz="1200" kern="1200">
+        <a:solidFill>
+          <a:schemeClr val="tx1"/>
+        </a:solidFill>
+        <a:latin typeface="+mn-lt"/>
+        <a:ea typeface="+mn-ea"/>
+        <a:cs typeface="+mn-cs"/>
+      </a:defRPr>
+    </a:lvl3pPr>
+    <a:lvl4pPr marL="1371600" algn="l" defTabSz="914400" rtl="0" eaLnBrk="1" latinLnBrk="0" hangingPunct="1">
+      <a:defRPr sz="1200" kern="1200">
+        <a:solidFill>
+          <a:schemeClr val="tx1"/>
+        </a:solidFill>
+        <a:latin typeface="+mn-lt"/>
+        <a:ea typeface="+mn-ea"/>
+        <a:cs typeface="+mn-cs"/>
+      </a:defRPr>
+    </a:lvl4pPr>
+    <a:lvl5pPr marL="1828800" algn="l" defTabSz="914400" rtl="0" eaLnBrk="1" latinLnBrk="0" hangingPunct="1">
+      <a:defRPr sz="1200" kern="1200">
+        <a:solidFill>
+          <a:schemeClr val="tx1"/>
+        </a:solidFill>
+        <a:latin typeface="+mn-lt"/>
+        <a:ea typeface="+mn-ea"/>
+        <a:cs typeface="+mn-cs"/>
+      </a:defRPr>
+    </a:lvl5pPr>
+    <a:lvl6pPr marL="2286000" algn="l" defTabSz="914400" rtl="0" eaLnBrk="1" latinLnBrk="0" hangingPunct="1">
+      <a:defRPr sz="1200" kern="1200">
+        <a:solidFill>
+          <a:schemeClr val="tx1"/>
+        </a:solidFill>
+        <a:latin typeface="+mn-lt"/>
+        <a:ea typeface="+mn-ea"/>
+        <a:cs typeface="+mn-cs"/>
+      </a:defRPr>
+    </a:lvl6pPr>
+    <a:lvl7pPr marL="2743200" algn="l" defTabSz="914400" rtl="0" eaLnBrk="1" latinLnBrk="0" hangingPunct="1">
+      <a:defRPr sz="1200" kern="1200">
+        <a:solidFill>
+          <a:schemeClr val="tx1"/>
+        </a:solidFill>
+        <a:latin typeface="+mn-lt"/>
+        <a:ea typeface="+mn-ea"/>
+        <a:cs typeface="+mn-cs"/>
+      </a:defRPr>
+    </a:lvl7pPr>
+    <a:lvl8pPr marL="3200400" algn="l" defTabSz="914400" rtl="0" eaLnBrk="1" latinLnBrk="0" hangingPunct="1">
+      <a:defRPr sz="1200" kern="1200">
+        <a:solidFill>
+          <a:schemeClr val="tx1"/>
+        </a:solidFill>
+        <a:latin typeface="+mn-lt"/>
+        <a:ea typeface="+mn-ea"/>
+        <a:cs typeface="+mn-cs"/>
+      </a:defRPr>
+    </a:lvl8pPr>
+    <a:lvl9pPr marL="3657600" algn="l" defTabSz="914400" rtl="0" eaLnBrk="1" latinLnBrk="0" hangingPunct="1">
+      <a:defRPr sz="1200" kern="1200">
+        <a:solidFill>
+          <a:schemeClr val="tx1"/>
+        </a:solidFill>
+        <a:latin typeface="+mn-lt"/>
+        <a:ea typeface="+mn-ea"/>
+        <a:cs typeface="+mn-cs"/>
+      </a:defRPr>
+    </a:lvl9pPr>
+  </p:notesStyle>
+</p:notesMaster>
+</file>
+
+<file path=ppt/notesSlides/notesSlide1.xml><?xml version="1.0" encoding="utf-8"?>
+<p:notes xmlns:a="http://schemas.openxmlformats.org/drawingml/2006/main" xmlns:r="http://schemas.openxmlformats.org/officeDocument/2006/relationships" xmlns:p="http://schemas.openxmlformats.org/presentationml/2006/main">
+  <p:cSld>
+    <p:spTree>
+      <p:nvGrpSpPr>
+        <p:cNvPr id="1" name=""/>
+        <p:cNvGrpSpPr/>
+        <p:nvPr/>
+      </p:nvGrpSpPr>
+      <p:grpSpPr>
+        <a:xfrm>
+          <a:off x="0" y="0"/>
+          <a:ext cx="0" cy="0"/>
+          <a:chOff x="0" y="0"/>
+          <a:chExt cx="0" cy="0"/>
+        </a:xfrm>
+      </p:grpSpPr>
+      <p:sp>
+        <p:nvSpPr>
+          <p:cNvPr id="2" name="Slide Image Placeholder 1"/>
+          <p:cNvSpPr>
+            <a:spLocks noGrp="1" noRot="1" noChangeAspect="1"/>
+          </p:cNvSpPr>
+          <p:nvPr>
+            <p:ph type="sldImg"/>
+          </p:nvPr>
+        </p:nvSpPr>
+        <p:spPr/>
+      </p:sp>
+      <p:sp>
+        <p:nvSpPr>
+          <p:cNvPr id="3" name="Notes Placeholder 2"/>
+          <p:cNvSpPr>
+            <a:spLocks noGrp="1"/>
+          </p:cNvSpPr>
+          <p:nvPr>
+            <p:ph type="body" idx="1"/>
+          </p:nvPr>
+        </p:nvSpPr>
+        <p:spPr/>
+        <p:txBody>
+          <a:bodyPr/>
+          <a:lstStyle/>
+          <a:p>
+            <a:pPr marL="0" marR="0" lvl="0" indent="0" algn="l" defTabSz="914400" rtl="0" eaLnBrk="1" fontAlgn="auto" latinLnBrk="0" hangingPunct="1">
+              <a:lnSpc>
+                <a:spcPct val="100000"/>
+              </a:lnSpc>
+              <a:spcBef>
+                <a:spcPts val="0"/>
+              </a:spcBef>
+              <a:spcAft>
+                <a:spcPts val="0"/>
+              </a:spcAft>
+              <a:buClrTx/>
+              <a:buSzTx/>
+              <a:buFontTx/>
+              <a:buNone/>
+              <a:tabLst/>
+              <a:defRPr/>
+            </a:pPr>
+            <a:r>
+              <a:rPr lang="en-US" dirty="0"/>
+              <a:t>The analysis of the 2019 Trip data shows that Subscribers have an average ride length of 13.89 minutes while Customers average 61.93 minutes. The 2020 Trip data shows that Subscribers average 12.68 minutes while Customers average 95.79 minutes.</a:t>
+            </a:r>
+          </a:p>
+          <a:p>
+            <a:endParaRPr lang="en-US" dirty="0"/>
+          </a:p>
+        </p:txBody>
+      </p:sp>
+      <p:sp>
+        <p:nvSpPr>
+          <p:cNvPr id="4" name="Slide Number Placeholder 3"/>
+          <p:cNvSpPr>
+            <a:spLocks noGrp="1"/>
+          </p:cNvSpPr>
+          <p:nvPr>
+            <p:ph type="sldNum" sz="quarter" idx="5"/>
+          </p:nvPr>
+        </p:nvSpPr>
+        <p:spPr/>
+        <p:txBody>
+          <a:bodyPr/>
+          <a:lstStyle/>
+          <a:p>
+            <a:fld id="{39BC37B4-3C80-4A9A-BE88-BA132B6FB665}" type="slidenum">
+              <a:rPr lang="en-US" smtClean="0"/>
+              <a:t>4</a:t>
+            </a:fld>
+            <a:endParaRPr lang="en-US"/>
+          </a:p>
+        </p:txBody>
+      </p:sp>
+    </p:spTree>
+    <p:extLst>
+      <p:ext uri="{BB962C8B-B14F-4D97-AF65-F5344CB8AC3E}">
+        <p14:creationId xmlns:p14="http://schemas.microsoft.com/office/powerpoint/2010/main" val="4116743630"/>
+      </p:ext>
+    </p:extLst>
+  </p:cSld>
+  <p:clrMapOvr>
+    <a:masterClrMapping/>
+  </p:clrMapOvr>
+</p:notes>
+</file>
+
 <file path=ppt/slideLayouts/slideLayout1.xml><?xml version="1.0" encoding="utf-8"?>
-<p:sldLayout xmlns:a="http://schemas.openxmlformats.org/drawingml/2006/main" xmlns:r="http://schemas.openxmlformats.org/officeDocument/2006/relationships" xmlns:p="http://schemas.openxmlformats.org/presentationml/2006/main" type="title" preserve="1">
+<p:sldLayout xmlns:a="http://schemas.openxmlformats.org/drawingml/2006/main" xmlns:r="http://schemas.openxmlformats.org/officeDocument/2006/relationships" xmlns:p="http://schemas.openxmlformats.org/presentationml/2006/main" showMasterSp="0" type="title" preserve="1">
   <p:cSld name="Title Slide">
     <p:spTree>
       <p:nvGrpSpPr>
@@ -147,6 +1771,559 @@
           <a:chExt cx="0" cy="0"/>
         </a:xfrm>
       </p:grpSpPr>
+      <p:grpSp>
+        <p:nvGrpSpPr>
+          <p:cNvPr id="16" name="Group 15"/>
+          <p:cNvGrpSpPr/>
+          <p:nvPr/>
+        </p:nvGrpSpPr>
+        <p:grpSpPr>
+          <a:xfrm>
+            <a:off x="0" y="-6350"/>
+            <a:ext cx="9144000" cy="5149850"/>
+            <a:chOff x="0" y="-8467"/>
+            <a:chExt cx="12192000" cy="6866467"/>
+          </a:xfrm>
+        </p:grpSpPr>
+        <p:sp>
+          <p:nvSpPr>
+            <p:cNvPr id="15" name="Freeform 14"/>
+            <p:cNvSpPr/>
+            <p:nvPr/>
+          </p:nvSpPr>
+          <p:spPr>
+            <a:xfrm>
+              <a:off x="0" y="-7862"/>
+              <a:ext cx="863600" cy="5698067"/>
+            </a:xfrm>
+            <a:custGeom>
+              <a:avLst/>
+              <a:gdLst/>
+              <a:ahLst/>
+              <a:cxnLst/>
+              <a:rect l="l" t="t" r="r" b="b"/>
+              <a:pathLst>
+                <a:path w="863600" h="5698067">
+                  <a:moveTo>
+                    <a:pt x="0" y="8467"/>
+                  </a:moveTo>
+                  <a:lnTo>
+                    <a:pt x="863600" y="0"/>
+                  </a:lnTo>
+                  <a:lnTo>
+                    <a:pt x="863600" y="16934"/>
+                  </a:lnTo>
+                  <a:lnTo>
+                    <a:pt x="0" y="5698067"/>
+                  </a:lnTo>
+                  <a:lnTo>
+                    <a:pt x="0" y="8467"/>
+                  </a:lnTo>
+                  <a:close/>
+                </a:path>
+              </a:pathLst>
+            </a:custGeom>
+            <a:solidFill>
+              <a:schemeClr val="accent1">
+                <a:alpha val="70000"/>
+              </a:schemeClr>
+            </a:solidFill>
+            <a:ln>
+              <a:noFill/>
+            </a:ln>
+            <a:effectLst/>
+          </p:spPr>
+          <p:style>
+            <a:lnRef idx="1">
+              <a:schemeClr val="accent1"/>
+            </a:lnRef>
+            <a:fillRef idx="3">
+              <a:schemeClr val="accent1"/>
+            </a:fillRef>
+            <a:effectRef idx="2">
+              <a:schemeClr val="accent1"/>
+            </a:effectRef>
+            <a:fontRef idx="minor">
+              <a:schemeClr val="lt1"/>
+            </a:fontRef>
+          </p:style>
+        </p:sp>
+        <p:cxnSp>
+          <p:nvCxnSpPr>
+            <p:cNvPr id="19" name="Straight Connector 18"/>
+            <p:cNvCxnSpPr/>
+            <p:nvPr/>
+          </p:nvCxnSpPr>
+          <p:spPr>
+            <a:xfrm>
+              <a:off x="9371012" y="0"/>
+              <a:ext cx="1219200" cy="6858000"/>
+            </a:xfrm>
+            <a:prstGeom prst="line">
+              <a:avLst/>
+            </a:prstGeom>
+            <a:ln w="9525">
+              <a:solidFill>
+                <a:schemeClr val="accent1">
+                  <a:alpha val="70000"/>
+                </a:schemeClr>
+              </a:solidFill>
+            </a:ln>
+          </p:spPr>
+          <p:style>
+            <a:lnRef idx="2">
+              <a:schemeClr val="accent1"/>
+            </a:lnRef>
+            <a:fillRef idx="0">
+              <a:schemeClr val="accent1"/>
+            </a:fillRef>
+            <a:effectRef idx="1">
+              <a:schemeClr val="accent1"/>
+            </a:effectRef>
+            <a:fontRef idx="minor">
+              <a:schemeClr val="tx1"/>
+            </a:fontRef>
+          </p:style>
+        </p:cxnSp>
+        <p:cxnSp>
+          <p:nvCxnSpPr>
+            <p:cNvPr id="20" name="Straight Connector 19"/>
+            <p:cNvCxnSpPr/>
+            <p:nvPr/>
+          </p:nvCxnSpPr>
+          <p:spPr>
+            <a:xfrm flipH="1">
+              <a:off x="7425267" y="3681413"/>
+              <a:ext cx="4763558" cy="3176587"/>
+            </a:xfrm>
+            <a:prstGeom prst="line">
+              <a:avLst/>
+            </a:prstGeom>
+            <a:ln w="9525">
+              <a:solidFill>
+                <a:schemeClr val="accent1">
+                  <a:alpha val="70000"/>
+                </a:schemeClr>
+              </a:solidFill>
+            </a:ln>
+          </p:spPr>
+          <p:style>
+            <a:lnRef idx="2">
+              <a:schemeClr val="accent1"/>
+            </a:lnRef>
+            <a:fillRef idx="0">
+              <a:schemeClr val="accent1"/>
+            </a:fillRef>
+            <a:effectRef idx="1">
+              <a:schemeClr val="accent1"/>
+            </a:effectRef>
+            <a:fontRef idx="minor">
+              <a:schemeClr val="tx1"/>
+            </a:fontRef>
+          </p:style>
+        </p:cxnSp>
+        <p:sp>
+          <p:nvSpPr>
+            <p:cNvPr id="21" name="Rectangle 23"/>
+            <p:cNvSpPr/>
+            <p:nvPr/>
+          </p:nvSpPr>
+          <p:spPr>
+            <a:xfrm>
+              <a:off x="9181476" y="-8467"/>
+              <a:ext cx="3007349" cy="6866467"/>
+            </a:xfrm>
+            <a:custGeom>
+              <a:avLst/>
+              <a:gdLst/>
+              <a:ahLst/>
+              <a:cxnLst/>
+              <a:rect l="l" t="t" r="r" b="b"/>
+              <a:pathLst>
+                <a:path w="3007349" h="6866467">
+                  <a:moveTo>
+                    <a:pt x="2045532" y="0"/>
+                  </a:moveTo>
+                  <a:lnTo>
+                    <a:pt x="3007349" y="0"/>
+                  </a:lnTo>
+                  <a:lnTo>
+                    <a:pt x="3007349" y="6866467"/>
+                  </a:lnTo>
+                  <a:lnTo>
+                    <a:pt x="0" y="6866467"/>
+                  </a:lnTo>
+                  <a:lnTo>
+                    <a:pt x="2045532" y="0"/>
+                  </a:lnTo>
+                  <a:close/>
+                </a:path>
+              </a:pathLst>
+            </a:custGeom>
+            <a:solidFill>
+              <a:schemeClr val="accent1">
+                <a:alpha val="36000"/>
+              </a:schemeClr>
+            </a:solidFill>
+            <a:ln>
+              <a:noFill/>
+            </a:ln>
+            <a:effectLst/>
+          </p:spPr>
+          <p:style>
+            <a:lnRef idx="1">
+              <a:schemeClr val="accent1"/>
+            </a:lnRef>
+            <a:fillRef idx="3">
+              <a:schemeClr val="accent1"/>
+            </a:fillRef>
+            <a:effectRef idx="2">
+              <a:schemeClr val="accent1"/>
+            </a:effectRef>
+            <a:fontRef idx="minor">
+              <a:schemeClr val="lt1"/>
+            </a:fontRef>
+          </p:style>
+        </p:sp>
+        <p:sp>
+          <p:nvSpPr>
+            <p:cNvPr id="22" name="Rectangle 25"/>
+            <p:cNvSpPr/>
+            <p:nvPr/>
+          </p:nvSpPr>
+          <p:spPr>
+            <a:xfrm>
+              <a:off x="9603442" y="-8467"/>
+              <a:ext cx="2588558" cy="6866467"/>
+            </a:xfrm>
+            <a:custGeom>
+              <a:avLst/>
+              <a:gdLst/>
+              <a:ahLst/>
+              <a:cxnLst/>
+              <a:rect l="l" t="t" r="r" b="b"/>
+              <a:pathLst>
+                <a:path w="2573311" h="6866467">
+                  <a:moveTo>
+                    <a:pt x="0" y="0"/>
+                  </a:moveTo>
+                  <a:lnTo>
+                    <a:pt x="2573311" y="0"/>
+                  </a:lnTo>
+                  <a:lnTo>
+                    <a:pt x="2573311" y="6866467"/>
+                  </a:lnTo>
+                  <a:lnTo>
+                    <a:pt x="1202336" y="6866467"/>
+                  </a:lnTo>
+                  <a:lnTo>
+                    <a:pt x="0" y="0"/>
+                  </a:lnTo>
+                  <a:close/>
+                </a:path>
+              </a:pathLst>
+            </a:custGeom>
+            <a:solidFill>
+              <a:schemeClr val="accent1">
+                <a:alpha val="20000"/>
+              </a:schemeClr>
+            </a:solidFill>
+            <a:ln>
+              <a:noFill/>
+            </a:ln>
+            <a:effectLst/>
+          </p:spPr>
+          <p:style>
+            <a:lnRef idx="1">
+              <a:schemeClr val="accent1"/>
+            </a:lnRef>
+            <a:fillRef idx="3">
+              <a:schemeClr val="accent1"/>
+            </a:fillRef>
+            <a:effectRef idx="2">
+              <a:schemeClr val="accent1"/>
+            </a:effectRef>
+            <a:fontRef idx="minor">
+              <a:schemeClr val="lt1"/>
+            </a:fontRef>
+          </p:style>
+        </p:sp>
+        <p:sp>
+          <p:nvSpPr>
+            <p:cNvPr id="23" name="Isosceles Triangle 22"/>
+            <p:cNvSpPr/>
+            <p:nvPr/>
+          </p:nvSpPr>
+          <p:spPr>
+            <a:xfrm>
+              <a:off x="8932333" y="3048000"/>
+              <a:ext cx="3259667" cy="3810000"/>
+            </a:xfrm>
+            <a:prstGeom prst="triangle">
+              <a:avLst>
+                <a:gd name="adj" fmla="val 100000"/>
+              </a:avLst>
+            </a:prstGeom>
+            <a:solidFill>
+              <a:schemeClr val="accent1">
+                <a:lumMod val="75000"/>
+                <a:alpha val="66000"/>
+              </a:schemeClr>
+            </a:solidFill>
+            <a:ln>
+              <a:noFill/>
+            </a:ln>
+            <a:effectLst/>
+          </p:spPr>
+          <p:style>
+            <a:lnRef idx="1">
+              <a:schemeClr val="accent1"/>
+            </a:lnRef>
+            <a:fillRef idx="3">
+              <a:schemeClr val="accent1"/>
+            </a:fillRef>
+            <a:effectRef idx="2">
+              <a:schemeClr val="accent1"/>
+            </a:effectRef>
+            <a:fontRef idx="minor">
+              <a:schemeClr val="lt1"/>
+            </a:fontRef>
+          </p:style>
+        </p:sp>
+        <p:sp>
+          <p:nvSpPr>
+            <p:cNvPr id="24" name="Rectangle 27"/>
+            <p:cNvSpPr/>
+            <p:nvPr/>
+          </p:nvSpPr>
+          <p:spPr>
+            <a:xfrm>
+              <a:off x="9334500" y="-8467"/>
+              <a:ext cx="2854326" cy="6866467"/>
+            </a:xfrm>
+            <a:custGeom>
+              <a:avLst/>
+              <a:gdLst/>
+              <a:ahLst/>
+              <a:cxnLst/>
+              <a:rect l="l" t="t" r="r" b="b"/>
+              <a:pathLst>
+                <a:path w="2858013" h="6866467">
+                  <a:moveTo>
+                    <a:pt x="0" y="0"/>
+                  </a:moveTo>
+                  <a:lnTo>
+                    <a:pt x="2858013" y="0"/>
+                  </a:lnTo>
+                  <a:lnTo>
+                    <a:pt x="2858013" y="6866467"/>
+                  </a:lnTo>
+                  <a:lnTo>
+                    <a:pt x="2473942" y="6866467"/>
+                  </a:lnTo>
+                  <a:lnTo>
+                    <a:pt x="0" y="0"/>
+                  </a:lnTo>
+                  <a:close/>
+                </a:path>
+              </a:pathLst>
+            </a:custGeom>
+            <a:solidFill>
+              <a:schemeClr val="accent1">
+                <a:lumMod val="75000"/>
+                <a:alpha val="50000"/>
+              </a:schemeClr>
+            </a:solidFill>
+            <a:ln>
+              <a:noFill/>
+            </a:ln>
+            <a:effectLst/>
+          </p:spPr>
+          <p:style>
+            <a:lnRef idx="1">
+              <a:schemeClr val="accent1"/>
+            </a:lnRef>
+            <a:fillRef idx="3">
+              <a:schemeClr val="accent1"/>
+            </a:fillRef>
+            <a:effectRef idx="2">
+              <a:schemeClr val="accent1"/>
+            </a:effectRef>
+            <a:fontRef idx="minor">
+              <a:schemeClr val="lt1"/>
+            </a:fontRef>
+          </p:style>
+        </p:sp>
+        <p:sp>
+          <p:nvSpPr>
+            <p:cNvPr id="25" name="Rectangle 28"/>
+            <p:cNvSpPr/>
+            <p:nvPr/>
+          </p:nvSpPr>
+          <p:spPr>
+            <a:xfrm>
+              <a:off x="10898730" y="-8467"/>
+              <a:ext cx="1290094" cy="6866467"/>
+            </a:xfrm>
+            <a:custGeom>
+              <a:avLst/>
+              <a:gdLst/>
+              <a:ahLst/>
+              <a:cxnLst/>
+              <a:rect l="l" t="t" r="r" b="b"/>
+              <a:pathLst>
+                <a:path w="1290094" h="6858000">
+                  <a:moveTo>
+                    <a:pt x="1019735" y="0"/>
+                  </a:moveTo>
+                  <a:lnTo>
+                    <a:pt x="1290094" y="0"/>
+                  </a:lnTo>
+                  <a:lnTo>
+                    <a:pt x="1290094" y="6858000"/>
+                  </a:lnTo>
+                  <a:lnTo>
+                    <a:pt x="0" y="6858000"/>
+                  </a:lnTo>
+                  <a:lnTo>
+                    <a:pt x="1019735" y="0"/>
+                  </a:lnTo>
+                  <a:close/>
+                </a:path>
+              </a:pathLst>
+            </a:custGeom>
+            <a:solidFill>
+              <a:schemeClr val="accent2">
+                <a:alpha val="70000"/>
+              </a:schemeClr>
+            </a:solidFill>
+            <a:ln>
+              <a:noFill/>
+            </a:ln>
+            <a:effectLst/>
+          </p:spPr>
+          <p:style>
+            <a:lnRef idx="1">
+              <a:schemeClr val="accent1"/>
+            </a:lnRef>
+            <a:fillRef idx="3">
+              <a:schemeClr val="accent1"/>
+            </a:fillRef>
+            <a:effectRef idx="2">
+              <a:schemeClr val="accent1"/>
+            </a:effectRef>
+            <a:fontRef idx="minor">
+              <a:schemeClr val="lt1"/>
+            </a:fontRef>
+          </p:style>
+        </p:sp>
+        <p:sp>
+          <p:nvSpPr>
+            <p:cNvPr id="26" name="Rectangle 29"/>
+            <p:cNvSpPr/>
+            <p:nvPr/>
+          </p:nvSpPr>
+          <p:spPr>
+            <a:xfrm>
+              <a:off x="10938999" y="-8467"/>
+              <a:ext cx="1249825" cy="6866467"/>
+            </a:xfrm>
+            <a:custGeom>
+              <a:avLst/>
+              <a:gdLst/>
+              <a:ahLst/>
+              <a:cxnLst/>
+              <a:rect l="l" t="t" r="r" b="b"/>
+              <a:pathLst>
+                <a:path w="1249825" h="6858000">
+                  <a:moveTo>
+                    <a:pt x="0" y="0"/>
+                  </a:moveTo>
+                  <a:lnTo>
+                    <a:pt x="1249825" y="0"/>
+                  </a:lnTo>
+                  <a:lnTo>
+                    <a:pt x="1249825" y="6858000"/>
+                  </a:lnTo>
+                  <a:lnTo>
+                    <a:pt x="1109382" y="6858000"/>
+                  </a:lnTo>
+                  <a:lnTo>
+                    <a:pt x="0" y="0"/>
+                  </a:lnTo>
+                  <a:close/>
+                </a:path>
+              </a:pathLst>
+            </a:custGeom>
+            <a:solidFill>
+              <a:schemeClr val="accent2">
+                <a:lumMod val="75000"/>
+                <a:alpha val="80000"/>
+              </a:schemeClr>
+            </a:solidFill>
+            <a:ln>
+              <a:noFill/>
+            </a:ln>
+            <a:effectLst/>
+          </p:spPr>
+          <p:style>
+            <a:lnRef idx="1">
+              <a:schemeClr val="accent1"/>
+            </a:lnRef>
+            <a:fillRef idx="3">
+              <a:schemeClr val="accent1"/>
+            </a:fillRef>
+            <a:effectRef idx="2">
+              <a:schemeClr val="accent1"/>
+            </a:effectRef>
+            <a:fontRef idx="minor">
+              <a:schemeClr val="lt1"/>
+            </a:fontRef>
+          </p:style>
+        </p:sp>
+        <p:sp>
+          <p:nvSpPr>
+            <p:cNvPr id="27" name="Isosceles Triangle 26"/>
+            <p:cNvSpPr/>
+            <p:nvPr/>
+          </p:nvSpPr>
+          <p:spPr>
+            <a:xfrm>
+              <a:off x="10371666" y="3589867"/>
+              <a:ext cx="1817159" cy="3268133"/>
+            </a:xfrm>
+            <a:prstGeom prst="triangle">
+              <a:avLst>
+                <a:gd name="adj" fmla="val 100000"/>
+              </a:avLst>
+            </a:prstGeom>
+            <a:solidFill>
+              <a:schemeClr val="accent1">
+                <a:lumMod val="75000"/>
+                <a:alpha val="66000"/>
+              </a:schemeClr>
+            </a:solidFill>
+            <a:ln>
+              <a:noFill/>
+            </a:ln>
+            <a:effectLst/>
+          </p:spPr>
+          <p:style>
+            <a:lnRef idx="1">
+              <a:schemeClr val="accent1"/>
+            </a:lnRef>
+            <a:fillRef idx="3">
+              <a:schemeClr val="accent1"/>
+            </a:fillRef>
+            <a:effectRef idx="2">
+              <a:schemeClr val="accent1"/>
+            </a:effectRef>
+            <a:fontRef idx="minor">
+              <a:schemeClr val="lt1"/>
+            </a:fontRef>
+          </p:style>
+        </p:sp>
+      </p:grpSp>
       <p:sp>
         <p:nvSpPr>
           <p:cNvPr id="2" name="Title 1"/>
@@ -159,18 +2336,29 @@
         </p:nvSpPr>
         <p:spPr>
           <a:xfrm>
-            <a:off x="685800" y="1597819"/>
-            <a:ext cx="7772400" cy="1102519"/>
+            <a:off x="1130300" y="1803400"/>
+            <a:ext cx="5825202" cy="1234727"/>
           </a:xfrm>
         </p:spPr>
         <p:txBody>
-          <a:bodyPr/>
-          <a:lstStyle/>
+          <a:bodyPr anchor="b">
+            <a:noAutofit/>
+          </a:bodyPr>
+          <a:lstStyle>
+            <a:lvl1pPr algn="r">
+              <a:defRPr sz="4050">
+                <a:solidFill>
+                  <a:schemeClr val="accent1"/>
+                </a:solidFill>
+              </a:defRPr>
+            </a:lvl1pPr>
+          </a:lstStyle>
           <a:p>
             <a:r>
               <a:rPr lang="en-US"/>
               <a:t>Click to edit Master title style</a:t>
             </a:r>
+            <a:endParaRPr lang="en-US" dirty="0"/>
           </a:p>
         </p:txBody>
       </p:sp>
@@ -186,19 +2374,20 @@
         </p:nvSpPr>
         <p:spPr>
           <a:xfrm>
-            <a:off x="1371600" y="2914650"/>
-            <a:ext cx="6400800" cy="1314450"/>
+            <a:off x="1130300" y="3038125"/>
+            <a:ext cx="5825202" cy="822674"/>
           </a:xfrm>
         </p:spPr>
         <p:txBody>
-          <a:bodyPr/>
+          <a:bodyPr anchor="t"/>
           <a:lstStyle>
-            <a:lvl1pPr marL="0" indent="0" algn="ctr">
+            <a:lvl1pPr marL="0" indent="0" algn="r">
               <a:buNone/>
               <a:defRPr>
                 <a:solidFill>
                   <a:schemeClr val="tx1">
-                    <a:tint val="75000"/>
+                    <a:lumMod val="50000"/>
+                    <a:lumOff val="50000"/>
                   </a:schemeClr>
                 </a:solidFill>
               </a:defRPr>
@@ -289,6 +2478,7 @@
               <a:rPr lang="en-US"/>
               <a:t>Click to edit Master subtitle style</a:t>
             </a:r>
+            <a:endParaRPr lang="en-US" dirty="0"/>
           </a:p>
         </p:txBody>
       </p:sp>
@@ -309,7 +2499,7 @@
           <a:p>
             <a:fld id="{241EB5C9-1307-BA42-ABA2-0BC069CD8E7F}" type="datetimeFigureOut">
               <a:rPr lang="en-US" smtClean="0"/>
-              <a:t>1/2/22</a:t>
+              <a:t>3/7/2026</a:t>
             </a:fld>
             <a:endParaRPr lang="en-US"/>
           </a:p>
@@ -360,7 +2550,7 @@
     </p:spTree>
     <p:extLst>
       <p:ext uri="{BB962C8B-B14F-4D97-AF65-F5344CB8AC3E}">
-        <p14:creationId xmlns:p14="http://schemas.microsoft.com/office/powerpoint/2010/main" val="1444357513"/>
+        <p14:creationId xmlns:p14="http://schemas.microsoft.com/office/powerpoint/2010/main" val="3079047015"/>
       </p:ext>
     </p:extLst>
   </p:cSld>
@@ -371,6 +2561,1611 @@
 </file>
 
 <file path=ppt/slideLayouts/slideLayout10.xml><?xml version="1.0" encoding="utf-8"?>
+<p:sldLayout xmlns:a="http://schemas.openxmlformats.org/drawingml/2006/main" xmlns:r="http://schemas.openxmlformats.org/officeDocument/2006/relationships" xmlns:p="http://schemas.openxmlformats.org/presentationml/2006/main" preserve="1">
+  <p:cSld name="Title and Caption">
+    <p:spTree>
+      <p:nvGrpSpPr>
+        <p:cNvPr id="1" name=""/>
+        <p:cNvGrpSpPr/>
+        <p:nvPr/>
+      </p:nvGrpSpPr>
+      <p:grpSpPr>
+        <a:xfrm>
+          <a:off x="0" y="0"/>
+          <a:ext cx="0" cy="0"/>
+          <a:chOff x="0" y="0"/>
+          <a:chExt cx="0" cy="0"/>
+        </a:xfrm>
+      </p:grpSpPr>
+      <p:sp>
+        <p:nvSpPr>
+          <p:cNvPr id="2" name="Title 1"/>
+          <p:cNvSpPr>
+            <a:spLocks noGrp="1"/>
+          </p:cNvSpPr>
+          <p:nvPr>
+            <p:ph type="title"/>
+          </p:nvPr>
+        </p:nvSpPr>
+        <p:spPr>
+          <a:xfrm>
+            <a:off x="508001" y="457200"/>
+            <a:ext cx="6447501" cy="2552700"/>
+          </a:xfrm>
+        </p:spPr>
+        <p:txBody>
+          <a:bodyPr anchor="ctr">
+            <a:normAutofit/>
+          </a:bodyPr>
+          <a:lstStyle>
+            <a:lvl1pPr algn="l">
+              <a:defRPr sz="3300" b="0" cap="none"/>
+            </a:lvl1pPr>
+          </a:lstStyle>
+          <a:p>
+            <a:r>
+              <a:rPr lang="en-US"/>
+              <a:t>Click to edit Master title style</a:t>
+            </a:r>
+            <a:endParaRPr lang="en-US" dirty="0"/>
+          </a:p>
+        </p:txBody>
+      </p:sp>
+      <p:sp>
+        <p:nvSpPr>
+          <p:cNvPr id="3" name="Text Placeholder 2"/>
+          <p:cNvSpPr>
+            <a:spLocks noGrp="1"/>
+          </p:cNvSpPr>
+          <p:nvPr>
+            <p:ph type="body" idx="1"/>
+          </p:nvPr>
+        </p:nvSpPr>
+        <p:spPr>
+          <a:xfrm>
+            <a:off x="508001" y="3352800"/>
+            <a:ext cx="6447501" cy="1178222"/>
+          </a:xfrm>
+        </p:spPr>
+        <p:txBody>
+          <a:bodyPr anchor="ctr">
+            <a:normAutofit/>
+          </a:bodyPr>
+          <a:lstStyle>
+            <a:lvl1pPr marL="0" indent="0" algn="l">
+              <a:buNone/>
+              <a:defRPr sz="1350">
+                <a:solidFill>
+                  <a:schemeClr val="tx1">
+                    <a:lumMod val="75000"/>
+                    <a:lumOff val="25000"/>
+                  </a:schemeClr>
+                </a:solidFill>
+              </a:defRPr>
+            </a:lvl1pPr>
+            <a:lvl2pPr marL="342900" indent="0">
+              <a:buNone/>
+              <a:defRPr sz="1350">
+                <a:solidFill>
+                  <a:schemeClr val="tx1">
+                    <a:tint val="75000"/>
+                  </a:schemeClr>
+                </a:solidFill>
+              </a:defRPr>
+            </a:lvl2pPr>
+            <a:lvl3pPr marL="685800" indent="0">
+              <a:buNone/>
+              <a:defRPr sz="1200">
+                <a:solidFill>
+                  <a:schemeClr val="tx1">
+                    <a:tint val="75000"/>
+                  </a:schemeClr>
+                </a:solidFill>
+              </a:defRPr>
+            </a:lvl3pPr>
+            <a:lvl4pPr marL="1028700" indent="0">
+              <a:buNone/>
+              <a:defRPr sz="1050">
+                <a:solidFill>
+                  <a:schemeClr val="tx1">
+                    <a:tint val="75000"/>
+                  </a:schemeClr>
+                </a:solidFill>
+              </a:defRPr>
+            </a:lvl4pPr>
+            <a:lvl5pPr marL="1371600" indent="0">
+              <a:buNone/>
+              <a:defRPr sz="1050">
+                <a:solidFill>
+                  <a:schemeClr val="tx1">
+                    <a:tint val="75000"/>
+                  </a:schemeClr>
+                </a:solidFill>
+              </a:defRPr>
+            </a:lvl5pPr>
+            <a:lvl6pPr marL="1714500" indent="0">
+              <a:buNone/>
+              <a:defRPr sz="1050">
+                <a:solidFill>
+                  <a:schemeClr val="tx1">
+                    <a:tint val="75000"/>
+                  </a:schemeClr>
+                </a:solidFill>
+              </a:defRPr>
+            </a:lvl6pPr>
+            <a:lvl7pPr marL="2057400" indent="0">
+              <a:buNone/>
+              <a:defRPr sz="1050">
+                <a:solidFill>
+                  <a:schemeClr val="tx1">
+                    <a:tint val="75000"/>
+                  </a:schemeClr>
+                </a:solidFill>
+              </a:defRPr>
+            </a:lvl7pPr>
+            <a:lvl8pPr marL="2400300" indent="0">
+              <a:buNone/>
+              <a:defRPr sz="1050">
+                <a:solidFill>
+                  <a:schemeClr val="tx1">
+                    <a:tint val="75000"/>
+                  </a:schemeClr>
+                </a:solidFill>
+              </a:defRPr>
+            </a:lvl8pPr>
+            <a:lvl9pPr marL="2743200" indent="0">
+              <a:buNone/>
+              <a:defRPr sz="1050">
+                <a:solidFill>
+                  <a:schemeClr val="tx1">
+                    <a:tint val="75000"/>
+                  </a:schemeClr>
+                </a:solidFill>
+              </a:defRPr>
+            </a:lvl9pPr>
+          </a:lstStyle>
+          <a:p>
+            <a:pPr lvl="0"/>
+            <a:r>
+              <a:rPr lang="en-US"/>
+              <a:t>Click to edit Master text styles</a:t>
+            </a:r>
+          </a:p>
+        </p:txBody>
+      </p:sp>
+      <p:sp>
+        <p:nvSpPr>
+          <p:cNvPr id="4" name="Date Placeholder 3"/>
+          <p:cNvSpPr>
+            <a:spLocks noGrp="1"/>
+          </p:cNvSpPr>
+          <p:nvPr>
+            <p:ph type="dt" sz="half" idx="10"/>
+          </p:nvPr>
+        </p:nvSpPr>
+        <p:spPr/>
+        <p:txBody>
+          <a:bodyPr/>
+          <a:lstStyle/>
+          <a:p>
+            <a:fld id="{241EB5C9-1307-BA42-ABA2-0BC069CD8E7F}" type="datetimeFigureOut">
+              <a:rPr lang="en-US" smtClean="0"/>
+              <a:t>3/7/2026</a:t>
+            </a:fld>
+            <a:endParaRPr lang="en-US"/>
+          </a:p>
+        </p:txBody>
+      </p:sp>
+      <p:sp>
+        <p:nvSpPr>
+          <p:cNvPr id="5" name="Footer Placeholder 4"/>
+          <p:cNvSpPr>
+            <a:spLocks noGrp="1"/>
+          </p:cNvSpPr>
+          <p:nvPr>
+            <p:ph type="ftr" sz="quarter" idx="11"/>
+          </p:nvPr>
+        </p:nvSpPr>
+        <p:spPr/>
+        <p:txBody>
+          <a:bodyPr/>
+          <a:lstStyle/>
+          <a:p>
+            <a:endParaRPr lang="en-US"/>
+          </a:p>
+        </p:txBody>
+      </p:sp>
+      <p:sp>
+        <p:nvSpPr>
+          <p:cNvPr id="6" name="Slide Number Placeholder 5"/>
+          <p:cNvSpPr>
+            <a:spLocks noGrp="1"/>
+          </p:cNvSpPr>
+          <p:nvPr>
+            <p:ph type="sldNum" sz="quarter" idx="12"/>
+          </p:nvPr>
+        </p:nvSpPr>
+        <p:spPr/>
+        <p:txBody>
+          <a:bodyPr/>
+          <a:lstStyle/>
+          <a:p>
+            <a:fld id="{C5EF2332-01BF-834F-8236-50238282D533}" type="slidenum">
+              <a:rPr lang="en-US" smtClean="0"/>
+              <a:t>‹#›</a:t>
+            </a:fld>
+            <a:endParaRPr lang="en-US"/>
+          </a:p>
+        </p:txBody>
+      </p:sp>
+    </p:spTree>
+    <p:extLst>
+      <p:ext uri="{BB962C8B-B14F-4D97-AF65-F5344CB8AC3E}">
+        <p14:creationId xmlns:p14="http://schemas.microsoft.com/office/powerpoint/2010/main" val="2011450158"/>
+      </p:ext>
+    </p:extLst>
+  </p:cSld>
+  <p:clrMapOvr>
+    <a:masterClrMapping/>
+  </p:clrMapOvr>
+</p:sldLayout>
+</file>
+
+<file path=ppt/slideLayouts/slideLayout11.xml><?xml version="1.0" encoding="utf-8"?>
+<p:sldLayout xmlns:a="http://schemas.openxmlformats.org/drawingml/2006/main" xmlns:r="http://schemas.openxmlformats.org/officeDocument/2006/relationships" xmlns:p="http://schemas.openxmlformats.org/presentationml/2006/main" preserve="1">
+  <p:cSld name="Quote with Caption">
+    <p:spTree>
+      <p:nvGrpSpPr>
+        <p:cNvPr id="1" name=""/>
+        <p:cNvGrpSpPr/>
+        <p:nvPr/>
+      </p:nvGrpSpPr>
+      <p:grpSpPr>
+        <a:xfrm>
+          <a:off x="0" y="0"/>
+          <a:ext cx="0" cy="0"/>
+          <a:chOff x="0" y="0"/>
+          <a:chExt cx="0" cy="0"/>
+        </a:xfrm>
+      </p:grpSpPr>
+      <p:sp>
+        <p:nvSpPr>
+          <p:cNvPr id="2" name="Title 1"/>
+          <p:cNvSpPr>
+            <a:spLocks noGrp="1"/>
+          </p:cNvSpPr>
+          <p:nvPr>
+            <p:ph type="title"/>
+          </p:nvPr>
+        </p:nvSpPr>
+        <p:spPr>
+          <a:xfrm>
+            <a:off x="698500" y="457200"/>
+            <a:ext cx="6070601" cy="2266950"/>
+          </a:xfrm>
+        </p:spPr>
+        <p:txBody>
+          <a:bodyPr anchor="ctr">
+            <a:normAutofit/>
+          </a:bodyPr>
+          <a:lstStyle>
+            <a:lvl1pPr algn="l">
+              <a:defRPr sz="3300" b="0" cap="none"/>
+            </a:lvl1pPr>
+          </a:lstStyle>
+          <a:p>
+            <a:r>
+              <a:rPr lang="en-US"/>
+              <a:t>Click to edit Master title style</a:t>
+            </a:r>
+            <a:endParaRPr lang="en-US" dirty="0"/>
+          </a:p>
+        </p:txBody>
+      </p:sp>
+      <p:sp>
+        <p:nvSpPr>
+          <p:cNvPr id="23" name="Text Placeholder 9"/>
+          <p:cNvSpPr>
+            <a:spLocks noGrp="1"/>
+          </p:cNvSpPr>
+          <p:nvPr>
+            <p:ph type="body" sz="quarter" idx="13"/>
+          </p:nvPr>
+        </p:nvSpPr>
+        <p:spPr>
+          <a:xfrm>
+            <a:off x="1024604" y="2724150"/>
+            <a:ext cx="5418393" cy="285750"/>
+          </a:xfrm>
+        </p:spPr>
+        <p:txBody>
+          <a:bodyPr anchor="ctr">
+            <a:noAutofit/>
+          </a:bodyPr>
+          <a:lstStyle>
+            <a:lvl1pPr marL="0" indent="0">
+              <a:buFontTx/>
+              <a:buNone/>
+              <a:defRPr sz="1200">
+                <a:solidFill>
+                  <a:schemeClr val="tx1">
+                    <a:lumMod val="50000"/>
+                    <a:lumOff val="50000"/>
+                  </a:schemeClr>
+                </a:solidFill>
+              </a:defRPr>
+            </a:lvl1pPr>
+            <a:lvl2pPr marL="342900" indent="0">
+              <a:buFontTx/>
+              <a:buNone/>
+              <a:defRPr/>
+            </a:lvl2pPr>
+            <a:lvl3pPr marL="685800" indent="0">
+              <a:buFontTx/>
+              <a:buNone/>
+              <a:defRPr/>
+            </a:lvl3pPr>
+            <a:lvl4pPr marL="1028700" indent="0">
+              <a:buFontTx/>
+              <a:buNone/>
+              <a:defRPr/>
+            </a:lvl4pPr>
+            <a:lvl5pPr marL="1371600" indent="0">
+              <a:buFontTx/>
+              <a:buNone/>
+              <a:defRPr/>
+            </a:lvl5pPr>
+          </a:lstStyle>
+          <a:p>
+            <a:pPr lvl="0"/>
+            <a:r>
+              <a:rPr lang="en-US"/>
+              <a:t>Click to edit Master text styles</a:t>
+            </a:r>
+          </a:p>
+        </p:txBody>
+      </p:sp>
+      <p:sp>
+        <p:nvSpPr>
+          <p:cNvPr id="3" name="Text Placeholder 2"/>
+          <p:cNvSpPr>
+            <a:spLocks noGrp="1"/>
+          </p:cNvSpPr>
+          <p:nvPr>
+            <p:ph type="body" idx="1"/>
+          </p:nvPr>
+        </p:nvSpPr>
+        <p:spPr>
+          <a:xfrm>
+            <a:off x="508001" y="3352800"/>
+            <a:ext cx="6447501" cy="1178222"/>
+          </a:xfrm>
+        </p:spPr>
+        <p:txBody>
+          <a:bodyPr anchor="ctr">
+            <a:normAutofit/>
+          </a:bodyPr>
+          <a:lstStyle>
+            <a:lvl1pPr marL="0" indent="0" algn="l">
+              <a:buNone/>
+              <a:defRPr sz="1350">
+                <a:solidFill>
+                  <a:schemeClr val="tx1">
+                    <a:lumMod val="75000"/>
+                    <a:lumOff val="25000"/>
+                  </a:schemeClr>
+                </a:solidFill>
+              </a:defRPr>
+            </a:lvl1pPr>
+            <a:lvl2pPr marL="342900" indent="0">
+              <a:buNone/>
+              <a:defRPr sz="1350">
+                <a:solidFill>
+                  <a:schemeClr val="tx1">
+                    <a:tint val="75000"/>
+                  </a:schemeClr>
+                </a:solidFill>
+              </a:defRPr>
+            </a:lvl2pPr>
+            <a:lvl3pPr marL="685800" indent="0">
+              <a:buNone/>
+              <a:defRPr sz="1200">
+                <a:solidFill>
+                  <a:schemeClr val="tx1">
+                    <a:tint val="75000"/>
+                  </a:schemeClr>
+                </a:solidFill>
+              </a:defRPr>
+            </a:lvl3pPr>
+            <a:lvl4pPr marL="1028700" indent="0">
+              <a:buNone/>
+              <a:defRPr sz="1050">
+                <a:solidFill>
+                  <a:schemeClr val="tx1">
+                    <a:tint val="75000"/>
+                  </a:schemeClr>
+                </a:solidFill>
+              </a:defRPr>
+            </a:lvl4pPr>
+            <a:lvl5pPr marL="1371600" indent="0">
+              <a:buNone/>
+              <a:defRPr sz="1050">
+                <a:solidFill>
+                  <a:schemeClr val="tx1">
+                    <a:tint val="75000"/>
+                  </a:schemeClr>
+                </a:solidFill>
+              </a:defRPr>
+            </a:lvl5pPr>
+            <a:lvl6pPr marL="1714500" indent="0">
+              <a:buNone/>
+              <a:defRPr sz="1050">
+                <a:solidFill>
+                  <a:schemeClr val="tx1">
+                    <a:tint val="75000"/>
+                  </a:schemeClr>
+                </a:solidFill>
+              </a:defRPr>
+            </a:lvl6pPr>
+            <a:lvl7pPr marL="2057400" indent="0">
+              <a:buNone/>
+              <a:defRPr sz="1050">
+                <a:solidFill>
+                  <a:schemeClr val="tx1">
+                    <a:tint val="75000"/>
+                  </a:schemeClr>
+                </a:solidFill>
+              </a:defRPr>
+            </a:lvl7pPr>
+            <a:lvl8pPr marL="2400300" indent="0">
+              <a:buNone/>
+              <a:defRPr sz="1050">
+                <a:solidFill>
+                  <a:schemeClr val="tx1">
+                    <a:tint val="75000"/>
+                  </a:schemeClr>
+                </a:solidFill>
+              </a:defRPr>
+            </a:lvl8pPr>
+            <a:lvl9pPr marL="2743200" indent="0">
+              <a:buNone/>
+              <a:defRPr sz="1050">
+                <a:solidFill>
+                  <a:schemeClr val="tx1">
+                    <a:tint val="75000"/>
+                  </a:schemeClr>
+                </a:solidFill>
+              </a:defRPr>
+            </a:lvl9pPr>
+          </a:lstStyle>
+          <a:p>
+            <a:pPr lvl="0"/>
+            <a:r>
+              <a:rPr lang="en-US"/>
+              <a:t>Click to edit Master text styles</a:t>
+            </a:r>
+          </a:p>
+        </p:txBody>
+      </p:sp>
+      <p:sp>
+        <p:nvSpPr>
+          <p:cNvPr id="4" name="Date Placeholder 3"/>
+          <p:cNvSpPr>
+            <a:spLocks noGrp="1"/>
+          </p:cNvSpPr>
+          <p:nvPr>
+            <p:ph type="dt" sz="half" idx="10"/>
+          </p:nvPr>
+        </p:nvSpPr>
+        <p:spPr/>
+        <p:txBody>
+          <a:bodyPr/>
+          <a:lstStyle/>
+          <a:p>
+            <a:fld id="{241EB5C9-1307-BA42-ABA2-0BC069CD8E7F}" type="datetimeFigureOut">
+              <a:rPr lang="en-US" smtClean="0"/>
+              <a:t>3/7/2026</a:t>
+            </a:fld>
+            <a:endParaRPr lang="en-US"/>
+          </a:p>
+        </p:txBody>
+      </p:sp>
+      <p:sp>
+        <p:nvSpPr>
+          <p:cNvPr id="5" name="Footer Placeholder 4"/>
+          <p:cNvSpPr>
+            <a:spLocks noGrp="1"/>
+          </p:cNvSpPr>
+          <p:nvPr>
+            <p:ph type="ftr" sz="quarter" idx="11"/>
+          </p:nvPr>
+        </p:nvSpPr>
+        <p:spPr/>
+        <p:txBody>
+          <a:bodyPr/>
+          <a:lstStyle/>
+          <a:p>
+            <a:endParaRPr lang="en-US"/>
+          </a:p>
+        </p:txBody>
+      </p:sp>
+      <p:sp>
+        <p:nvSpPr>
+          <p:cNvPr id="6" name="Slide Number Placeholder 5"/>
+          <p:cNvSpPr>
+            <a:spLocks noGrp="1"/>
+          </p:cNvSpPr>
+          <p:nvPr>
+            <p:ph type="sldNum" sz="quarter" idx="12"/>
+          </p:nvPr>
+        </p:nvSpPr>
+        <p:spPr/>
+        <p:txBody>
+          <a:bodyPr/>
+          <a:lstStyle/>
+          <a:p>
+            <a:fld id="{C5EF2332-01BF-834F-8236-50238282D533}" type="slidenum">
+              <a:rPr lang="en-US" smtClean="0"/>
+              <a:t>‹#›</a:t>
+            </a:fld>
+            <a:endParaRPr lang="en-US"/>
+          </a:p>
+        </p:txBody>
+      </p:sp>
+      <p:sp>
+        <p:nvSpPr>
+          <p:cNvPr id="24" name="TextBox 23"/>
+          <p:cNvSpPr txBox="1"/>
+          <p:nvPr/>
+        </p:nvSpPr>
+        <p:spPr>
+          <a:xfrm>
+            <a:off x="406403" y="592784"/>
+            <a:ext cx="457200" cy="438582"/>
+          </a:xfrm>
+          <a:prstGeom prst="rect">
+            <a:avLst/>
+          </a:prstGeom>
+        </p:spPr>
+        <p:txBody>
+          <a:bodyPr vert="horz" lIns="68580" tIns="34290" rIns="68580" bIns="34290" rtlCol="0" anchor="ctr">
+            <a:noAutofit/>
+          </a:bodyPr>
+          <a:lstStyle/>
+          <a:p>
+            <a:pPr lvl="0"/>
+            <a:r>
+              <a:rPr lang="en-US" sz="6000" baseline="0" dirty="0">
+                <a:ln w="3175" cmpd="sng">
+                  <a:noFill/>
+                </a:ln>
+                <a:solidFill>
+                  <a:schemeClr val="accent1">
+                    <a:lumMod val="60000"/>
+                    <a:lumOff val="40000"/>
+                  </a:schemeClr>
+                </a:solidFill>
+                <a:effectLst/>
+                <a:latin typeface="Arial"/>
+              </a:rPr>
+              <a:t>“</a:t>
+            </a:r>
+          </a:p>
+        </p:txBody>
+      </p:sp>
+      <p:sp>
+        <p:nvSpPr>
+          <p:cNvPr id="25" name="TextBox 24"/>
+          <p:cNvSpPr txBox="1"/>
+          <p:nvPr/>
+        </p:nvSpPr>
+        <p:spPr>
+          <a:xfrm>
+            <a:off x="6669758" y="2164917"/>
+            <a:ext cx="457200" cy="438582"/>
+          </a:xfrm>
+          <a:prstGeom prst="rect">
+            <a:avLst/>
+          </a:prstGeom>
+        </p:spPr>
+        <p:txBody>
+          <a:bodyPr vert="horz" lIns="68580" tIns="34290" rIns="68580" bIns="34290" rtlCol="0" anchor="ctr">
+            <a:noAutofit/>
+          </a:bodyPr>
+          <a:lstStyle/>
+          <a:p>
+            <a:pPr lvl="0"/>
+            <a:r>
+              <a:rPr lang="en-US" sz="6000" baseline="0" dirty="0">
+                <a:ln w="3175" cmpd="sng">
+                  <a:noFill/>
+                </a:ln>
+                <a:solidFill>
+                  <a:schemeClr val="accent1">
+                    <a:lumMod val="60000"/>
+                    <a:lumOff val="40000"/>
+                  </a:schemeClr>
+                </a:solidFill>
+                <a:effectLst/>
+                <a:latin typeface="Arial"/>
+              </a:rPr>
+              <a:t>”</a:t>
+            </a:r>
+          </a:p>
+        </p:txBody>
+      </p:sp>
+    </p:spTree>
+    <p:extLst>
+      <p:ext uri="{BB962C8B-B14F-4D97-AF65-F5344CB8AC3E}">
+        <p14:creationId xmlns:p14="http://schemas.microsoft.com/office/powerpoint/2010/main" val="2511121190"/>
+      </p:ext>
+    </p:extLst>
+  </p:cSld>
+  <p:clrMapOvr>
+    <a:masterClrMapping/>
+  </p:clrMapOvr>
+</p:sldLayout>
+</file>
+
+<file path=ppt/slideLayouts/slideLayout12.xml><?xml version="1.0" encoding="utf-8"?>
+<p:sldLayout xmlns:a="http://schemas.openxmlformats.org/drawingml/2006/main" xmlns:r="http://schemas.openxmlformats.org/officeDocument/2006/relationships" xmlns:p="http://schemas.openxmlformats.org/presentationml/2006/main" preserve="1">
+  <p:cSld name="Name Card">
+    <p:spTree>
+      <p:nvGrpSpPr>
+        <p:cNvPr id="1" name=""/>
+        <p:cNvGrpSpPr/>
+        <p:nvPr/>
+      </p:nvGrpSpPr>
+      <p:grpSpPr>
+        <a:xfrm>
+          <a:off x="0" y="0"/>
+          <a:ext cx="0" cy="0"/>
+          <a:chOff x="0" y="0"/>
+          <a:chExt cx="0" cy="0"/>
+        </a:xfrm>
+      </p:grpSpPr>
+      <p:sp>
+        <p:nvSpPr>
+          <p:cNvPr id="2" name="Title 1"/>
+          <p:cNvSpPr>
+            <a:spLocks noGrp="1"/>
+          </p:cNvSpPr>
+          <p:nvPr>
+            <p:ph type="title"/>
+          </p:nvPr>
+        </p:nvSpPr>
+        <p:spPr>
+          <a:xfrm>
+            <a:off x="508001" y="1448991"/>
+            <a:ext cx="6447501" cy="1946595"/>
+          </a:xfrm>
+        </p:spPr>
+        <p:txBody>
+          <a:bodyPr anchor="b">
+            <a:normAutofit/>
+          </a:bodyPr>
+          <a:lstStyle>
+            <a:lvl1pPr algn="l">
+              <a:defRPr sz="3300" b="0" cap="none"/>
+            </a:lvl1pPr>
+          </a:lstStyle>
+          <a:p>
+            <a:r>
+              <a:rPr lang="en-US"/>
+              <a:t>Click to edit Master title style</a:t>
+            </a:r>
+            <a:endParaRPr lang="en-US" dirty="0"/>
+          </a:p>
+        </p:txBody>
+      </p:sp>
+      <p:sp>
+        <p:nvSpPr>
+          <p:cNvPr id="3" name="Text Placeholder 2"/>
+          <p:cNvSpPr>
+            <a:spLocks noGrp="1"/>
+          </p:cNvSpPr>
+          <p:nvPr>
+            <p:ph type="body" idx="1"/>
+          </p:nvPr>
+        </p:nvSpPr>
+        <p:spPr>
+          <a:xfrm>
+            <a:off x="508001" y="3395586"/>
+            <a:ext cx="6447501" cy="1135436"/>
+          </a:xfrm>
+        </p:spPr>
+        <p:txBody>
+          <a:bodyPr anchor="t">
+            <a:normAutofit/>
+          </a:bodyPr>
+          <a:lstStyle>
+            <a:lvl1pPr marL="0" indent="0" algn="l">
+              <a:buNone/>
+              <a:defRPr sz="1350">
+                <a:solidFill>
+                  <a:schemeClr val="tx1">
+                    <a:lumMod val="75000"/>
+                    <a:lumOff val="25000"/>
+                  </a:schemeClr>
+                </a:solidFill>
+              </a:defRPr>
+            </a:lvl1pPr>
+            <a:lvl2pPr marL="342900" indent="0">
+              <a:buNone/>
+              <a:defRPr sz="1350">
+                <a:solidFill>
+                  <a:schemeClr val="tx1">
+                    <a:tint val="75000"/>
+                  </a:schemeClr>
+                </a:solidFill>
+              </a:defRPr>
+            </a:lvl2pPr>
+            <a:lvl3pPr marL="685800" indent="0">
+              <a:buNone/>
+              <a:defRPr sz="1200">
+                <a:solidFill>
+                  <a:schemeClr val="tx1">
+                    <a:tint val="75000"/>
+                  </a:schemeClr>
+                </a:solidFill>
+              </a:defRPr>
+            </a:lvl3pPr>
+            <a:lvl4pPr marL="1028700" indent="0">
+              <a:buNone/>
+              <a:defRPr sz="1050">
+                <a:solidFill>
+                  <a:schemeClr val="tx1">
+                    <a:tint val="75000"/>
+                  </a:schemeClr>
+                </a:solidFill>
+              </a:defRPr>
+            </a:lvl4pPr>
+            <a:lvl5pPr marL="1371600" indent="0">
+              <a:buNone/>
+              <a:defRPr sz="1050">
+                <a:solidFill>
+                  <a:schemeClr val="tx1">
+                    <a:tint val="75000"/>
+                  </a:schemeClr>
+                </a:solidFill>
+              </a:defRPr>
+            </a:lvl5pPr>
+            <a:lvl6pPr marL="1714500" indent="0">
+              <a:buNone/>
+              <a:defRPr sz="1050">
+                <a:solidFill>
+                  <a:schemeClr val="tx1">
+                    <a:tint val="75000"/>
+                  </a:schemeClr>
+                </a:solidFill>
+              </a:defRPr>
+            </a:lvl6pPr>
+            <a:lvl7pPr marL="2057400" indent="0">
+              <a:buNone/>
+              <a:defRPr sz="1050">
+                <a:solidFill>
+                  <a:schemeClr val="tx1">
+                    <a:tint val="75000"/>
+                  </a:schemeClr>
+                </a:solidFill>
+              </a:defRPr>
+            </a:lvl7pPr>
+            <a:lvl8pPr marL="2400300" indent="0">
+              <a:buNone/>
+              <a:defRPr sz="1050">
+                <a:solidFill>
+                  <a:schemeClr val="tx1">
+                    <a:tint val="75000"/>
+                  </a:schemeClr>
+                </a:solidFill>
+              </a:defRPr>
+            </a:lvl8pPr>
+            <a:lvl9pPr marL="2743200" indent="0">
+              <a:buNone/>
+              <a:defRPr sz="1050">
+                <a:solidFill>
+                  <a:schemeClr val="tx1">
+                    <a:tint val="75000"/>
+                  </a:schemeClr>
+                </a:solidFill>
+              </a:defRPr>
+            </a:lvl9pPr>
+          </a:lstStyle>
+          <a:p>
+            <a:pPr lvl="0"/>
+            <a:r>
+              <a:rPr lang="en-US"/>
+              <a:t>Click to edit Master text styles</a:t>
+            </a:r>
+          </a:p>
+        </p:txBody>
+      </p:sp>
+      <p:sp>
+        <p:nvSpPr>
+          <p:cNvPr id="4" name="Date Placeholder 3"/>
+          <p:cNvSpPr>
+            <a:spLocks noGrp="1"/>
+          </p:cNvSpPr>
+          <p:nvPr>
+            <p:ph type="dt" sz="half" idx="10"/>
+          </p:nvPr>
+        </p:nvSpPr>
+        <p:spPr/>
+        <p:txBody>
+          <a:bodyPr/>
+          <a:lstStyle/>
+          <a:p>
+            <a:fld id="{241EB5C9-1307-BA42-ABA2-0BC069CD8E7F}" type="datetimeFigureOut">
+              <a:rPr lang="en-US" smtClean="0"/>
+              <a:t>3/7/2026</a:t>
+            </a:fld>
+            <a:endParaRPr lang="en-US"/>
+          </a:p>
+        </p:txBody>
+      </p:sp>
+      <p:sp>
+        <p:nvSpPr>
+          <p:cNvPr id="5" name="Footer Placeholder 4"/>
+          <p:cNvSpPr>
+            <a:spLocks noGrp="1"/>
+          </p:cNvSpPr>
+          <p:nvPr>
+            <p:ph type="ftr" sz="quarter" idx="11"/>
+          </p:nvPr>
+        </p:nvSpPr>
+        <p:spPr/>
+        <p:txBody>
+          <a:bodyPr/>
+          <a:lstStyle/>
+          <a:p>
+            <a:endParaRPr lang="en-US"/>
+          </a:p>
+        </p:txBody>
+      </p:sp>
+      <p:sp>
+        <p:nvSpPr>
+          <p:cNvPr id="6" name="Slide Number Placeholder 5"/>
+          <p:cNvSpPr>
+            <a:spLocks noGrp="1"/>
+          </p:cNvSpPr>
+          <p:nvPr>
+            <p:ph type="sldNum" sz="quarter" idx="12"/>
+          </p:nvPr>
+        </p:nvSpPr>
+        <p:spPr/>
+        <p:txBody>
+          <a:bodyPr/>
+          <a:lstStyle/>
+          <a:p>
+            <a:fld id="{C5EF2332-01BF-834F-8236-50238282D533}" type="slidenum">
+              <a:rPr lang="en-US" smtClean="0"/>
+              <a:t>‹#›</a:t>
+            </a:fld>
+            <a:endParaRPr lang="en-US"/>
+          </a:p>
+        </p:txBody>
+      </p:sp>
+    </p:spTree>
+    <p:extLst>
+      <p:ext uri="{BB962C8B-B14F-4D97-AF65-F5344CB8AC3E}">
+        <p14:creationId xmlns:p14="http://schemas.microsoft.com/office/powerpoint/2010/main" val="2610745836"/>
+      </p:ext>
+    </p:extLst>
+  </p:cSld>
+  <p:clrMapOvr>
+    <a:masterClrMapping/>
+  </p:clrMapOvr>
+</p:sldLayout>
+</file>
+
+<file path=ppt/slideLayouts/slideLayout13.xml><?xml version="1.0" encoding="utf-8"?>
+<p:sldLayout xmlns:a="http://schemas.openxmlformats.org/drawingml/2006/main" xmlns:r="http://schemas.openxmlformats.org/officeDocument/2006/relationships" xmlns:p="http://schemas.openxmlformats.org/presentationml/2006/main" preserve="1">
+  <p:cSld name="Quote Name Card">
+    <p:spTree>
+      <p:nvGrpSpPr>
+        <p:cNvPr id="1" name=""/>
+        <p:cNvGrpSpPr/>
+        <p:nvPr/>
+      </p:nvGrpSpPr>
+      <p:grpSpPr>
+        <a:xfrm>
+          <a:off x="0" y="0"/>
+          <a:ext cx="0" cy="0"/>
+          <a:chOff x="0" y="0"/>
+          <a:chExt cx="0" cy="0"/>
+        </a:xfrm>
+      </p:grpSpPr>
+      <p:sp>
+        <p:nvSpPr>
+          <p:cNvPr id="2" name="Title 1"/>
+          <p:cNvSpPr>
+            <a:spLocks noGrp="1"/>
+          </p:cNvSpPr>
+          <p:nvPr>
+            <p:ph type="title"/>
+          </p:nvPr>
+        </p:nvSpPr>
+        <p:spPr>
+          <a:xfrm>
+            <a:off x="698500" y="457200"/>
+            <a:ext cx="6070601" cy="2266950"/>
+          </a:xfrm>
+        </p:spPr>
+        <p:txBody>
+          <a:bodyPr anchor="ctr">
+            <a:normAutofit/>
+          </a:bodyPr>
+          <a:lstStyle>
+            <a:lvl1pPr algn="l">
+              <a:defRPr sz="3300" b="0" cap="none"/>
+            </a:lvl1pPr>
+          </a:lstStyle>
+          <a:p>
+            <a:r>
+              <a:rPr lang="en-US"/>
+              <a:t>Click to edit Master title style</a:t>
+            </a:r>
+            <a:endParaRPr lang="en-US" dirty="0"/>
+          </a:p>
+        </p:txBody>
+      </p:sp>
+      <p:sp>
+        <p:nvSpPr>
+          <p:cNvPr id="23" name="Text Placeholder 9"/>
+          <p:cNvSpPr>
+            <a:spLocks noGrp="1"/>
+          </p:cNvSpPr>
+          <p:nvPr>
+            <p:ph type="body" sz="quarter" idx="13"/>
+          </p:nvPr>
+        </p:nvSpPr>
+        <p:spPr>
+          <a:xfrm>
+            <a:off x="507999" y="3009900"/>
+            <a:ext cx="6447502" cy="385686"/>
+          </a:xfrm>
+        </p:spPr>
+        <p:txBody>
+          <a:bodyPr anchor="b">
+            <a:noAutofit/>
+          </a:bodyPr>
+          <a:lstStyle>
+            <a:lvl1pPr marL="0" indent="0">
+              <a:buFontTx/>
+              <a:buNone/>
+              <a:defRPr sz="1800">
+                <a:solidFill>
+                  <a:schemeClr val="tx1">
+                    <a:lumMod val="75000"/>
+                    <a:lumOff val="25000"/>
+                  </a:schemeClr>
+                </a:solidFill>
+              </a:defRPr>
+            </a:lvl1pPr>
+            <a:lvl2pPr marL="342900" indent="0">
+              <a:buFontTx/>
+              <a:buNone/>
+              <a:defRPr/>
+            </a:lvl2pPr>
+            <a:lvl3pPr marL="685800" indent="0">
+              <a:buFontTx/>
+              <a:buNone/>
+              <a:defRPr/>
+            </a:lvl3pPr>
+            <a:lvl4pPr marL="1028700" indent="0">
+              <a:buFontTx/>
+              <a:buNone/>
+              <a:defRPr/>
+            </a:lvl4pPr>
+            <a:lvl5pPr marL="1371600" indent="0">
+              <a:buFontTx/>
+              <a:buNone/>
+              <a:defRPr/>
+            </a:lvl5pPr>
+          </a:lstStyle>
+          <a:p>
+            <a:pPr lvl="0"/>
+            <a:r>
+              <a:rPr lang="en-US"/>
+              <a:t>Click to edit Master text styles</a:t>
+            </a:r>
+          </a:p>
+        </p:txBody>
+      </p:sp>
+      <p:sp>
+        <p:nvSpPr>
+          <p:cNvPr id="3" name="Text Placeholder 2"/>
+          <p:cNvSpPr>
+            <a:spLocks noGrp="1"/>
+          </p:cNvSpPr>
+          <p:nvPr>
+            <p:ph type="body" idx="1"/>
+          </p:nvPr>
+        </p:nvSpPr>
+        <p:spPr>
+          <a:xfrm>
+            <a:off x="508001" y="3395586"/>
+            <a:ext cx="6447501" cy="1135436"/>
+          </a:xfrm>
+        </p:spPr>
+        <p:txBody>
+          <a:bodyPr anchor="t">
+            <a:normAutofit/>
+          </a:bodyPr>
+          <a:lstStyle>
+            <a:lvl1pPr marL="0" indent="0" algn="l">
+              <a:buNone/>
+              <a:defRPr sz="1350">
+                <a:solidFill>
+                  <a:schemeClr val="tx1">
+                    <a:lumMod val="50000"/>
+                    <a:lumOff val="50000"/>
+                  </a:schemeClr>
+                </a:solidFill>
+              </a:defRPr>
+            </a:lvl1pPr>
+            <a:lvl2pPr marL="342900" indent="0">
+              <a:buNone/>
+              <a:defRPr sz="1350">
+                <a:solidFill>
+                  <a:schemeClr val="tx1">
+                    <a:tint val="75000"/>
+                  </a:schemeClr>
+                </a:solidFill>
+              </a:defRPr>
+            </a:lvl2pPr>
+            <a:lvl3pPr marL="685800" indent="0">
+              <a:buNone/>
+              <a:defRPr sz="1200">
+                <a:solidFill>
+                  <a:schemeClr val="tx1">
+                    <a:tint val="75000"/>
+                  </a:schemeClr>
+                </a:solidFill>
+              </a:defRPr>
+            </a:lvl3pPr>
+            <a:lvl4pPr marL="1028700" indent="0">
+              <a:buNone/>
+              <a:defRPr sz="1050">
+                <a:solidFill>
+                  <a:schemeClr val="tx1">
+                    <a:tint val="75000"/>
+                  </a:schemeClr>
+                </a:solidFill>
+              </a:defRPr>
+            </a:lvl4pPr>
+            <a:lvl5pPr marL="1371600" indent="0">
+              <a:buNone/>
+              <a:defRPr sz="1050">
+                <a:solidFill>
+                  <a:schemeClr val="tx1">
+                    <a:tint val="75000"/>
+                  </a:schemeClr>
+                </a:solidFill>
+              </a:defRPr>
+            </a:lvl5pPr>
+            <a:lvl6pPr marL="1714500" indent="0">
+              <a:buNone/>
+              <a:defRPr sz="1050">
+                <a:solidFill>
+                  <a:schemeClr val="tx1">
+                    <a:tint val="75000"/>
+                  </a:schemeClr>
+                </a:solidFill>
+              </a:defRPr>
+            </a:lvl6pPr>
+            <a:lvl7pPr marL="2057400" indent="0">
+              <a:buNone/>
+              <a:defRPr sz="1050">
+                <a:solidFill>
+                  <a:schemeClr val="tx1">
+                    <a:tint val="75000"/>
+                  </a:schemeClr>
+                </a:solidFill>
+              </a:defRPr>
+            </a:lvl7pPr>
+            <a:lvl8pPr marL="2400300" indent="0">
+              <a:buNone/>
+              <a:defRPr sz="1050">
+                <a:solidFill>
+                  <a:schemeClr val="tx1">
+                    <a:tint val="75000"/>
+                  </a:schemeClr>
+                </a:solidFill>
+              </a:defRPr>
+            </a:lvl8pPr>
+            <a:lvl9pPr marL="2743200" indent="0">
+              <a:buNone/>
+              <a:defRPr sz="1050">
+                <a:solidFill>
+                  <a:schemeClr val="tx1">
+                    <a:tint val="75000"/>
+                  </a:schemeClr>
+                </a:solidFill>
+              </a:defRPr>
+            </a:lvl9pPr>
+          </a:lstStyle>
+          <a:p>
+            <a:pPr lvl="0"/>
+            <a:r>
+              <a:rPr lang="en-US"/>
+              <a:t>Click to edit Master text styles</a:t>
+            </a:r>
+          </a:p>
+        </p:txBody>
+      </p:sp>
+      <p:sp>
+        <p:nvSpPr>
+          <p:cNvPr id="4" name="Date Placeholder 3"/>
+          <p:cNvSpPr>
+            <a:spLocks noGrp="1"/>
+          </p:cNvSpPr>
+          <p:nvPr>
+            <p:ph type="dt" sz="half" idx="10"/>
+          </p:nvPr>
+        </p:nvSpPr>
+        <p:spPr/>
+        <p:txBody>
+          <a:bodyPr/>
+          <a:lstStyle/>
+          <a:p>
+            <a:fld id="{241EB5C9-1307-BA42-ABA2-0BC069CD8E7F}" type="datetimeFigureOut">
+              <a:rPr lang="en-US" smtClean="0"/>
+              <a:t>3/7/2026</a:t>
+            </a:fld>
+            <a:endParaRPr lang="en-US"/>
+          </a:p>
+        </p:txBody>
+      </p:sp>
+      <p:sp>
+        <p:nvSpPr>
+          <p:cNvPr id="5" name="Footer Placeholder 4"/>
+          <p:cNvSpPr>
+            <a:spLocks noGrp="1"/>
+          </p:cNvSpPr>
+          <p:nvPr>
+            <p:ph type="ftr" sz="quarter" idx="11"/>
+          </p:nvPr>
+        </p:nvSpPr>
+        <p:spPr/>
+        <p:txBody>
+          <a:bodyPr/>
+          <a:lstStyle/>
+          <a:p>
+            <a:endParaRPr lang="en-US"/>
+          </a:p>
+        </p:txBody>
+      </p:sp>
+      <p:sp>
+        <p:nvSpPr>
+          <p:cNvPr id="6" name="Slide Number Placeholder 5"/>
+          <p:cNvSpPr>
+            <a:spLocks noGrp="1"/>
+          </p:cNvSpPr>
+          <p:nvPr>
+            <p:ph type="sldNum" sz="quarter" idx="12"/>
+          </p:nvPr>
+        </p:nvSpPr>
+        <p:spPr/>
+        <p:txBody>
+          <a:bodyPr/>
+          <a:lstStyle/>
+          <a:p>
+            <a:fld id="{C5EF2332-01BF-834F-8236-50238282D533}" type="slidenum">
+              <a:rPr lang="en-US" smtClean="0"/>
+              <a:t>‹#›</a:t>
+            </a:fld>
+            <a:endParaRPr lang="en-US"/>
+          </a:p>
+        </p:txBody>
+      </p:sp>
+      <p:sp>
+        <p:nvSpPr>
+          <p:cNvPr id="24" name="TextBox 23"/>
+          <p:cNvSpPr txBox="1"/>
+          <p:nvPr/>
+        </p:nvSpPr>
+        <p:spPr>
+          <a:xfrm>
+            <a:off x="406403" y="592784"/>
+            <a:ext cx="457200" cy="438582"/>
+          </a:xfrm>
+          <a:prstGeom prst="rect">
+            <a:avLst/>
+          </a:prstGeom>
+        </p:spPr>
+        <p:txBody>
+          <a:bodyPr vert="horz" lIns="68580" tIns="34290" rIns="68580" bIns="34290" rtlCol="0" anchor="ctr">
+            <a:noAutofit/>
+          </a:bodyPr>
+          <a:lstStyle/>
+          <a:p>
+            <a:pPr lvl="0"/>
+            <a:r>
+              <a:rPr lang="en-US" sz="6000" baseline="0" dirty="0">
+                <a:ln w="3175" cmpd="sng">
+                  <a:noFill/>
+                </a:ln>
+                <a:solidFill>
+                  <a:schemeClr val="accent1">
+                    <a:lumMod val="60000"/>
+                    <a:lumOff val="40000"/>
+                  </a:schemeClr>
+                </a:solidFill>
+                <a:effectLst/>
+                <a:latin typeface="Arial"/>
+              </a:rPr>
+              <a:t>“</a:t>
+            </a:r>
+          </a:p>
+        </p:txBody>
+      </p:sp>
+      <p:sp>
+        <p:nvSpPr>
+          <p:cNvPr id="25" name="TextBox 24"/>
+          <p:cNvSpPr txBox="1"/>
+          <p:nvPr/>
+        </p:nvSpPr>
+        <p:spPr>
+          <a:xfrm>
+            <a:off x="6669758" y="2164917"/>
+            <a:ext cx="457200" cy="438582"/>
+          </a:xfrm>
+          <a:prstGeom prst="rect">
+            <a:avLst/>
+          </a:prstGeom>
+        </p:spPr>
+        <p:txBody>
+          <a:bodyPr vert="horz" lIns="68580" tIns="34290" rIns="68580" bIns="34290" rtlCol="0" anchor="ctr">
+            <a:noAutofit/>
+          </a:bodyPr>
+          <a:lstStyle/>
+          <a:p>
+            <a:pPr lvl="0"/>
+            <a:r>
+              <a:rPr lang="en-US" sz="6000" baseline="0" dirty="0">
+                <a:ln w="3175" cmpd="sng">
+                  <a:noFill/>
+                </a:ln>
+                <a:solidFill>
+                  <a:schemeClr val="accent1">
+                    <a:lumMod val="60000"/>
+                    <a:lumOff val="40000"/>
+                  </a:schemeClr>
+                </a:solidFill>
+                <a:effectLst/>
+                <a:latin typeface="Arial"/>
+              </a:rPr>
+              <a:t>”</a:t>
+            </a:r>
+          </a:p>
+        </p:txBody>
+      </p:sp>
+    </p:spTree>
+    <p:extLst>
+      <p:ext uri="{BB962C8B-B14F-4D97-AF65-F5344CB8AC3E}">
+        <p14:creationId xmlns:p14="http://schemas.microsoft.com/office/powerpoint/2010/main" val="2685551710"/>
+      </p:ext>
+    </p:extLst>
+  </p:cSld>
+  <p:clrMapOvr>
+    <a:masterClrMapping/>
+  </p:clrMapOvr>
+</p:sldLayout>
+</file>
+
+<file path=ppt/slideLayouts/slideLayout14.xml><?xml version="1.0" encoding="utf-8"?>
+<p:sldLayout xmlns:a="http://schemas.openxmlformats.org/drawingml/2006/main" xmlns:r="http://schemas.openxmlformats.org/officeDocument/2006/relationships" xmlns:p="http://schemas.openxmlformats.org/presentationml/2006/main" preserve="1">
+  <p:cSld name="True or False">
+    <p:spTree>
+      <p:nvGrpSpPr>
+        <p:cNvPr id="1" name=""/>
+        <p:cNvGrpSpPr/>
+        <p:nvPr/>
+      </p:nvGrpSpPr>
+      <p:grpSpPr>
+        <a:xfrm>
+          <a:off x="0" y="0"/>
+          <a:ext cx="0" cy="0"/>
+          <a:chOff x="0" y="0"/>
+          <a:chExt cx="0" cy="0"/>
+        </a:xfrm>
+      </p:grpSpPr>
+      <p:sp>
+        <p:nvSpPr>
+          <p:cNvPr id="2" name="Title 1"/>
+          <p:cNvSpPr>
+            <a:spLocks noGrp="1"/>
+          </p:cNvSpPr>
+          <p:nvPr>
+            <p:ph type="title"/>
+          </p:nvPr>
+        </p:nvSpPr>
+        <p:spPr>
+          <a:xfrm>
+            <a:off x="514350" y="457200"/>
+            <a:ext cx="6441152" cy="2266950"/>
+          </a:xfrm>
+        </p:spPr>
+        <p:txBody>
+          <a:bodyPr anchor="ctr">
+            <a:normAutofit/>
+          </a:bodyPr>
+          <a:lstStyle>
+            <a:lvl1pPr algn="l">
+              <a:defRPr sz="3300" b="0" cap="none"/>
+            </a:lvl1pPr>
+          </a:lstStyle>
+          <a:p>
+            <a:r>
+              <a:rPr lang="en-US"/>
+              <a:t>Click to edit Master title style</a:t>
+            </a:r>
+            <a:endParaRPr lang="en-US" dirty="0"/>
+          </a:p>
+        </p:txBody>
+      </p:sp>
+      <p:sp>
+        <p:nvSpPr>
+          <p:cNvPr id="23" name="Text Placeholder 9"/>
+          <p:cNvSpPr>
+            <a:spLocks noGrp="1"/>
+          </p:cNvSpPr>
+          <p:nvPr>
+            <p:ph type="body" sz="quarter" idx="13"/>
+          </p:nvPr>
+        </p:nvSpPr>
+        <p:spPr>
+          <a:xfrm>
+            <a:off x="507999" y="3009900"/>
+            <a:ext cx="6447502" cy="385686"/>
+          </a:xfrm>
+        </p:spPr>
+        <p:txBody>
+          <a:bodyPr anchor="b">
+            <a:noAutofit/>
+          </a:bodyPr>
+          <a:lstStyle>
+            <a:lvl1pPr marL="0" indent="0">
+              <a:buFontTx/>
+              <a:buNone/>
+              <a:defRPr sz="1800">
+                <a:solidFill>
+                  <a:schemeClr val="accent1"/>
+                </a:solidFill>
+              </a:defRPr>
+            </a:lvl1pPr>
+            <a:lvl2pPr marL="342900" indent="0">
+              <a:buFontTx/>
+              <a:buNone/>
+              <a:defRPr/>
+            </a:lvl2pPr>
+            <a:lvl3pPr marL="685800" indent="0">
+              <a:buFontTx/>
+              <a:buNone/>
+              <a:defRPr/>
+            </a:lvl3pPr>
+            <a:lvl4pPr marL="1028700" indent="0">
+              <a:buFontTx/>
+              <a:buNone/>
+              <a:defRPr/>
+            </a:lvl4pPr>
+            <a:lvl5pPr marL="1371600" indent="0">
+              <a:buFontTx/>
+              <a:buNone/>
+              <a:defRPr/>
+            </a:lvl5pPr>
+          </a:lstStyle>
+          <a:p>
+            <a:pPr lvl="0"/>
+            <a:r>
+              <a:rPr lang="en-US"/>
+              <a:t>Click to edit Master text styles</a:t>
+            </a:r>
+          </a:p>
+        </p:txBody>
+      </p:sp>
+      <p:sp>
+        <p:nvSpPr>
+          <p:cNvPr id="3" name="Text Placeholder 2"/>
+          <p:cNvSpPr>
+            <a:spLocks noGrp="1"/>
+          </p:cNvSpPr>
+          <p:nvPr>
+            <p:ph type="body" idx="1"/>
+          </p:nvPr>
+        </p:nvSpPr>
+        <p:spPr>
+          <a:xfrm>
+            <a:off x="508001" y="3395586"/>
+            <a:ext cx="6447501" cy="1135436"/>
+          </a:xfrm>
+        </p:spPr>
+        <p:txBody>
+          <a:bodyPr anchor="t">
+            <a:normAutofit/>
+          </a:bodyPr>
+          <a:lstStyle>
+            <a:lvl1pPr marL="0" indent="0" algn="l">
+              <a:buNone/>
+              <a:defRPr sz="1350">
+                <a:solidFill>
+                  <a:schemeClr val="tx1">
+                    <a:lumMod val="50000"/>
+                    <a:lumOff val="50000"/>
+                  </a:schemeClr>
+                </a:solidFill>
+              </a:defRPr>
+            </a:lvl1pPr>
+            <a:lvl2pPr marL="342900" indent="0">
+              <a:buNone/>
+              <a:defRPr sz="1350">
+                <a:solidFill>
+                  <a:schemeClr val="tx1">
+                    <a:tint val="75000"/>
+                  </a:schemeClr>
+                </a:solidFill>
+              </a:defRPr>
+            </a:lvl2pPr>
+            <a:lvl3pPr marL="685800" indent="0">
+              <a:buNone/>
+              <a:defRPr sz="1200">
+                <a:solidFill>
+                  <a:schemeClr val="tx1">
+                    <a:tint val="75000"/>
+                  </a:schemeClr>
+                </a:solidFill>
+              </a:defRPr>
+            </a:lvl3pPr>
+            <a:lvl4pPr marL="1028700" indent="0">
+              <a:buNone/>
+              <a:defRPr sz="1050">
+                <a:solidFill>
+                  <a:schemeClr val="tx1">
+                    <a:tint val="75000"/>
+                  </a:schemeClr>
+                </a:solidFill>
+              </a:defRPr>
+            </a:lvl4pPr>
+            <a:lvl5pPr marL="1371600" indent="0">
+              <a:buNone/>
+              <a:defRPr sz="1050">
+                <a:solidFill>
+                  <a:schemeClr val="tx1">
+                    <a:tint val="75000"/>
+                  </a:schemeClr>
+                </a:solidFill>
+              </a:defRPr>
+            </a:lvl5pPr>
+            <a:lvl6pPr marL="1714500" indent="0">
+              <a:buNone/>
+              <a:defRPr sz="1050">
+                <a:solidFill>
+                  <a:schemeClr val="tx1">
+                    <a:tint val="75000"/>
+                  </a:schemeClr>
+                </a:solidFill>
+              </a:defRPr>
+            </a:lvl6pPr>
+            <a:lvl7pPr marL="2057400" indent="0">
+              <a:buNone/>
+              <a:defRPr sz="1050">
+                <a:solidFill>
+                  <a:schemeClr val="tx1">
+                    <a:tint val="75000"/>
+                  </a:schemeClr>
+                </a:solidFill>
+              </a:defRPr>
+            </a:lvl7pPr>
+            <a:lvl8pPr marL="2400300" indent="0">
+              <a:buNone/>
+              <a:defRPr sz="1050">
+                <a:solidFill>
+                  <a:schemeClr val="tx1">
+                    <a:tint val="75000"/>
+                  </a:schemeClr>
+                </a:solidFill>
+              </a:defRPr>
+            </a:lvl8pPr>
+            <a:lvl9pPr marL="2743200" indent="0">
+              <a:buNone/>
+              <a:defRPr sz="1050">
+                <a:solidFill>
+                  <a:schemeClr val="tx1">
+                    <a:tint val="75000"/>
+                  </a:schemeClr>
+                </a:solidFill>
+              </a:defRPr>
+            </a:lvl9pPr>
+          </a:lstStyle>
+          <a:p>
+            <a:pPr lvl="0"/>
+            <a:r>
+              <a:rPr lang="en-US"/>
+              <a:t>Click to edit Master text styles</a:t>
+            </a:r>
+          </a:p>
+        </p:txBody>
+      </p:sp>
+      <p:sp>
+        <p:nvSpPr>
+          <p:cNvPr id="4" name="Date Placeholder 3"/>
+          <p:cNvSpPr>
+            <a:spLocks noGrp="1"/>
+          </p:cNvSpPr>
+          <p:nvPr>
+            <p:ph type="dt" sz="half" idx="10"/>
+          </p:nvPr>
+        </p:nvSpPr>
+        <p:spPr/>
+        <p:txBody>
+          <a:bodyPr/>
+          <a:lstStyle/>
+          <a:p>
+            <a:fld id="{241EB5C9-1307-BA42-ABA2-0BC069CD8E7F}" type="datetimeFigureOut">
+              <a:rPr lang="en-US" smtClean="0"/>
+              <a:t>3/7/2026</a:t>
+            </a:fld>
+            <a:endParaRPr lang="en-US"/>
+          </a:p>
+        </p:txBody>
+      </p:sp>
+      <p:sp>
+        <p:nvSpPr>
+          <p:cNvPr id="5" name="Footer Placeholder 4"/>
+          <p:cNvSpPr>
+            <a:spLocks noGrp="1"/>
+          </p:cNvSpPr>
+          <p:nvPr>
+            <p:ph type="ftr" sz="quarter" idx="11"/>
+          </p:nvPr>
+        </p:nvSpPr>
+        <p:spPr/>
+        <p:txBody>
+          <a:bodyPr/>
+          <a:lstStyle/>
+          <a:p>
+            <a:endParaRPr lang="en-US"/>
+          </a:p>
+        </p:txBody>
+      </p:sp>
+      <p:sp>
+        <p:nvSpPr>
+          <p:cNvPr id="6" name="Slide Number Placeholder 5"/>
+          <p:cNvSpPr>
+            <a:spLocks noGrp="1"/>
+          </p:cNvSpPr>
+          <p:nvPr>
+            <p:ph type="sldNum" sz="quarter" idx="12"/>
+          </p:nvPr>
+        </p:nvSpPr>
+        <p:spPr/>
+        <p:txBody>
+          <a:bodyPr/>
+          <a:lstStyle/>
+          <a:p>
+            <a:fld id="{C5EF2332-01BF-834F-8236-50238282D533}" type="slidenum">
+              <a:rPr lang="en-US" smtClean="0"/>
+              <a:t>‹#›</a:t>
+            </a:fld>
+            <a:endParaRPr lang="en-US"/>
+          </a:p>
+        </p:txBody>
+      </p:sp>
+    </p:spTree>
+    <p:extLst>
+      <p:ext uri="{BB962C8B-B14F-4D97-AF65-F5344CB8AC3E}">
+        <p14:creationId xmlns:p14="http://schemas.microsoft.com/office/powerpoint/2010/main" val="2796248700"/>
+      </p:ext>
+    </p:extLst>
+  </p:cSld>
+  <p:clrMapOvr>
+    <a:masterClrMapping/>
+  </p:clrMapOvr>
+</p:sldLayout>
+</file>
+
+<file path=ppt/slideLayouts/slideLayout15.xml><?xml version="1.0" encoding="utf-8"?>
 <p:sldLayout xmlns:a="http://schemas.openxmlformats.org/drawingml/2006/main" xmlns:r="http://schemas.openxmlformats.org/officeDocument/2006/relationships" xmlns:p="http://schemas.openxmlformats.org/presentationml/2006/main" type="vertTx" preserve="1">
   <p:cSld name="Title and Vertical Text">
     <p:spTree>
@@ -406,6 +4201,7 @@
               <a:rPr lang="en-US"/>
               <a:t>Click to edit Master title style</a:t>
             </a:r>
+            <a:endParaRPr lang="en-US" dirty="0"/>
           </a:p>
         </p:txBody>
       </p:sp>
@@ -457,6 +4253,7 @@
               <a:rPr lang="en-US"/>
               <a:t>Fifth level</a:t>
             </a:r>
+            <a:endParaRPr lang="en-US" dirty="0"/>
           </a:p>
         </p:txBody>
       </p:sp>
@@ -477,7 +4274,7 @@
           <a:p>
             <a:fld id="{241EB5C9-1307-BA42-ABA2-0BC069CD8E7F}" type="datetimeFigureOut">
               <a:rPr lang="en-US" smtClean="0"/>
-              <a:t>1/2/22</a:t>
+              <a:t>3/7/2026</a:t>
             </a:fld>
             <a:endParaRPr lang="en-US"/>
           </a:p>
@@ -528,7 +4325,7 @@
     </p:spTree>
     <p:extLst>
       <p:ext uri="{BB962C8B-B14F-4D97-AF65-F5344CB8AC3E}">
-        <p14:creationId xmlns:p14="http://schemas.microsoft.com/office/powerpoint/2010/main" val="313914798"/>
+        <p14:creationId xmlns:p14="http://schemas.microsoft.com/office/powerpoint/2010/main" val="3973569281"/>
       </p:ext>
     </p:extLst>
   </p:cSld>
@@ -538,7 +4335,7 @@
 </p:sldLayout>
 </file>
 
-<file path=ppt/slideLayouts/slideLayout11.xml><?xml version="1.0" encoding="utf-8"?>
+<file path=ppt/slideLayouts/slideLayout16.xml><?xml version="1.0" encoding="utf-8"?>
 <p:sldLayout xmlns:a="http://schemas.openxmlformats.org/drawingml/2006/main" xmlns:r="http://schemas.openxmlformats.org/officeDocument/2006/relationships" xmlns:p="http://schemas.openxmlformats.org/presentationml/2006/main" type="vertTitleAndTx" preserve="1">
   <p:cSld name="Vertical Title and Text">
     <p:spTree>
@@ -567,41 +4364,42 @@
         </p:nvSpPr>
         <p:spPr>
           <a:xfrm>
-            <a:off x="6629400" y="205979"/>
-            <a:ext cx="2057400" cy="4388644"/>
+            <a:off x="5975755" y="457200"/>
+            <a:ext cx="978557" cy="3938588"/>
           </a:xfrm>
         </p:spPr>
         <p:txBody>
+          <a:bodyPr vert="eaVert" anchor="ctr"/>
+          <a:lstStyle/>
+          <a:p>
+            <a:r>
+              <a:rPr lang="en-US"/>
+              <a:t>Click to edit Master title style</a:t>
+            </a:r>
+            <a:endParaRPr lang="en-US" dirty="0"/>
+          </a:p>
+        </p:txBody>
+      </p:sp>
+      <p:sp>
+        <p:nvSpPr>
+          <p:cNvPr id="3" name="Vertical Text Placeholder 2"/>
+          <p:cNvSpPr>
+            <a:spLocks noGrp="1"/>
+          </p:cNvSpPr>
+          <p:nvPr>
+            <p:ph type="body" orient="vert" idx="1"/>
+          </p:nvPr>
+        </p:nvSpPr>
+        <p:spPr>
+          <a:xfrm>
+            <a:off x="508001" y="457200"/>
+            <a:ext cx="5295113" cy="3938588"/>
+          </a:xfrm>
+        </p:spPr>
+        <p:txBody>
           <a:bodyPr vert="eaVert"/>
           <a:lstStyle/>
           <a:p>
-            <a:r>
-              <a:rPr lang="en-US"/>
-              <a:t>Click to edit Master title style</a:t>
-            </a:r>
-          </a:p>
-        </p:txBody>
-      </p:sp>
-      <p:sp>
-        <p:nvSpPr>
-          <p:cNvPr id="3" name="Vertical Text Placeholder 2"/>
-          <p:cNvSpPr>
-            <a:spLocks noGrp="1"/>
-          </p:cNvSpPr>
-          <p:nvPr>
-            <p:ph type="body" orient="vert" idx="1"/>
-          </p:nvPr>
-        </p:nvSpPr>
-        <p:spPr>
-          <a:xfrm>
-            <a:off x="457200" y="205979"/>
-            <a:ext cx="6019800" cy="4388644"/>
-          </a:xfrm>
-        </p:spPr>
-        <p:txBody>
-          <a:bodyPr vert="eaVert"/>
-          <a:lstStyle/>
-          <a:p>
             <a:pPr lvl="0"/>
             <a:r>
               <a:rPr lang="en-US"/>
@@ -635,6 +4433,7 @@
               <a:rPr lang="en-US"/>
               <a:t>Fifth level</a:t>
             </a:r>
+            <a:endParaRPr lang="en-US" dirty="0"/>
           </a:p>
         </p:txBody>
       </p:sp>
@@ -655,7 +4454,7 @@
           <a:p>
             <a:fld id="{241EB5C9-1307-BA42-ABA2-0BC069CD8E7F}" type="datetimeFigureOut">
               <a:rPr lang="en-US" smtClean="0"/>
-              <a:t>1/2/22</a:t>
+              <a:t>3/7/2026</a:t>
             </a:fld>
             <a:endParaRPr lang="en-US"/>
           </a:p>
@@ -706,7 +4505,7 @@
     </p:spTree>
     <p:extLst>
       <p:ext uri="{BB962C8B-B14F-4D97-AF65-F5344CB8AC3E}">
-        <p14:creationId xmlns:p14="http://schemas.microsoft.com/office/powerpoint/2010/main" val="2581529045"/>
+        <p14:creationId xmlns:p14="http://schemas.microsoft.com/office/powerpoint/2010/main" val="1545409647"/>
       </p:ext>
     </p:extLst>
   </p:cSld>
@@ -752,6 +4551,7 @@
               <a:rPr lang="en-US"/>
               <a:t>Click to edit Master title style</a:t>
             </a:r>
+            <a:endParaRPr lang="en-US" dirty="0"/>
           </a:p>
         </p:txBody>
       </p:sp>
@@ -803,6 +4603,7 @@
               <a:rPr lang="en-US"/>
               <a:t>Fifth level</a:t>
             </a:r>
+            <a:endParaRPr lang="en-US" dirty="0"/>
           </a:p>
         </p:txBody>
       </p:sp>
@@ -823,7 +4624,7 @@
           <a:p>
             <a:fld id="{241EB5C9-1307-BA42-ABA2-0BC069CD8E7F}" type="datetimeFigureOut">
               <a:rPr lang="en-US" smtClean="0"/>
-              <a:t>1/2/22</a:t>
+              <a:t>3/7/2026</a:t>
             </a:fld>
             <a:endParaRPr lang="en-US"/>
           </a:p>
@@ -874,7 +4675,7 @@
     </p:spTree>
     <p:extLst>
       <p:ext uri="{BB962C8B-B14F-4D97-AF65-F5344CB8AC3E}">
-        <p14:creationId xmlns:p14="http://schemas.microsoft.com/office/powerpoint/2010/main" val="338346009"/>
+        <p14:creationId xmlns:p14="http://schemas.microsoft.com/office/powerpoint/2010/main" val="845091392"/>
       </p:ext>
     </p:extLst>
   </p:cSld>
@@ -913,50 +4714,52 @@
         </p:nvSpPr>
         <p:spPr>
           <a:xfrm>
-            <a:off x="722313" y="3305176"/>
-            <a:ext cx="7772400" cy="1021556"/>
+            <a:off x="508001" y="2025651"/>
+            <a:ext cx="6447501" cy="1369936"/>
           </a:xfrm>
         </p:spPr>
         <p:txBody>
+          <a:bodyPr anchor="b"/>
+          <a:lstStyle>
+            <a:lvl1pPr algn="l">
+              <a:defRPr sz="3000" b="0" cap="none"/>
+            </a:lvl1pPr>
+          </a:lstStyle>
+          <a:p>
+            <a:r>
+              <a:rPr lang="en-US"/>
+              <a:t>Click to edit Master title style</a:t>
+            </a:r>
+            <a:endParaRPr lang="en-US" dirty="0"/>
+          </a:p>
+        </p:txBody>
+      </p:sp>
+      <p:sp>
+        <p:nvSpPr>
+          <p:cNvPr id="3" name="Text Placeholder 2"/>
+          <p:cNvSpPr>
+            <a:spLocks noGrp="1"/>
+          </p:cNvSpPr>
+          <p:nvPr>
+            <p:ph type="body" idx="1"/>
+          </p:nvPr>
+        </p:nvSpPr>
+        <p:spPr>
+          <a:xfrm>
+            <a:off x="508001" y="3395586"/>
+            <a:ext cx="6447501" cy="645300"/>
+          </a:xfrm>
+        </p:spPr>
+        <p:txBody>
           <a:bodyPr anchor="t"/>
           <a:lstStyle>
-            <a:lvl1pPr algn="l">
-              <a:defRPr sz="3000" b="1" cap="all"/>
-            </a:lvl1pPr>
-          </a:lstStyle>
-          <a:p>
-            <a:r>
-              <a:rPr lang="en-US"/>
-              <a:t>Click to edit Master title style</a:t>
-            </a:r>
-          </a:p>
-        </p:txBody>
-      </p:sp>
-      <p:sp>
-        <p:nvSpPr>
-          <p:cNvPr id="3" name="Text Placeholder 2"/>
-          <p:cNvSpPr>
-            <a:spLocks noGrp="1"/>
-          </p:cNvSpPr>
-          <p:nvPr>
-            <p:ph type="body" idx="1"/>
-          </p:nvPr>
-        </p:nvSpPr>
-        <p:spPr>
-          <a:xfrm>
-            <a:off x="722313" y="2180035"/>
-            <a:ext cx="7772400" cy="1125140"/>
-          </a:xfrm>
-        </p:spPr>
-        <p:txBody>
-          <a:bodyPr anchor="b"/>
-          <a:lstStyle>
-            <a:lvl1pPr marL="0" indent="0">
+            <a:lvl1pPr marL="0" indent="0" algn="l">
               <a:buNone/>
               <a:defRPr sz="1500">
                 <a:solidFill>
                   <a:schemeClr val="tx1">
-                    <a:tint val="75000"/>
+                    <a:lumMod val="50000"/>
+                    <a:lumOff val="50000"/>
                   </a:schemeClr>
                 </a:solidFill>
               </a:defRPr>
@@ -1068,7 +4871,7 @@
           <a:p>
             <a:fld id="{241EB5C9-1307-BA42-ABA2-0BC069CD8E7F}" type="datetimeFigureOut">
               <a:rPr lang="en-US" smtClean="0"/>
-              <a:t>1/2/22</a:t>
+              <a:t>3/7/2026</a:t>
             </a:fld>
             <a:endParaRPr lang="en-US"/>
           </a:p>
@@ -1119,7 +4922,7 @@
     </p:spTree>
     <p:extLst>
       <p:ext uri="{BB962C8B-B14F-4D97-AF65-F5344CB8AC3E}">
-        <p14:creationId xmlns:p14="http://schemas.microsoft.com/office/powerpoint/2010/main" val="1073069076"/>
+        <p14:creationId xmlns:p14="http://schemas.microsoft.com/office/powerpoint/2010/main" val="1051657075"/>
       </p:ext>
     </p:extLst>
   </p:cSld>
@@ -1165,6 +4968,7 @@
               <a:rPr lang="en-US"/>
               <a:t>Click to edit Master title style</a:t>
             </a:r>
+            <a:endParaRPr lang="en-US" dirty="0"/>
           </a:p>
         </p:txBody>
       </p:sp>
@@ -1180,41 +4984,13 @@
         </p:nvSpPr>
         <p:spPr>
           <a:xfrm>
-            <a:off x="457200" y="1200151"/>
-            <a:ext cx="4038600" cy="3394472"/>
+            <a:off x="508001" y="1620442"/>
+            <a:ext cx="3138026" cy="2910579"/>
           </a:xfrm>
         </p:spPr>
         <p:txBody>
           <a:bodyPr/>
-          <a:lstStyle>
-            <a:lvl1pPr>
-              <a:defRPr sz="2100"/>
-            </a:lvl1pPr>
-            <a:lvl2pPr>
-              <a:defRPr sz="1800"/>
-            </a:lvl2pPr>
-            <a:lvl3pPr>
-              <a:defRPr sz="1500"/>
-            </a:lvl3pPr>
-            <a:lvl4pPr>
-              <a:defRPr sz="1350"/>
-            </a:lvl4pPr>
-            <a:lvl5pPr>
-              <a:defRPr sz="1350"/>
-            </a:lvl5pPr>
-            <a:lvl6pPr>
-              <a:defRPr sz="1350"/>
-            </a:lvl6pPr>
-            <a:lvl7pPr>
-              <a:defRPr sz="1350"/>
-            </a:lvl7pPr>
-            <a:lvl8pPr>
-              <a:defRPr sz="1350"/>
-            </a:lvl8pPr>
-            <a:lvl9pPr>
-              <a:defRPr sz="1350"/>
-            </a:lvl9pPr>
-          </a:lstStyle>
+          <a:lstStyle/>
           <a:p>
             <a:pPr lvl="0"/>
             <a:r>
@@ -1249,6 +5025,7 @@
               <a:rPr lang="en-US"/>
               <a:t>Fifth level</a:t>
             </a:r>
+            <a:endParaRPr lang="en-US" dirty="0"/>
           </a:p>
         </p:txBody>
       </p:sp>
@@ -1264,41 +5041,13 @@
         </p:nvSpPr>
         <p:spPr>
           <a:xfrm>
-            <a:off x="4648200" y="1200151"/>
-            <a:ext cx="4038600" cy="3394472"/>
+            <a:off x="3817477" y="1620442"/>
+            <a:ext cx="3138026" cy="2910580"/>
           </a:xfrm>
         </p:spPr>
         <p:txBody>
           <a:bodyPr/>
-          <a:lstStyle>
-            <a:lvl1pPr>
-              <a:defRPr sz="2100"/>
-            </a:lvl1pPr>
-            <a:lvl2pPr>
-              <a:defRPr sz="1800"/>
-            </a:lvl2pPr>
-            <a:lvl3pPr>
-              <a:defRPr sz="1500"/>
-            </a:lvl3pPr>
-            <a:lvl4pPr>
-              <a:defRPr sz="1350"/>
-            </a:lvl4pPr>
-            <a:lvl5pPr>
-              <a:defRPr sz="1350"/>
-            </a:lvl5pPr>
-            <a:lvl6pPr>
-              <a:defRPr sz="1350"/>
-            </a:lvl6pPr>
-            <a:lvl7pPr>
-              <a:defRPr sz="1350"/>
-            </a:lvl7pPr>
-            <a:lvl8pPr>
-              <a:defRPr sz="1350"/>
-            </a:lvl8pPr>
-            <a:lvl9pPr>
-              <a:defRPr sz="1350"/>
-            </a:lvl9pPr>
-          </a:lstStyle>
+          <a:lstStyle/>
           <a:p>
             <a:pPr lvl="0"/>
             <a:r>
@@ -1333,6 +5082,7 @@
               <a:rPr lang="en-US"/>
               <a:t>Fifth level</a:t>
             </a:r>
+            <a:endParaRPr lang="en-US" dirty="0"/>
           </a:p>
         </p:txBody>
       </p:sp>
@@ -1353,7 +5103,7 @@
           <a:p>
             <a:fld id="{241EB5C9-1307-BA42-ABA2-0BC069CD8E7F}" type="datetimeFigureOut">
               <a:rPr lang="en-US" smtClean="0"/>
-              <a:t>1/2/22</a:t>
+              <a:t>3/7/2026</a:t>
             </a:fld>
             <a:endParaRPr lang="en-US"/>
           </a:p>
@@ -1404,7 +5154,7 @@
     </p:spTree>
     <p:extLst>
       <p:ext uri="{BB962C8B-B14F-4D97-AF65-F5344CB8AC3E}">
-        <p14:creationId xmlns:p14="http://schemas.microsoft.com/office/powerpoint/2010/main" val="2619886245"/>
+        <p14:creationId xmlns:p14="http://schemas.microsoft.com/office/powerpoint/2010/main" val="3777144885"/>
       </p:ext>
     </p:extLst>
   </p:cSld>
@@ -1454,6 +5204,7 @@
               <a:rPr lang="en-US"/>
               <a:t>Click to edit Master title style</a:t>
             </a:r>
+            <a:endParaRPr lang="en-US" dirty="0"/>
           </a:p>
         </p:txBody>
       </p:sp>
@@ -1469,16 +5220,18 @@
         </p:nvSpPr>
         <p:spPr>
           <a:xfrm>
-            <a:off x="457200" y="1151335"/>
-            <a:ext cx="4040188" cy="479822"/>
+            <a:off x="506809" y="1620737"/>
+            <a:ext cx="3139217" cy="432197"/>
           </a:xfrm>
         </p:spPr>
         <p:txBody>
-          <a:bodyPr anchor="b"/>
+          <a:bodyPr anchor="b">
+            <a:noAutofit/>
+          </a:bodyPr>
           <a:lstStyle>
             <a:lvl1pPr marL="0" indent="0">
               <a:buNone/>
-              <a:defRPr sz="1800" b="1"/>
+              <a:defRPr sz="1800" b="0"/>
             </a:lvl1pPr>
             <a:lvl2pPr marL="342900" indent="0">
               <a:buNone/>
@@ -1534,41 +5287,15 @@
         </p:nvSpPr>
         <p:spPr>
           <a:xfrm>
-            <a:off x="457200" y="1631156"/>
-            <a:ext cx="4040188" cy="2963466"/>
+            <a:off x="506809" y="2052934"/>
+            <a:ext cx="3139217" cy="2478088"/>
           </a:xfrm>
         </p:spPr>
         <p:txBody>
-          <a:bodyPr/>
-          <a:lstStyle>
-            <a:lvl1pPr>
-              <a:defRPr sz="1800"/>
-            </a:lvl1pPr>
-            <a:lvl2pPr>
-              <a:defRPr sz="1500"/>
-            </a:lvl2pPr>
-            <a:lvl3pPr>
-              <a:defRPr sz="1350"/>
-            </a:lvl3pPr>
-            <a:lvl4pPr>
-              <a:defRPr sz="1200"/>
-            </a:lvl4pPr>
-            <a:lvl5pPr>
-              <a:defRPr sz="1200"/>
-            </a:lvl5pPr>
-            <a:lvl6pPr>
-              <a:defRPr sz="1200"/>
-            </a:lvl6pPr>
-            <a:lvl7pPr>
-              <a:defRPr sz="1200"/>
-            </a:lvl7pPr>
-            <a:lvl8pPr>
-              <a:defRPr sz="1200"/>
-            </a:lvl8pPr>
-            <a:lvl9pPr>
-              <a:defRPr sz="1200"/>
-            </a:lvl9pPr>
-          </a:lstStyle>
+          <a:bodyPr>
+            <a:normAutofit/>
+          </a:bodyPr>
+          <a:lstStyle/>
           <a:p>
             <a:pPr lvl="0"/>
             <a:r>
@@ -1603,6 +5330,7 @@
               <a:rPr lang="en-US"/>
               <a:t>Fifth level</a:t>
             </a:r>
+            <a:endParaRPr lang="en-US" dirty="0"/>
           </a:p>
         </p:txBody>
       </p:sp>
@@ -1618,16 +5346,18 @@
         </p:nvSpPr>
         <p:spPr>
           <a:xfrm>
-            <a:off x="4645026" y="1151335"/>
-            <a:ext cx="4041775" cy="479822"/>
+            <a:off x="3816287" y="1620737"/>
+            <a:ext cx="3139214" cy="432197"/>
           </a:xfrm>
         </p:spPr>
         <p:txBody>
-          <a:bodyPr anchor="b"/>
+          <a:bodyPr anchor="b">
+            <a:noAutofit/>
+          </a:bodyPr>
           <a:lstStyle>
             <a:lvl1pPr marL="0" indent="0">
               <a:buNone/>
-              <a:defRPr sz="1800" b="1"/>
+              <a:defRPr sz="1800" b="0"/>
             </a:lvl1pPr>
             <a:lvl2pPr marL="342900" indent="0">
               <a:buNone/>
@@ -1683,41 +5413,15 @@
         </p:nvSpPr>
         <p:spPr>
           <a:xfrm>
-            <a:off x="4645026" y="1631156"/>
-            <a:ext cx="4041775" cy="2963466"/>
+            <a:off x="3816288" y="2052934"/>
+            <a:ext cx="3139213" cy="2478088"/>
           </a:xfrm>
         </p:spPr>
         <p:txBody>
-          <a:bodyPr/>
-          <a:lstStyle>
-            <a:lvl1pPr>
-              <a:defRPr sz="1800"/>
-            </a:lvl1pPr>
-            <a:lvl2pPr>
-              <a:defRPr sz="1500"/>
-            </a:lvl2pPr>
-            <a:lvl3pPr>
-              <a:defRPr sz="1350"/>
-            </a:lvl3pPr>
-            <a:lvl4pPr>
-              <a:defRPr sz="1200"/>
-            </a:lvl4pPr>
-            <a:lvl5pPr>
-              <a:defRPr sz="1200"/>
-            </a:lvl5pPr>
-            <a:lvl6pPr>
-              <a:defRPr sz="1200"/>
-            </a:lvl6pPr>
-            <a:lvl7pPr>
-              <a:defRPr sz="1200"/>
-            </a:lvl7pPr>
-            <a:lvl8pPr>
-              <a:defRPr sz="1200"/>
-            </a:lvl8pPr>
-            <a:lvl9pPr>
-              <a:defRPr sz="1200"/>
-            </a:lvl9pPr>
-          </a:lstStyle>
+          <a:bodyPr>
+            <a:normAutofit/>
+          </a:bodyPr>
+          <a:lstStyle/>
           <a:p>
             <a:pPr lvl="0"/>
             <a:r>
@@ -1752,6 +5456,7 @@
               <a:rPr lang="en-US"/>
               <a:t>Fifth level</a:t>
             </a:r>
+            <a:endParaRPr lang="en-US" dirty="0"/>
           </a:p>
         </p:txBody>
       </p:sp>
@@ -1772,7 +5477,7 @@
           <a:p>
             <a:fld id="{241EB5C9-1307-BA42-ABA2-0BC069CD8E7F}" type="datetimeFigureOut">
               <a:rPr lang="en-US" smtClean="0"/>
-              <a:t>1/2/22</a:t>
+              <a:t>3/7/2026</a:t>
             </a:fld>
             <a:endParaRPr lang="en-US"/>
           </a:p>
@@ -1823,7 +5528,7 @@
     </p:spTree>
     <p:extLst>
       <p:ext uri="{BB962C8B-B14F-4D97-AF65-F5344CB8AC3E}">
-        <p14:creationId xmlns:p14="http://schemas.microsoft.com/office/powerpoint/2010/main" val="2535793967"/>
+        <p14:creationId xmlns:p14="http://schemas.microsoft.com/office/powerpoint/2010/main" val="2101746738"/>
       </p:ext>
     </p:extLst>
   </p:cSld>
@@ -1860,7 +5565,12 @@
             <p:ph type="title"/>
           </p:nvPr>
         </p:nvSpPr>
-        <p:spPr/>
+        <p:spPr>
+          <a:xfrm>
+            <a:off x="508001" y="457200"/>
+            <a:ext cx="6447501" cy="990600"/>
+          </a:xfrm>
+        </p:spPr>
         <p:txBody>
           <a:bodyPr/>
           <a:lstStyle/>
@@ -1869,6 +5579,7 @@
               <a:rPr lang="en-US"/>
               <a:t>Click to edit Master title style</a:t>
             </a:r>
+            <a:endParaRPr lang="en-US" dirty="0"/>
           </a:p>
         </p:txBody>
       </p:sp>
@@ -1889,7 +5600,7 @@
           <a:p>
             <a:fld id="{241EB5C9-1307-BA42-ABA2-0BC069CD8E7F}" type="datetimeFigureOut">
               <a:rPr lang="en-US" smtClean="0"/>
-              <a:t>1/2/22</a:t>
+              <a:t>3/7/2026</a:t>
             </a:fld>
             <a:endParaRPr lang="en-US"/>
           </a:p>
@@ -1940,7 +5651,7 @@
     </p:spTree>
     <p:extLst>
       <p:ext uri="{BB962C8B-B14F-4D97-AF65-F5344CB8AC3E}">
-        <p14:creationId xmlns:p14="http://schemas.microsoft.com/office/powerpoint/2010/main" val="3472721253"/>
+        <p14:creationId xmlns:p14="http://schemas.microsoft.com/office/powerpoint/2010/main" val="2741167101"/>
       </p:ext>
     </p:extLst>
   </p:cSld>
@@ -1984,7 +5695,7 @@
           <a:p>
             <a:fld id="{241EB5C9-1307-BA42-ABA2-0BC069CD8E7F}" type="datetimeFigureOut">
               <a:rPr lang="en-US" smtClean="0"/>
-              <a:t>1/2/22</a:t>
+              <a:t>3/7/2026</a:t>
             </a:fld>
             <a:endParaRPr lang="en-US"/>
           </a:p>
@@ -2035,7 +5746,7 @@
     </p:spTree>
     <p:extLst>
       <p:ext uri="{BB962C8B-B14F-4D97-AF65-F5344CB8AC3E}">
-        <p14:creationId xmlns:p14="http://schemas.microsoft.com/office/powerpoint/2010/main" val="2130901097"/>
+        <p14:creationId xmlns:p14="http://schemas.microsoft.com/office/powerpoint/2010/main" val="3777518201"/>
       </p:ext>
     </p:extLst>
   </p:cSld>
@@ -2074,15 +5785,17 @@
         </p:nvSpPr>
         <p:spPr>
           <a:xfrm>
-            <a:off x="457201" y="204787"/>
-            <a:ext cx="3008313" cy="871538"/>
+            <a:off x="508001" y="1123953"/>
+            <a:ext cx="2890896" cy="958850"/>
           </a:xfrm>
         </p:spPr>
         <p:txBody>
-          <a:bodyPr anchor="b"/>
+          <a:bodyPr anchor="b">
+            <a:normAutofit/>
+          </a:bodyPr>
           <a:lstStyle>
-            <a:lvl1pPr algn="l">
-              <a:defRPr sz="1500" b="1"/>
+            <a:lvl1pPr>
+              <a:defRPr sz="1500"/>
             </a:lvl1pPr>
           </a:lstStyle>
           <a:p>
@@ -2090,6 +5803,7 @@
               <a:rPr lang="en-US"/>
               <a:t>Click to edit Master title style</a:t>
             </a:r>
+            <a:endParaRPr lang="en-US" dirty="0"/>
           </a:p>
         </p:txBody>
       </p:sp>
@@ -2105,39 +5819,109 @@
         </p:nvSpPr>
         <p:spPr>
           <a:xfrm>
-            <a:off x="3575050" y="204788"/>
-            <a:ext cx="5111750" cy="4389835"/>
+            <a:off x="3570346" y="386193"/>
+            <a:ext cx="3385156" cy="4144828"/>
           </a:xfrm>
         </p:spPr>
         <p:txBody>
-          <a:bodyPr/>
+          <a:bodyPr>
+            <a:normAutofit/>
+          </a:bodyPr>
+          <a:lstStyle/>
+          <a:p>
+            <a:pPr lvl="0"/>
+            <a:r>
+              <a:rPr lang="en-US"/>
+              <a:t>Click to edit Master text styles</a:t>
+            </a:r>
+          </a:p>
+          <a:p>
+            <a:pPr lvl="1"/>
+            <a:r>
+              <a:rPr lang="en-US"/>
+              <a:t>Second level</a:t>
+            </a:r>
+          </a:p>
+          <a:p>
+            <a:pPr lvl="2"/>
+            <a:r>
+              <a:rPr lang="en-US"/>
+              <a:t>Third level</a:t>
+            </a:r>
+          </a:p>
+          <a:p>
+            <a:pPr lvl="3"/>
+            <a:r>
+              <a:rPr lang="en-US"/>
+              <a:t>Fourth level</a:t>
+            </a:r>
+          </a:p>
+          <a:p>
+            <a:pPr lvl="4"/>
+            <a:r>
+              <a:rPr lang="en-US"/>
+              <a:t>Fifth level</a:t>
+            </a:r>
+            <a:endParaRPr lang="en-US" dirty="0"/>
+          </a:p>
+        </p:txBody>
+      </p:sp>
+      <p:sp>
+        <p:nvSpPr>
+          <p:cNvPr id="4" name="Text Placeholder 3"/>
+          <p:cNvSpPr>
+            <a:spLocks noGrp="1"/>
+          </p:cNvSpPr>
+          <p:nvPr>
+            <p:ph type="body" sz="half" idx="2"/>
+          </p:nvPr>
+        </p:nvSpPr>
+        <p:spPr>
+          <a:xfrm>
+            <a:off x="508001" y="2082802"/>
+            <a:ext cx="2890896" cy="1938337"/>
+          </a:xfrm>
+        </p:spPr>
+        <p:txBody>
+          <a:bodyPr>
+            <a:normAutofit/>
+          </a:bodyPr>
           <a:lstStyle>
-            <a:lvl1pPr>
-              <a:defRPr sz="2400"/>
+            <a:lvl1pPr marL="0" indent="0">
+              <a:buNone/>
+              <a:defRPr sz="1050"/>
             </a:lvl1pPr>
-            <a:lvl2pPr>
-              <a:defRPr sz="2100"/>
+            <a:lvl2pPr marL="342797" indent="0">
+              <a:buNone/>
+              <a:defRPr sz="1050"/>
             </a:lvl2pPr>
-            <a:lvl3pPr>
-              <a:defRPr sz="1800"/>
+            <a:lvl3pPr marL="685595" indent="0">
+              <a:buNone/>
+              <a:defRPr sz="900"/>
             </a:lvl3pPr>
-            <a:lvl4pPr>
-              <a:defRPr sz="1500"/>
+            <a:lvl4pPr marL="1028392" indent="0">
+              <a:buNone/>
+              <a:defRPr sz="750"/>
             </a:lvl4pPr>
-            <a:lvl5pPr>
-              <a:defRPr sz="1500"/>
+            <a:lvl5pPr marL="1371188" indent="0">
+              <a:buNone/>
+              <a:defRPr sz="750"/>
             </a:lvl5pPr>
-            <a:lvl6pPr>
-              <a:defRPr sz="1500"/>
+            <a:lvl6pPr marL="1713986" indent="0">
+              <a:buNone/>
+              <a:defRPr sz="750"/>
             </a:lvl6pPr>
-            <a:lvl7pPr>
-              <a:defRPr sz="1500"/>
+            <a:lvl7pPr marL="2056783" indent="0">
+              <a:buNone/>
+              <a:defRPr sz="750"/>
             </a:lvl7pPr>
-            <a:lvl8pPr>
-              <a:defRPr sz="1500"/>
+            <a:lvl8pPr marL="2399580" indent="0">
+              <a:buNone/>
+              <a:defRPr sz="750"/>
             </a:lvl8pPr>
-            <a:lvl9pPr>
-              <a:defRPr sz="1500"/>
+            <a:lvl9pPr marL="2742377" indent="0">
+              <a:buNone/>
+              <a:defRPr sz="750"/>
             </a:lvl9pPr>
           </a:lstStyle>
           <a:p>
@@ -2147,99 +5931,6 @@
               <a:t>Click to edit Master text styles</a:t>
             </a:r>
           </a:p>
-          <a:p>
-            <a:pPr lvl="1"/>
-            <a:r>
-              <a:rPr lang="en-US"/>
-              <a:t>Second level</a:t>
-            </a:r>
-          </a:p>
-          <a:p>
-            <a:pPr lvl="2"/>
-            <a:r>
-              <a:rPr lang="en-US"/>
-              <a:t>Third level</a:t>
-            </a:r>
-          </a:p>
-          <a:p>
-            <a:pPr lvl="3"/>
-            <a:r>
-              <a:rPr lang="en-US"/>
-              <a:t>Fourth level</a:t>
-            </a:r>
-          </a:p>
-          <a:p>
-            <a:pPr lvl="4"/>
-            <a:r>
-              <a:rPr lang="en-US"/>
-              <a:t>Fifth level</a:t>
-            </a:r>
-          </a:p>
-        </p:txBody>
-      </p:sp>
-      <p:sp>
-        <p:nvSpPr>
-          <p:cNvPr id="4" name="Text Placeholder 3"/>
-          <p:cNvSpPr>
-            <a:spLocks noGrp="1"/>
-          </p:cNvSpPr>
-          <p:nvPr>
-            <p:ph type="body" sz="half" idx="2"/>
-          </p:nvPr>
-        </p:nvSpPr>
-        <p:spPr>
-          <a:xfrm>
-            <a:off x="457201" y="1076326"/>
-            <a:ext cx="3008313" cy="3518297"/>
-          </a:xfrm>
-        </p:spPr>
-        <p:txBody>
-          <a:bodyPr/>
-          <a:lstStyle>
-            <a:lvl1pPr marL="0" indent="0">
-              <a:buNone/>
-              <a:defRPr sz="1050"/>
-            </a:lvl1pPr>
-            <a:lvl2pPr marL="342900" indent="0">
-              <a:buNone/>
-              <a:defRPr sz="900"/>
-            </a:lvl2pPr>
-            <a:lvl3pPr marL="685800" indent="0">
-              <a:buNone/>
-              <a:defRPr sz="750"/>
-            </a:lvl3pPr>
-            <a:lvl4pPr marL="1028700" indent="0">
-              <a:buNone/>
-              <a:defRPr sz="675"/>
-            </a:lvl4pPr>
-            <a:lvl5pPr marL="1371600" indent="0">
-              <a:buNone/>
-              <a:defRPr sz="675"/>
-            </a:lvl5pPr>
-            <a:lvl6pPr marL="1714500" indent="0">
-              <a:buNone/>
-              <a:defRPr sz="675"/>
-            </a:lvl6pPr>
-            <a:lvl7pPr marL="2057400" indent="0">
-              <a:buNone/>
-              <a:defRPr sz="675"/>
-            </a:lvl7pPr>
-            <a:lvl8pPr marL="2400300" indent="0">
-              <a:buNone/>
-              <a:defRPr sz="675"/>
-            </a:lvl8pPr>
-            <a:lvl9pPr marL="2743200" indent="0">
-              <a:buNone/>
-              <a:defRPr sz="675"/>
-            </a:lvl9pPr>
-          </a:lstStyle>
-          <a:p>
-            <a:pPr lvl="0"/>
-            <a:r>
-              <a:rPr lang="en-US"/>
-              <a:t>Click to edit Master text styles</a:t>
-            </a:r>
-          </a:p>
         </p:txBody>
       </p:sp>
       <p:sp>
@@ -2259,7 +5950,7 @@
           <a:p>
             <a:fld id="{241EB5C9-1307-BA42-ABA2-0BC069CD8E7F}" type="datetimeFigureOut">
               <a:rPr lang="en-US" smtClean="0"/>
-              <a:t>1/2/22</a:t>
+              <a:t>3/7/2026</a:t>
             </a:fld>
             <a:endParaRPr lang="en-US"/>
           </a:p>
@@ -2310,7 +6001,7 @@
     </p:spTree>
     <p:extLst>
       <p:ext uri="{BB962C8B-B14F-4D97-AF65-F5344CB8AC3E}">
-        <p14:creationId xmlns:p14="http://schemas.microsoft.com/office/powerpoint/2010/main" val="3540895647"/>
+        <p14:creationId xmlns:p14="http://schemas.microsoft.com/office/powerpoint/2010/main" val="2693885482"/>
       </p:ext>
     </p:extLst>
   </p:cSld>
@@ -2349,15 +6040,17 @@
         </p:nvSpPr>
         <p:spPr>
           <a:xfrm>
-            <a:off x="1792288" y="3600450"/>
-            <a:ext cx="5486400" cy="425054"/>
+            <a:off x="508001" y="3600450"/>
+            <a:ext cx="6447500" cy="425054"/>
           </a:xfrm>
         </p:spPr>
         <p:txBody>
-          <a:bodyPr anchor="b"/>
+          <a:bodyPr anchor="b">
+            <a:normAutofit/>
+          </a:bodyPr>
           <a:lstStyle>
             <a:lvl1pPr algn="l">
-              <a:defRPr sz="1500" b="1"/>
+              <a:defRPr sz="1800" b="0"/>
             </a:lvl1pPr>
           </a:lstStyle>
           <a:p>
@@ -2365,6 +6058,7 @@
               <a:rPr lang="en-US"/>
               <a:t>Click to edit Master title style</a:t>
             </a:r>
+            <a:endParaRPr lang="en-US" dirty="0"/>
           </a:p>
         </p:txBody>
       </p:sp>
@@ -2372,7 +6066,7 @@
         <p:nvSpPr>
           <p:cNvPr id="3" name="Picture Placeholder 2"/>
           <p:cNvSpPr>
-            <a:spLocks noGrp="1"/>
+            <a:spLocks noGrp="1" noChangeAspect="1"/>
           </p:cNvSpPr>
           <p:nvPr>
             <p:ph type="pic" idx="1"/>
@@ -2380,77 +6074,85 @@
         </p:nvSpPr>
         <p:spPr>
           <a:xfrm>
-            <a:off x="1792288" y="459581"/>
-            <a:ext cx="5486400" cy="3086100"/>
+            <a:off x="508001" y="457200"/>
+            <a:ext cx="6447501" cy="2884289"/>
           </a:xfrm>
         </p:spPr>
         <p:txBody>
-          <a:bodyPr/>
+          <a:bodyPr anchor="t">
+            <a:normAutofit/>
+          </a:bodyPr>
+          <a:lstStyle>
+            <a:lvl1pPr marL="0" indent="0" algn="ctr">
+              <a:buNone/>
+              <a:defRPr sz="1200"/>
+            </a:lvl1pPr>
+            <a:lvl2pPr marL="342900" indent="0">
+              <a:buNone/>
+              <a:defRPr sz="1200"/>
+            </a:lvl2pPr>
+            <a:lvl3pPr marL="685800" indent="0">
+              <a:buNone/>
+              <a:defRPr sz="1200"/>
+            </a:lvl3pPr>
+            <a:lvl4pPr marL="1028700" indent="0">
+              <a:buNone/>
+              <a:defRPr sz="1200"/>
+            </a:lvl4pPr>
+            <a:lvl5pPr marL="1371600" indent="0">
+              <a:buNone/>
+              <a:defRPr sz="1200"/>
+            </a:lvl5pPr>
+            <a:lvl6pPr marL="1714500" indent="0">
+              <a:buNone/>
+              <a:defRPr sz="1200"/>
+            </a:lvl6pPr>
+            <a:lvl7pPr marL="2057400" indent="0">
+              <a:buNone/>
+              <a:defRPr sz="1200"/>
+            </a:lvl7pPr>
+            <a:lvl8pPr marL="2400300" indent="0">
+              <a:buNone/>
+              <a:defRPr sz="1200"/>
+            </a:lvl8pPr>
+            <a:lvl9pPr marL="2743200" indent="0">
+              <a:buNone/>
+              <a:defRPr sz="1200"/>
+            </a:lvl9pPr>
+          </a:lstStyle>
+          <a:p>
+            <a:r>
+              <a:rPr lang="en-US"/>
+              <a:t>Click icon to add picture</a:t>
+            </a:r>
+            <a:endParaRPr lang="en-US" dirty="0"/>
+          </a:p>
+        </p:txBody>
+      </p:sp>
+      <p:sp>
+        <p:nvSpPr>
+          <p:cNvPr id="4" name="Text Placeholder 3"/>
+          <p:cNvSpPr>
+            <a:spLocks noGrp="1"/>
+          </p:cNvSpPr>
+          <p:nvPr>
+            <p:ph type="body" sz="half" idx="2"/>
+          </p:nvPr>
+        </p:nvSpPr>
+        <p:spPr>
+          <a:xfrm>
+            <a:off x="508001" y="4025504"/>
+            <a:ext cx="6447500" cy="505518"/>
+          </a:xfrm>
+        </p:spPr>
+        <p:txBody>
+          <a:bodyPr>
+            <a:normAutofit/>
+          </a:bodyPr>
           <a:lstStyle>
             <a:lvl1pPr marL="0" indent="0">
               <a:buNone/>
-              <a:defRPr sz="2400"/>
-            </a:lvl1pPr>
-            <a:lvl2pPr marL="342900" indent="0">
-              <a:buNone/>
-              <a:defRPr sz="2100"/>
-            </a:lvl2pPr>
-            <a:lvl3pPr marL="685800" indent="0">
-              <a:buNone/>
-              <a:defRPr sz="1800"/>
-            </a:lvl3pPr>
-            <a:lvl4pPr marL="1028700" indent="0">
-              <a:buNone/>
-              <a:defRPr sz="1500"/>
-            </a:lvl4pPr>
-            <a:lvl5pPr marL="1371600" indent="0">
-              <a:buNone/>
-              <a:defRPr sz="1500"/>
-            </a:lvl5pPr>
-            <a:lvl6pPr marL="1714500" indent="0">
-              <a:buNone/>
-              <a:defRPr sz="1500"/>
-            </a:lvl6pPr>
-            <a:lvl7pPr marL="2057400" indent="0">
-              <a:buNone/>
-              <a:defRPr sz="1500"/>
-            </a:lvl7pPr>
-            <a:lvl8pPr marL="2400300" indent="0">
-              <a:buNone/>
-              <a:defRPr sz="1500"/>
-            </a:lvl8pPr>
-            <a:lvl9pPr marL="2743200" indent="0">
-              <a:buNone/>
-              <a:defRPr sz="1500"/>
-            </a:lvl9pPr>
-          </a:lstStyle>
-          <a:p>
-            <a:endParaRPr lang="en-US"/>
-          </a:p>
-        </p:txBody>
-      </p:sp>
-      <p:sp>
-        <p:nvSpPr>
-          <p:cNvPr id="4" name="Text Placeholder 3"/>
-          <p:cNvSpPr>
-            <a:spLocks noGrp="1"/>
-          </p:cNvSpPr>
-          <p:nvPr>
-            <p:ph type="body" sz="half" idx="2"/>
-          </p:nvPr>
-        </p:nvSpPr>
-        <p:spPr>
-          <a:xfrm>
-            <a:off x="1792288" y="4025503"/>
-            <a:ext cx="5486400" cy="603647"/>
-          </a:xfrm>
-        </p:spPr>
-        <p:txBody>
-          <a:bodyPr/>
-          <a:lstStyle>
-            <a:lvl1pPr marL="0" indent="0">
-              <a:buNone/>
-              <a:defRPr sz="1050"/>
+              <a:defRPr sz="900"/>
             </a:lvl1pPr>
             <a:lvl2pPr marL="342900" indent="0">
               <a:buNone/>
@@ -2491,29 +6193,6 @@
               <a:rPr lang="en-US"/>
               <a:t>Click to edit Master text styles</a:t>
             </a:r>
-          </a:p>
-        </p:txBody>
-      </p:sp>
-      <p:sp>
-        <p:nvSpPr>
-          <p:cNvPr id="5" name="Date Placeholder 4"/>
-          <p:cNvSpPr>
-            <a:spLocks noGrp="1"/>
-          </p:cNvSpPr>
-          <p:nvPr>
-            <p:ph type="dt" sz="half" idx="10"/>
-          </p:nvPr>
-        </p:nvSpPr>
-        <p:spPr/>
-        <p:txBody>
-          <a:bodyPr/>
-          <a:lstStyle/>
-          <a:p>
-            <a:fld id="{241EB5C9-1307-BA42-ABA2-0BC069CD8E7F}" type="datetimeFigureOut">
-              <a:rPr lang="en-US" smtClean="0"/>
-              <a:t>1/2/22</a:t>
-            </a:fld>
-            <a:endParaRPr lang="en-US"/>
           </a:p>
         </p:txBody>
       </p:sp>
@@ -2559,10 +6238,33 @@
           </a:p>
         </p:txBody>
       </p:sp>
+      <p:sp>
+        <p:nvSpPr>
+          <p:cNvPr id="5" name="Date Placeholder 4"/>
+          <p:cNvSpPr>
+            <a:spLocks noGrp="1"/>
+          </p:cNvSpPr>
+          <p:nvPr>
+            <p:ph type="dt" sz="half" idx="10"/>
+          </p:nvPr>
+        </p:nvSpPr>
+        <p:spPr/>
+        <p:txBody>
+          <a:bodyPr/>
+          <a:lstStyle/>
+          <a:p>
+            <a:fld id="{241EB5C9-1307-BA42-ABA2-0BC069CD8E7F}" type="datetimeFigureOut">
+              <a:rPr lang="en-US" smtClean="0"/>
+              <a:t>3/7/2026</a:t>
+            </a:fld>
+            <a:endParaRPr lang="en-US"/>
+          </a:p>
+        </p:txBody>
+      </p:sp>
     </p:spTree>
     <p:extLst>
       <p:ext uri="{BB962C8B-B14F-4D97-AF65-F5344CB8AC3E}">
-        <p14:creationId xmlns:p14="http://schemas.microsoft.com/office/powerpoint/2010/main" val="3566899855"/>
+        <p14:creationId xmlns:p14="http://schemas.microsoft.com/office/powerpoint/2010/main" val="886915112"/>
       </p:ext>
     </p:extLst>
   </p:cSld>
@@ -2573,7 +6275,7 @@
 </file>
 
 <file path=ppt/slideMasters/slideMaster1.xml><?xml version="1.0" encoding="utf-8"?>
-<p:sldMaster xmlns:a="http://schemas.openxmlformats.org/drawingml/2006/main" xmlns:p="http://schemas.openxmlformats.org/presentationml/2006/main" xmlns:r="http://schemas.openxmlformats.org/officeDocument/2006/relationships">
+<p:sldMaster xmlns:a="http://schemas.openxmlformats.org/drawingml/2006/main" xmlns:r="http://schemas.openxmlformats.org/officeDocument/2006/relationships" xmlns:p="http://schemas.openxmlformats.org/presentationml/2006/main">
   <p:cSld>
     <p:bg>
       <p:bgRef idx="1001">
@@ -2594,6 +6296,537 @@
           <a:chExt cx="0" cy="0"/>
         </a:xfrm>
       </p:grpSpPr>
+      <p:grpSp>
+        <p:nvGrpSpPr>
+          <p:cNvPr id="44" name="Group 43"/>
+          <p:cNvGrpSpPr/>
+          <p:nvPr/>
+        </p:nvGrpSpPr>
+        <p:grpSpPr>
+          <a:xfrm>
+            <a:off x="0" y="-6350"/>
+            <a:ext cx="9144000" cy="5149850"/>
+            <a:chOff x="0" y="-8467"/>
+            <a:chExt cx="12192000" cy="6866467"/>
+          </a:xfrm>
+        </p:grpSpPr>
+        <p:cxnSp>
+          <p:nvCxnSpPr>
+            <p:cNvPr id="20" name="Straight Connector 19"/>
+            <p:cNvCxnSpPr/>
+            <p:nvPr/>
+          </p:nvCxnSpPr>
+          <p:spPr>
+            <a:xfrm>
+              <a:off x="9371012" y="0"/>
+              <a:ext cx="1219200" cy="6858000"/>
+            </a:xfrm>
+            <a:prstGeom prst="line">
+              <a:avLst/>
+            </a:prstGeom>
+            <a:ln w="9525">
+              <a:solidFill>
+                <a:schemeClr val="accent1">
+                  <a:alpha val="70000"/>
+                </a:schemeClr>
+              </a:solidFill>
+            </a:ln>
+          </p:spPr>
+          <p:style>
+            <a:lnRef idx="2">
+              <a:schemeClr val="accent1"/>
+            </a:lnRef>
+            <a:fillRef idx="0">
+              <a:schemeClr val="accent1"/>
+            </a:fillRef>
+            <a:effectRef idx="1">
+              <a:schemeClr val="accent1"/>
+            </a:effectRef>
+            <a:fontRef idx="minor">
+              <a:schemeClr val="tx1"/>
+            </a:fontRef>
+          </p:style>
+        </p:cxnSp>
+        <p:cxnSp>
+          <p:nvCxnSpPr>
+            <p:cNvPr id="21" name="Straight Connector 20"/>
+            <p:cNvCxnSpPr/>
+            <p:nvPr/>
+          </p:nvCxnSpPr>
+          <p:spPr>
+            <a:xfrm flipH="1">
+              <a:off x="7425267" y="3681413"/>
+              <a:ext cx="4763558" cy="3176587"/>
+            </a:xfrm>
+            <a:prstGeom prst="line">
+              <a:avLst/>
+            </a:prstGeom>
+            <a:ln w="9525">
+              <a:solidFill>
+                <a:schemeClr val="accent1">
+                  <a:alpha val="70000"/>
+                </a:schemeClr>
+              </a:solidFill>
+            </a:ln>
+          </p:spPr>
+          <p:style>
+            <a:lnRef idx="2">
+              <a:schemeClr val="accent1"/>
+            </a:lnRef>
+            <a:fillRef idx="0">
+              <a:schemeClr val="accent1"/>
+            </a:fillRef>
+            <a:effectRef idx="1">
+              <a:schemeClr val="accent1"/>
+            </a:effectRef>
+            <a:fontRef idx="minor">
+              <a:schemeClr val="tx1"/>
+            </a:fontRef>
+          </p:style>
+        </p:cxnSp>
+        <p:sp>
+          <p:nvSpPr>
+            <p:cNvPr id="22" name="Rectangle 23"/>
+            <p:cNvSpPr/>
+            <p:nvPr/>
+          </p:nvSpPr>
+          <p:spPr>
+            <a:xfrm>
+              <a:off x="9181476" y="-8467"/>
+              <a:ext cx="3007349" cy="6866467"/>
+            </a:xfrm>
+            <a:custGeom>
+              <a:avLst/>
+              <a:gdLst/>
+              <a:ahLst/>
+              <a:cxnLst/>
+              <a:rect l="l" t="t" r="r" b="b"/>
+              <a:pathLst>
+                <a:path w="3007349" h="6866467">
+                  <a:moveTo>
+                    <a:pt x="2045532" y="0"/>
+                  </a:moveTo>
+                  <a:lnTo>
+                    <a:pt x="3007349" y="0"/>
+                  </a:lnTo>
+                  <a:lnTo>
+                    <a:pt x="3007349" y="6866467"/>
+                  </a:lnTo>
+                  <a:lnTo>
+                    <a:pt x="0" y="6866467"/>
+                  </a:lnTo>
+                  <a:lnTo>
+                    <a:pt x="2045532" y="0"/>
+                  </a:lnTo>
+                  <a:close/>
+                </a:path>
+              </a:pathLst>
+            </a:custGeom>
+            <a:solidFill>
+              <a:schemeClr val="accent1">
+                <a:alpha val="36000"/>
+              </a:schemeClr>
+            </a:solidFill>
+            <a:ln>
+              <a:noFill/>
+            </a:ln>
+            <a:effectLst/>
+          </p:spPr>
+          <p:style>
+            <a:lnRef idx="1">
+              <a:schemeClr val="accent1"/>
+            </a:lnRef>
+            <a:fillRef idx="3">
+              <a:schemeClr val="accent1"/>
+            </a:fillRef>
+            <a:effectRef idx="2">
+              <a:schemeClr val="accent1"/>
+            </a:effectRef>
+            <a:fontRef idx="minor">
+              <a:schemeClr val="lt1"/>
+            </a:fontRef>
+          </p:style>
+        </p:sp>
+        <p:sp>
+          <p:nvSpPr>
+            <p:cNvPr id="23" name="Rectangle 25"/>
+            <p:cNvSpPr/>
+            <p:nvPr/>
+          </p:nvSpPr>
+          <p:spPr>
+            <a:xfrm>
+              <a:off x="9603442" y="-8467"/>
+              <a:ext cx="2588558" cy="6866467"/>
+            </a:xfrm>
+            <a:custGeom>
+              <a:avLst/>
+              <a:gdLst/>
+              <a:ahLst/>
+              <a:cxnLst/>
+              <a:rect l="l" t="t" r="r" b="b"/>
+              <a:pathLst>
+                <a:path w="2573311" h="6866467">
+                  <a:moveTo>
+                    <a:pt x="0" y="0"/>
+                  </a:moveTo>
+                  <a:lnTo>
+                    <a:pt x="2573311" y="0"/>
+                  </a:lnTo>
+                  <a:lnTo>
+                    <a:pt x="2573311" y="6866467"/>
+                  </a:lnTo>
+                  <a:lnTo>
+                    <a:pt x="1202336" y="6866467"/>
+                  </a:lnTo>
+                  <a:lnTo>
+                    <a:pt x="0" y="0"/>
+                  </a:lnTo>
+                  <a:close/>
+                </a:path>
+              </a:pathLst>
+            </a:custGeom>
+            <a:solidFill>
+              <a:schemeClr val="accent1">
+                <a:alpha val="20000"/>
+              </a:schemeClr>
+            </a:solidFill>
+            <a:ln>
+              <a:noFill/>
+            </a:ln>
+            <a:effectLst/>
+          </p:spPr>
+          <p:style>
+            <a:lnRef idx="1">
+              <a:schemeClr val="accent1"/>
+            </a:lnRef>
+            <a:fillRef idx="3">
+              <a:schemeClr val="accent1"/>
+            </a:fillRef>
+            <a:effectRef idx="2">
+              <a:schemeClr val="accent1"/>
+            </a:effectRef>
+            <a:fontRef idx="minor">
+              <a:schemeClr val="lt1"/>
+            </a:fontRef>
+          </p:style>
+        </p:sp>
+        <p:sp>
+          <p:nvSpPr>
+            <p:cNvPr id="24" name="Isosceles Triangle 23"/>
+            <p:cNvSpPr/>
+            <p:nvPr/>
+          </p:nvSpPr>
+          <p:spPr>
+            <a:xfrm>
+              <a:off x="8932333" y="3048000"/>
+              <a:ext cx="3259667" cy="3810000"/>
+            </a:xfrm>
+            <a:prstGeom prst="triangle">
+              <a:avLst>
+                <a:gd name="adj" fmla="val 100000"/>
+              </a:avLst>
+            </a:prstGeom>
+            <a:solidFill>
+              <a:schemeClr val="accent1">
+                <a:lumMod val="75000"/>
+                <a:alpha val="66000"/>
+              </a:schemeClr>
+            </a:solidFill>
+            <a:ln>
+              <a:noFill/>
+            </a:ln>
+            <a:effectLst/>
+          </p:spPr>
+          <p:style>
+            <a:lnRef idx="1">
+              <a:schemeClr val="accent1"/>
+            </a:lnRef>
+            <a:fillRef idx="3">
+              <a:schemeClr val="accent1"/>
+            </a:fillRef>
+            <a:effectRef idx="2">
+              <a:schemeClr val="accent1"/>
+            </a:effectRef>
+            <a:fontRef idx="minor">
+              <a:schemeClr val="lt1"/>
+            </a:fontRef>
+          </p:style>
+        </p:sp>
+        <p:sp>
+          <p:nvSpPr>
+            <p:cNvPr id="25" name="Rectangle 27"/>
+            <p:cNvSpPr/>
+            <p:nvPr/>
+          </p:nvSpPr>
+          <p:spPr>
+            <a:xfrm>
+              <a:off x="9334500" y="-8467"/>
+              <a:ext cx="2854326" cy="6866467"/>
+            </a:xfrm>
+            <a:custGeom>
+              <a:avLst/>
+              <a:gdLst/>
+              <a:ahLst/>
+              <a:cxnLst/>
+              <a:rect l="l" t="t" r="r" b="b"/>
+              <a:pathLst>
+                <a:path w="2858013" h="6866467">
+                  <a:moveTo>
+                    <a:pt x="0" y="0"/>
+                  </a:moveTo>
+                  <a:lnTo>
+                    <a:pt x="2858013" y="0"/>
+                  </a:lnTo>
+                  <a:lnTo>
+                    <a:pt x="2858013" y="6866467"/>
+                  </a:lnTo>
+                  <a:lnTo>
+                    <a:pt x="2473942" y="6866467"/>
+                  </a:lnTo>
+                  <a:lnTo>
+                    <a:pt x="0" y="0"/>
+                  </a:lnTo>
+                  <a:close/>
+                </a:path>
+              </a:pathLst>
+            </a:custGeom>
+            <a:solidFill>
+              <a:schemeClr val="accent1">
+                <a:lumMod val="75000"/>
+                <a:alpha val="50000"/>
+              </a:schemeClr>
+            </a:solidFill>
+            <a:ln>
+              <a:noFill/>
+            </a:ln>
+            <a:effectLst/>
+          </p:spPr>
+          <p:style>
+            <a:lnRef idx="1">
+              <a:schemeClr val="accent1"/>
+            </a:lnRef>
+            <a:fillRef idx="3">
+              <a:schemeClr val="accent1"/>
+            </a:fillRef>
+            <a:effectRef idx="2">
+              <a:schemeClr val="accent1"/>
+            </a:effectRef>
+            <a:fontRef idx="minor">
+              <a:schemeClr val="lt1"/>
+            </a:fontRef>
+          </p:style>
+        </p:sp>
+        <p:sp>
+          <p:nvSpPr>
+            <p:cNvPr id="26" name="Rectangle 28"/>
+            <p:cNvSpPr/>
+            <p:nvPr/>
+          </p:nvSpPr>
+          <p:spPr>
+            <a:xfrm>
+              <a:off x="10898730" y="-8467"/>
+              <a:ext cx="1290094" cy="6866467"/>
+            </a:xfrm>
+            <a:custGeom>
+              <a:avLst/>
+              <a:gdLst/>
+              <a:ahLst/>
+              <a:cxnLst/>
+              <a:rect l="l" t="t" r="r" b="b"/>
+              <a:pathLst>
+                <a:path w="1290094" h="6858000">
+                  <a:moveTo>
+                    <a:pt x="1019735" y="0"/>
+                  </a:moveTo>
+                  <a:lnTo>
+                    <a:pt x="1290094" y="0"/>
+                  </a:lnTo>
+                  <a:lnTo>
+                    <a:pt x="1290094" y="6858000"/>
+                  </a:lnTo>
+                  <a:lnTo>
+                    <a:pt x="0" y="6858000"/>
+                  </a:lnTo>
+                  <a:lnTo>
+                    <a:pt x="1019735" y="0"/>
+                  </a:lnTo>
+                  <a:close/>
+                </a:path>
+              </a:pathLst>
+            </a:custGeom>
+            <a:solidFill>
+              <a:schemeClr val="accent2">
+                <a:alpha val="70000"/>
+              </a:schemeClr>
+            </a:solidFill>
+            <a:ln>
+              <a:noFill/>
+            </a:ln>
+            <a:effectLst/>
+          </p:spPr>
+          <p:style>
+            <a:lnRef idx="1">
+              <a:schemeClr val="accent1"/>
+            </a:lnRef>
+            <a:fillRef idx="3">
+              <a:schemeClr val="accent1"/>
+            </a:fillRef>
+            <a:effectRef idx="2">
+              <a:schemeClr val="accent1"/>
+            </a:effectRef>
+            <a:fontRef idx="minor">
+              <a:schemeClr val="lt1"/>
+            </a:fontRef>
+          </p:style>
+        </p:sp>
+        <p:sp>
+          <p:nvSpPr>
+            <p:cNvPr id="27" name="Rectangle 29"/>
+            <p:cNvSpPr/>
+            <p:nvPr/>
+          </p:nvSpPr>
+          <p:spPr>
+            <a:xfrm>
+              <a:off x="10938999" y="-8467"/>
+              <a:ext cx="1249825" cy="6866467"/>
+            </a:xfrm>
+            <a:custGeom>
+              <a:avLst/>
+              <a:gdLst/>
+              <a:ahLst/>
+              <a:cxnLst/>
+              <a:rect l="l" t="t" r="r" b="b"/>
+              <a:pathLst>
+                <a:path w="1249825" h="6858000">
+                  <a:moveTo>
+                    <a:pt x="0" y="0"/>
+                  </a:moveTo>
+                  <a:lnTo>
+                    <a:pt x="1249825" y="0"/>
+                  </a:lnTo>
+                  <a:lnTo>
+                    <a:pt x="1249825" y="6858000"/>
+                  </a:lnTo>
+                  <a:lnTo>
+                    <a:pt x="1109382" y="6858000"/>
+                  </a:lnTo>
+                  <a:lnTo>
+                    <a:pt x="0" y="0"/>
+                  </a:lnTo>
+                  <a:close/>
+                </a:path>
+              </a:pathLst>
+            </a:custGeom>
+            <a:solidFill>
+              <a:schemeClr val="accent2">
+                <a:lumMod val="75000"/>
+                <a:alpha val="80000"/>
+              </a:schemeClr>
+            </a:solidFill>
+            <a:ln>
+              <a:noFill/>
+            </a:ln>
+            <a:effectLst/>
+          </p:spPr>
+          <p:style>
+            <a:lnRef idx="1">
+              <a:schemeClr val="accent1"/>
+            </a:lnRef>
+            <a:fillRef idx="3">
+              <a:schemeClr val="accent1"/>
+            </a:fillRef>
+            <a:effectRef idx="2">
+              <a:schemeClr val="accent1"/>
+            </a:effectRef>
+            <a:fontRef idx="minor">
+              <a:schemeClr val="lt1"/>
+            </a:fontRef>
+          </p:style>
+        </p:sp>
+        <p:sp>
+          <p:nvSpPr>
+            <p:cNvPr id="28" name="Isosceles Triangle 27"/>
+            <p:cNvSpPr/>
+            <p:nvPr/>
+          </p:nvSpPr>
+          <p:spPr>
+            <a:xfrm>
+              <a:off x="10371666" y="3589867"/>
+              <a:ext cx="1817159" cy="3268133"/>
+            </a:xfrm>
+            <a:prstGeom prst="triangle">
+              <a:avLst>
+                <a:gd name="adj" fmla="val 100000"/>
+              </a:avLst>
+            </a:prstGeom>
+            <a:solidFill>
+              <a:schemeClr val="accent1">
+                <a:lumMod val="75000"/>
+                <a:alpha val="66000"/>
+              </a:schemeClr>
+            </a:solidFill>
+            <a:ln>
+              <a:noFill/>
+            </a:ln>
+            <a:effectLst/>
+          </p:spPr>
+          <p:style>
+            <a:lnRef idx="1">
+              <a:schemeClr val="accent1"/>
+            </a:lnRef>
+            <a:fillRef idx="3">
+              <a:schemeClr val="accent1"/>
+            </a:fillRef>
+            <a:effectRef idx="2">
+              <a:schemeClr val="accent1"/>
+            </a:effectRef>
+            <a:fontRef idx="minor">
+              <a:schemeClr val="lt1"/>
+            </a:fontRef>
+          </p:style>
+        </p:sp>
+        <p:sp>
+          <p:nvSpPr>
+            <p:cNvPr id="19" name="Isosceles Triangle 18"/>
+            <p:cNvSpPr/>
+            <p:nvPr/>
+          </p:nvSpPr>
+          <p:spPr>
+            <a:xfrm>
+              <a:off x="0" y="4013200"/>
+              <a:ext cx="448733" cy="2844800"/>
+            </a:xfrm>
+            <a:prstGeom prst="triangle">
+              <a:avLst>
+                <a:gd name="adj" fmla="val 0"/>
+              </a:avLst>
+            </a:prstGeom>
+            <a:solidFill>
+              <a:schemeClr val="accent1">
+                <a:alpha val="70000"/>
+              </a:schemeClr>
+            </a:solidFill>
+            <a:ln>
+              <a:noFill/>
+            </a:ln>
+            <a:effectLst/>
+          </p:spPr>
+          <p:style>
+            <a:lnRef idx="1">
+              <a:schemeClr val="accent1"/>
+            </a:lnRef>
+            <a:fillRef idx="3">
+              <a:schemeClr val="accent1"/>
+            </a:fillRef>
+            <a:effectRef idx="2">
+              <a:schemeClr val="accent1"/>
+            </a:effectRef>
+            <a:fontRef idx="minor">
+              <a:schemeClr val="lt1"/>
+            </a:fontRef>
+          </p:style>
+        </p:sp>
+      </p:grpSp>
       <p:sp>
         <p:nvSpPr>
           <p:cNvPr id="2" name="Title Placeholder 1"/>
@@ -2606,15 +6839,15 @@
         </p:nvSpPr>
         <p:spPr>
           <a:xfrm>
-            <a:off x="457200" y="205979"/>
-            <a:ext cx="8229600" cy="857250"/>
+            <a:off x="508001" y="457200"/>
+            <a:ext cx="6447501" cy="990600"/>
           </a:xfrm>
           <a:prstGeom prst="rect">
             <a:avLst/>
           </a:prstGeom>
         </p:spPr>
         <p:txBody>
-          <a:bodyPr anchor="ctr" bIns="45720" lIns="91440" rIns="91440" rtlCol="0" tIns="45720" vert="horz">
+          <a:bodyPr vert="horz" lIns="91440" tIns="45720" rIns="91440" bIns="45720" rtlCol="0" anchor="t">
             <a:normAutofit/>
           </a:bodyPr>
           <a:lstStyle/>
@@ -2623,6 +6856,7 @@
               <a:rPr lang="en-US"/>
               <a:t>Click to edit Master title style</a:t>
             </a:r>
+            <a:endParaRPr lang="en-US" dirty="0"/>
           </a:p>
         </p:txBody>
       </p:sp>
@@ -2633,20 +6867,20 @@
             <a:spLocks noGrp="1"/>
           </p:cNvSpPr>
           <p:nvPr>
-            <p:ph idx="1" type="body"/>
+            <p:ph type="body" idx="1"/>
           </p:nvPr>
         </p:nvSpPr>
         <p:spPr>
           <a:xfrm>
-            <a:off x="457200" y="1200151"/>
-            <a:ext cx="8229600" cy="3394472"/>
+            <a:off x="508001" y="1620442"/>
+            <a:ext cx="6447501" cy="2910580"/>
           </a:xfrm>
           <a:prstGeom prst="rect">
             <a:avLst/>
           </a:prstGeom>
         </p:spPr>
         <p:txBody>
-          <a:bodyPr bIns="45720" lIns="91440" rIns="91440" rtlCol="0" tIns="45720" vert="horz">
+          <a:bodyPr vert="horz" lIns="91440" tIns="45720" rIns="91440" bIns="45720" rtlCol="0">
             <a:normAutofit/>
           </a:bodyPr>
           <a:lstStyle/>
@@ -2684,6 +6918,7 @@
               <a:rPr lang="en-US"/>
               <a:t>Fifth level</a:t>
             </a:r>
+            <a:endParaRPr lang="en-US" dirty="0"/>
           </a:p>
         </p:txBody>
       </p:sp>
@@ -2694,23 +6929,23 @@
             <a:spLocks noGrp="1"/>
           </p:cNvSpPr>
           <p:nvPr>
-            <p:ph idx="2" sz="half" type="dt"/>
+            <p:ph type="dt" sz="half" idx="2"/>
           </p:nvPr>
         </p:nvSpPr>
         <p:spPr>
           <a:xfrm>
-            <a:off x="457200" y="4767263"/>
-            <a:ext cx="2133600" cy="273844"/>
+            <a:off x="5403850" y="4531022"/>
+            <a:ext cx="683954" cy="273844"/>
           </a:xfrm>
           <a:prstGeom prst="rect">
             <a:avLst/>
           </a:prstGeom>
         </p:spPr>
         <p:txBody>
-          <a:bodyPr anchor="ctr" bIns="45720" lIns="91440" rIns="91440" rtlCol="0" tIns="45720" vert="horz"/>
+          <a:bodyPr vert="horz" lIns="91440" tIns="45720" rIns="91440" bIns="45720" rtlCol="0" anchor="ctr"/>
           <a:lstStyle>
-            <a:lvl1pPr algn="l">
-              <a:defRPr sz="900">
+            <a:lvl1pPr algn="r">
+              <a:defRPr sz="675">
                 <a:solidFill>
                   <a:schemeClr val="tx1">
                     <a:tint val="75000"/>
@@ -2722,7 +6957,7 @@
           <a:p>
             <a:fld id="{241EB5C9-1307-BA42-ABA2-0BC069CD8E7F}" type="datetimeFigureOut">
               <a:rPr lang="en-US" smtClean="0"/>
-              <a:t>1/2/22</a:t>
+              <a:t>3/7/2026</a:t>
             </a:fld>
             <a:endParaRPr lang="en-US"/>
           </a:p>
@@ -2735,23 +6970,23 @@
             <a:spLocks noGrp="1"/>
           </p:cNvSpPr>
           <p:nvPr>
-            <p:ph idx="3" sz="quarter" type="ftr"/>
+            <p:ph type="ftr" sz="quarter" idx="3"/>
           </p:nvPr>
         </p:nvSpPr>
         <p:spPr>
           <a:xfrm>
-            <a:off x="3124200" y="4767263"/>
-            <a:ext cx="2895600" cy="273844"/>
+            <a:off x="508001" y="4531022"/>
+            <a:ext cx="4723209" cy="273844"/>
           </a:xfrm>
           <a:prstGeom prst="rect">
             <a:avLst/>
           </a:prstGeom>
         </p:spPr>
         <p:txBody>
-          <a:bodyPr anchor="ctr" bIns="45720" lIns="91440" rIns="91440" rtlCol="0" tIns="45720" vert="horz"/>
+          <a:bodyPr vert="horz" lIns="91440" tIns="45720" rIns="91440" bIns="45720" rtlCol="0" anchor="ctr"/>
           <a:lstStyle>
-            <a:lvl1pPr algn="ctr">
-              <a:defRPr sz="900">
+            <a:lvl1pPr algn="l">
+              <a:defRPr sz="675">
                 <a:solidFill>
                   <a:schemeClr val="tx1">
                     <a:tint val="75000"/>
@@ -2772,27 +7007,25 @@
             <a:spLocks noGrp="1"/>
           </p:cNvSpPr>
           <p:nvPr>
-            <p:ph idx="4" sz="quarter" type="sldNum"/>
+            <p:ph type="sldNum" sz="quarter" idx="4"/>
           </p:nvPr>
         </p:nvSpPr>
         <p:spPr>
           <a:xfrm>
-            <a:off x="6553200" y="4767263"/>
-            <a:ext cx="2133600" cy="273844"/>
+            <a:off x="6442998" y="4531022"/>
+            <a:ext cx="512504" cy="273844"/>
           </a:xfrm>
           <a:prstGeom prst="rect">
             <a:avLst/>
           </a:prstGeom>
         </p:spPr>
         <p:txBody>
-          <a:bodyPr anchor="ctr" bIns="45720" lIns="91440" rIns="91440" rtlCol="0" tIns="45720" vert="horz"/>
+          <a:bodyPr vert="horz" lIns="91440" tIns="45720" rIns="91440" bIns="45720" rtlCol="0" anchor="ctr"/>
           <a:lstStyle>
             <a:lvl1pPr algn="r">
-              <a:defRPr sz="900">
+              <a:defRPr sz="675">
                 <a:solidFill>
-                  <a:schemeClr val="tx1">
-                    <a:tint val="75000"/>
-                  </a:schemeClr>
+                  <a:schemeClr val="accent1"/>
                 </a:solidFill>
               </a:defRPr>
             </a:lvl1pPr>
@@ -2809,171 +7042,322 @@
     </p:spTree>
     <p:extLst>
       <p:ext uri="{BB962C8B-B14F-4D97-AF65-F5344CB8AC3E}">
-        <p14:creationId xmlns:p14="http://schemas.microsoft.com/office/powerpoint/2010/main" val="3676200875"/>
+        <p14:creationId xmlns:p14="http://schemas.microsoft.com/office/powerpoint/2010/main" val="1067375030"/>
       </p:ext>
     </p:extLst>
   </p:cSld>
-  <p:clrMap accent1="accent1" accent2="accent2" accent3="accent3" accent4="accent4" accent5="accent5" accent6="accent6" bg1="lt1" bg2="lt2" folHlink="folHlink" hlink="hlink" tx1="dk1" tx2="dk2"/>
+  <p:clrMap bg1="lt1" tx1="dk1" bg2="lt2" tx2="dk2" accent1="accent1" accent2="accent2" accent3="accent3" accent4="accent4" accent5="accent5" accent6="accent6" hlink="hlink" folHlink="folHlink"/>
   <p:sldLayoutIdLst>
-    <p:sldLayoutId id="2147483649" r:id="rId1"/>
-    <p:sldLayoutId id="2147483650" r:id="rId2"/>
-    <p:sldLayoutId id="2147483651" r:id="rId3"/>
-    <p:sldLayoutId id="2147483652" r:id="rId4"/>
-    <p:sldLayoutId id="2147483653" r:id="rId5"/>
-    <p:sldLayoutId id="2147483654" r:id="rId6"/>
-    <p:sldLayoutId id="2147483655" r:id="rId7"/>
-    <p:sldLayoutId id="2147483656" r:id="rId8"/>
-    <p:sldLayoutId id="2147483657" r:id="rId9"/>
-    <p:sldLayoutId id="2147483658" r:id="rId10"/>
-    <p:sldLayoutId id="2147483659" r:id="rId11"/>
+    <p:sldLayoutId id="2147483912" r:id="rId1"/>
+    <p:sldLayoutId id="2147483913" r:id="rId2"/>
+    <p:sldLayoutId id="2147483914" r:id="rId3"/>
+    <p:sldLayoutId id="2147483915" r:id="rId4"/>
+    <p:sldLayoutId id="2147483916" r:id="rId5"/>
+    <p:sldLayoutId id="2147483917" r:id="rId6"/>
+    <p:sldLayoutId id="2147483918" r:id="rId7"/>
+    <p:sldLayoutId id="2147483919" r:id="rId8"/>
+    <p:sldLayoutId id="2147483920" r:id="rId9"/>
+    <p:sldLayoutId id="2147483921" r:id="rId10"/>
+    <p:sldLayoutId id="2147483922" r:id="rId11"/>
+    <p:sldLayoutId id="2147483923" r:id="rId12"/>
+    <p:sldLayoutId id="2147483924" r:id="rId13"/>
+    <p:sldLayoutId id="2147483925" r:id="rId14"/>
+    <p:sldLayoutId id="2147483926" r:id="rId15"/>
+    <p:sldLayoutId id="2147483927" r:id="rId16"/>
   </p:sldLayoutIdLst>
   <p:txStyles>
     <p:titleStyle>
-      <a:lvl1pPr algn="ctr" defTabSz="342900" eaLnBrk="1" hangingPunct="1" latinLnBrk="0" rtl="0">
+      <a:lvl1pPr algn="l" defTabSz="342900" rtl="0" eaLnBrk="1" latinLnBrk="0" hangingPunct="1">
         <a:spcBef>
           <a:spcPct val="0"/>
         </a:spcBef>
         <a:buNone/>
-        <a:defRPr kern="1200" sz="3300">
+        <a:defRPr sz="2700" kern="1200">
           <a:solidFill>
-            <a:schemeClr val="tx1"/>
+            <a:schemeClr val="accent1"/>
           </a:solidFill>
           <a:latin typeface="+mj-lt"/>
           <a:ea typeface="+mj-ea"/>
           <a:cs typeface="+mj-cs"/>
         </a:defRPr>
       </a:lvl1pPr>
+      <a:lvl2pPr eaLnBrk="1" hangingPunct="1">
+        <a:defRPr>
+          <a:solidFill>
+            <a:schemeClr val="tx2"/>
+          </a:solidFill>
+        </a:defRPr>
+      </a:lvl2pPr>
+      <a:lvl3pPr eaLnBrk="1" hangingPunct="1">
+        <a:defRPr>
+          <a:solidFill>
+            <a:schemeClr val="tx2"/>
+          </a:solidFill>
+        </a:defRPr>
+      </a:lvl3pPr>
+      <a:lvl4pPr eaLnBrk="1" hangingPunct="1">
+        <a:defRPr>
+          <a:solidFill>
+            <a:schemeClr val="tx2"/>
+          </a:solidFill>
+        </a:defRPr>
+      </a:lvl4pPr>
+      <a:lvl5pPr eaLnBrk="1" hangingPunct="1">
+        <a:defRPr>
+          <a:solidFill>
+            <a:schemeClr val="tx2"/>
+          </a:solidFill>
+        </a:defRPr>
+      </a:lvl5pPr>
+      <a:lvl6pPr eaLnBrk="1" hangingPunct="1">
+        <a:defRPr>
+          <a:solidFill>
+            <a:schemeClr val="tx2"/>
+          </a:solidFill>
+        </a:defRPr>
+      </a:lvl6pPr>
+      <a:lvl7pPr eaLnBrk="1" hangingPunct="1">
+        <a:defRPr>
+          <a:solidFill>
+            <a:schemeClr val="tx2"/>
+          </a:solidFill>
+        </a:defRPr>
+      </a:lvl7pPr>
+      <a:lvl8pPr eaLnBrk="1" hangingPunct="1">
+        <a:defRPr>
+          <a:solidFill>
+            <a:schemeClr val="tx2"/>
+          </a:solidFill>
+        </a:defRPr>
+      </a:lvl8pPr>
+      <a:lvl9pPr eaLnBrk="1" hangingPunct="1">
+        <a:defRPr>
+          <a:solidFill>
+            <a:schemeClr val="tx2"/>
+          </a:solidFill>
+        </a:defRPr>
+      </a:lvl9pPr>
     </p:titleStyle>
     <p:bodyStyle>
-      <a:lvl1pPr algn="l" defTabSz="342900" eaLnBrk="1" hangingPunct="1" indent="-342900" latinLnBrk="0" marL="342900" rtl="0">
+      <a:lvl1pPr marL="257175" indent="-257175" algn="l" defTabSz="342900" rtl="0" eaLnBrk="1" latinLnBrk="0" hangingPunct="1">
         <a:spcBef>
-          <a:spcPct val="20000"/>
+          <a:spcPts val="750"/>
         </a:spcBef>
-        <a:buFont typeface="Arial"/>
-        <a:buChar char="•"/>
-        <a:defRPr kern="1200" sz="2400">
+        <a:spcAft>
+          <a:spcPts val="0"/>
+        </a:spcAft>
+        <a:buClr>
+          <a:schemeClr val="accent1"/>
+        </a:buClr>
+        <a:buSzPct val="80000"/>
+        <a:buFont typeface="Wingdings 3" charset="2"/>
+        <a:buChar char=""/>
+        <a:defRPr sz="1350" kern="1200">
           <a:solidFill>
-            <a:schemeClr val="tx1"/>
+            <a:schemeClr val="tx1">
+              <a:lumMod val="75000"/>
+              <a:lumOff val="25000"/>
+            </a:schemeClr>
           </a:solidFill>
           <a:latin typeface="+mn-lt"/>
           <a:ea typeface="+mn-ea"/>
           <a:cs typeface="+mn-cs"/>
         </a:defRPr>
       </a:lvl1pPr>
-      <a:lvl2pPr algn="l" defTabSz="342900" eaLnBrk="1" hangingPunct="1" indent="-342900" latinLnBrk="0" marL="685800" rtl="0">
+      <a:lvl2pPr marL="557213" indent="-214313" algn="l" defTabSz="342900" rtl="0" eaLnBrk="1" latinLnBrk="0" hangingPunct="1">
         <a:spcBef>
-          <a:spcPct val="20000"/>
+          <a:spcPts val="750"/>
         </a:spcBef>
-        <a:buFont typeface="Arial"/>
-        <a:buChar char="–"/>
-        <a:defRPr kern="1200" sz="2100">
+        <a:spcAft>
+          <a:spcPts val="0"/>
+        </a:spcAft>
+        <a:buClr>
+          <a:schemeClr val="accent1"/>
+        </a:buClr>
+        <a:buSzPct val="80000"/>
+        <a:buFont typeface="Wingdings 3" charset="2"/>
+        <a:buChar char=""/>
+        <a:defRPr sz="1200" kern="1200">
           <a:solidFill>
-            <a:schemeClr val="tx1"/>
+            <a:schemeClr val="tx1">
+              <a:lumMod val="75000"/>
+              <a:lumOff val="25000"/>
+            </a:schemeClr>
           </a:solidFill>
           <a:latin typeface="+mn-lt"/>
           <a:ea typeface="+mn-ea"/>
           <a:cs typeface="+mn-cs"/>
         </a:defRPr>
       </a:lvl2pPr>
-      <a:lvl3pPr algn="l" defTabSz="342900" eaLnBrk="1" hangingPunct="1" indent="-342900" latinLnBrk="0" marL="1028700" rtl="0">
+      <a:lvl3pPr marL="857250" indent="-171450" algn="l" defTabSz="342900" rtl="0" eaLnBrk="1" latinLnBrk="0" hangingPunct="1">
         <a:spcBef>
-          <a:spcPct val="20000"/>
+          <a:spcPts val="750"/>
         </a:spcBef>
-        <a:buFont typeface="Arial"/>
-        <a:buChar char="•"/>
-        <a:defRPr kern="1200" sz="1800">
+        <a:spcAft>
+          <a:spcPts val="0"/>
+        </a:spcAft>
+        <a:buClr>
+          <a:schemeClr val="accent1"/>
+        </a:buClr>
+        <a:buSzPct val="80000"/>
+        <a:buFont typeface="Wingdings 3" charset="2"/>
+        <a:buChar char=""/>
+        <a:defRPr sz="1050" kern="1200">
           <a:solidFill>
-            <a:schemeClr val="tx1"/>
+            <a:schemeClr val="tx1">
+              <a:lumMod val="75000"/>
+              <a:lumOff val="25000"/>
+            </a:schemeClr>
           </a:solidFill>
           <a:latin typeface="+mn-lt"/>
           <a:ea typeface="+mn-ea"/>
           <a:cs typeface="+mn-cs"/>
         </a:defRPr>
       </a:lvl3pPr>
-      <a:lvl4pPr algn="l" defTabSz="342900" eaLnBrk="1" hangingPunct="1" indent="-342900" latinLnBrk="0" marL="1371600" rtl="0">
+      <a:lvl4pPr marL="1200150" indent="-171450" algn="l" defTabSz="342900" rtl="0" eaLnBrk="1" latinLnBrk="0" hangingPunct="1">
         <a:spcBef>
-          <a:spcPct val="20000"/>
+          <a:spcPts val="750"/>
         </a:spcBef>
-        <a:buFont typeface="Arial"/>
-        <a:buChar char="–"/>
-        <a:defRPr kern="1200" sz="1500">
+        <a:spcAft>
+          <a:spcPts val="0"/>
+        </a:spcAft>
+        <a:buClr>
+          <a:schemeClr val="accent1"/>
+        </a:buClr>
+        <a:buSzPct val="80000"/>
+        <a:buFont typeface="Wingdings 3" charset="2"/>
+        <a:buChar char=""/>
+        <a:defRPr sz="900" kern="1200">
           <a:solidFill>
-            <a:schemeClr val="tx1"/>
+            <a:schemeClr val="tx1">
+              <a:lumMod val="75000"/>
+              <a:lumOff val="25000"/>
+            </a:schemeClr>
           </a:solidFill>
           <a:latin typeface="+mn-lt"/>
           <a:ea typeface="+mn-ea"/>
           <a:cs typeface="+mn-cs"/>
         </a:defRPr>
       </a:lvl4pPr>
-      <a:lvl5pPr algn="l" defTabSz="342900" eaLnBrk="1" hangingPunct="1" indent="-342900" latinLnBrk="0" marL="1714500" rtl="0">
+      <a:lvl5pPr marL="1543050" indent="-171450" algn="l" defTabSz="342900" rtl="0" eaLnBrk="1" latinLnBrk="0" hangingPunct="1">
         <a:spcBef>
-          <a:spcPct val="20000"/>
+          <a:spcPts val="750"/>
         </a:spcBef>
-        <a:buFont typeface="Arial"/>
-        <a:buChar char="»"/>
-        <a:defRPr kern="1200" sz="1500">
+        <a:spcAft>
+          <a:spcPts val="0"/>
+        </a:spcAft>
+        <a:buClr>
+          <a:schemeClr val="accent1"/>
+        </a:buClr>
+        <a:buSzPct val="80000"/>
+        <a:buFont typeface="Wingdings 3" charset="2"/>
+        <a:buChar char=""/>
+        <a:defRPr sz="900" kern="1200">
           <a:solidFill>
-            <a:schemeClr val="tx1"/>
+            <a:schemeClr val="tx1">
+              <a:lumMod val="75000"/>
+              <a:lumOff val="25000"/>
+            </a:schemeClr>
           </a:solidFill>
           <a:latin typeface="+mn-lt"/>
           <a:ea typeface="+mn-ea"/>
           <a:cs typeface="+mn-cs"/>
         </a:defRPr>
       </a:lvl5pPr>
-      <a:lvl6pPr algn="l" defTabSz="342900" eaLnBrk="1" hangingPunct="1" indent="-342900" latinLnBrk="0" marL="2057400" rtl="0">
+      <a:lvl6pPr marL="1885950" indent="-171450" algn="l" defTabSz="342900" rtl="0" eaLnBrk="1" latinLnBrk="0" hangingPunct="1">
         <a:spcBef>
-          <a:spcPct val="20000"/>
+          <a:spcPts val="750"/>
         </a:spcBef>
-        <a:buFont typeface="Arial"/>
-        <a:buChar char="•"/>
-        <a:defRPr kern="1200" sz="1500">
+        <a:spcAft>
+          <a:spcPts val="0"/>
+        </a:spcAft>
+        <a:buClr>
+          <a:schemeClr val="accent1"/>
+        </a:buClr>
+        <a:buSzPct val="80000"/>
+        <a:buFont typeface="Wingdings 3" charset="2"/>
+        <a:buChar char=""/>
+        <a:defRPr sz="900" kern="1200">
           <a:solidFill>
-            <a:schemeClr val="tx1"/>
+            <a:schemeClr val="tx1">
+              <a:lumMod val="75000"/>
+              <a:lumOff val="25000"/>
+            </a:schemeClr>
           </a:solidFill>
           <a:latin typeface="+mn-lt"/>
           <a:ea typeface="+mn-ea"/>
           <a:cs typeface="+mn-cs"/>
         </a:defRPr>
       </a:lvl6pPr>
-      <a:lvl7pPr algn="l" defTabSz="342900" eaLnBrk="1" hangingPunct="1" indent="-342900" latinLnBrk="0" marL="2400300" rtl="0">
+      <a:lvl7pPr marL="2228850" indent="-171450" algn="l" defTabSz="342900" rtl="0" eaLnBrk="1" latinLnBrk="0" hangingPunct="1">
         <a:spcBef>
-          <a:spcPct val="20000"/>
+          <a:spcPts val="750"/>
         </a:spcBef>
-        <a:buFont typeface="Arial"/>
-        <a:buChar char="•"/>
-        <a:defRPr kern="1200" sz="1500">
+        <a:spcAft>
+          <a:spcPts val="0"/>
+        </a:spcAft>
+        <a:buClr>
+          <a:schemeClr val="accent1"/>
+        </a:buClr>
+        <a:buSzPct val="80000"/>
+        <a:buFont typeface="Wingdings 3" charset="2"/>
+        <a:buChar char=""/>
+        <a:defRPr sz="900" kern="1200">
           <a:solidFill>
-            <a:schemeClr val="tx1"/>
+            <a:schemeClr val="tx1">
+              <a:lumMod val="75000"/>
+              <a:lumOff val="25000"/>
+            </a:schemeClr>
           </a:solidFill>
           <a:latin typeface="+mn-lt"/>
           <a:ea typeface="+mn-ea"/>
           <a:cs typeface="+mn-cs"/>
         </a:defRPr>
       </a:lvl7pPr>
-      <a:lvl8pPr algn="l" defTabSz="342900" eaLnBrk="1" hangingPunct="1" indent="-342900" latinLnBrk="0" marL="2743200" rtl="0">
+      <a:lvl8pPr marL="2571750" indent="-171450" algn="l" defTabSz="342900" rtl="0" eaLnBrk="1" latinLnBrk="0" hangingPunct="1">
         <a:spcBef>
-          <a:spcPct val="20000"/>
+          <a:spcPts val="750"/>
         </a:spcBef>
-        <a:buFont typeface="Arial"/>
-        <a:buChar char="•"/>
-        <a:defRPr kern="1200" sz="1500">
+        <a:spcAft>
+          <a:spcPts val="0"/>
+        </a:spcAft>
+        <a:buClr>
+          <a:schemeClr val="accent1"/>
+        </a:buClr>
+        <a:buSzPct val="80000"/>
+        <a:buFont typeface="Wingdings 3" charset="2"/>
+        <a:buChar char=""/>
+        <a:defRPr sz="900" kern="1200">
           <a:solidFill>
-            <a:schemeClr val="tx1"/>
+            <a:schemeClr val="tx1">
+              <a:lumMod val="75000"/>
+              <a:lumOff val="25000"/>
+            </a:schemeClr>
           </a:solidFill>
           <a:latin typeface="+mn-lt"/>
           <a:ea typeface="+mn-ea"/>
           <a:cs typeface="+mn-cs"/>
         </a:defRPr>
       </a:lvl8pPr>
-      <a:lvl9pPr algn="l" defTabSz="342900" eaLnBrk="1" hangingPunct="1" indent="-342900" latinLnBrk="0" marL="3086100" rtl="0">
+      <a:lvl9pPr marL="2914650" indent="-171450" algn="l" defTabSz="342900" rtl="0" eaLnBrk="1" latinLnBrk="0" hangingPunct="1">
         <a:spcBef>
-          <a:spcPct val="20000"/>
+          <a:spcPts val="750"/>
         </a:spcBef>
-        <a:buFont typeface="Arial"/>
-        <a:buChar char="•"/>
-        <a:defRPr kern="1200" sz="1500">
+        <a:spcAft>
+          <a:spcPts val="0"/>
+        </a:spcAft>
+        <a:buClr>
+          <a:schemeClr val="accent1"/>
+        </a:buClr>
+        <a:buSzPct val="80000"/>
+        <a:buFont typeface="Wingdings 3" charset="2"/>
+        <a:buChar char=""/>
+        <a:defRPr sz="900" kern="1200">
           <a:solidFill>
-            <a:schemeClr val="tx1"/>
+            <a:schemeClr val="tx1">
+              <a:lumMod val="75000"/>
+              <a:lumOff val="25000"/>
+            </a:schemeClr>
           </a:solidFill>
           <a:latin typeface="+mn-lt"/>
           <a:ea typeface="+mn-ea"/>
@@ -2985,8 +7369,8 @@
       <a:defPPr>
         <a:defRPr lang="en-US"/>
       </a:defPPr>
-      <a:lvl1pPr algn="l" defTabSz="342900" eaLnBrk="1" hangingPunct="1" latinLnBrk="0" marL="0" rtl="0">
-        <a:defRPr kern="1200" sz="1350">
+      <a:lvl1pPr marL="0" algn="l" defTabSz="342900" rtl="0" eaLnBrk="1" latinLnBrk="0" hangingPunct="1">
+        <a:defRPr sz="1350" kern="1200">
           <a:solidFill>
             <a:schemeClr val="tx1"/>
           </a:solidFill>
@@ -2995,8 +7379,8 @@
           <a:cs typeface="+mn-cs"/>
         </a:defRPr>
       </a:lvl1pPr>
-      <a:lvl2pPr algn="l" defTabSz="342900" eaLnBrk="1" hangingPunct="1" latinLnBrk="0" marL="342900" rtl="0">
-        <a:defRPr kern="1200" sz="1350">
+      <a:lvl2pPr marL="342900" algn="l" defTabSz="342900" rtl="0" eaLnBrk="1" latinLnBrk="0" hangingPunct="1">
+        <a:defRPr sz="1350" kern="1200">
           <a:solidFill>
             <a:schemeClr val="tx1"/>
           </a:solidFill>
@@ -3005,8 +7389,8 @@
           <a:cs typeface="+mn-cs"/>
         </a:defRPr>
       </a:lvl2pPr>
-      <a:lvl3pPr algn="l" defTabSz="342900" eaLnBrk="1" hangingPunct="1" latinLnBrk="0" marL="685800" rtl="0">
-        <a:defRPr kern="1200" sz="1350">
+      <a:lvl3pPr marL="685800" algn="l" defTabSz="342900" rtl="0" eaLnBrk="1" latinLnBrk="0" hangingPunct="1">
+        <a:defRPr sz="1350" kern="1200">
           <a:solidFill>
             <a:schemeClr val="tx1"/>
           </a:solidFill>
@@ -3015,8 +7399,8 @@
           <a:cs typeface="+mn-cs"/>
         </a:defRPr>
       </a:lvl3pPr>
-      <a:lvl4pPr algn="l" defTabSz="342900" eaLnBrk="1" hangingPunct="1" latinLnBrk="0" marL="1028700" rtl="0">
-        <a:defRPr kern="1200" sz="1350">
+      <a:lvl4pPr marL="1028700" algn="l" defTabSz="342900" rtl="0" eaLnBrk="1" latinLnBrk="0" hangingPunct="1">
+        <a:defRPr sz="1350" kern="1200">
           <a:solidFill>
             <a:schemeClr val="tx1"/>
           </a:solidFill>
@@ -3025,8 +7409,8 @@
           <a:cs typeface="+mn-cs"/>
         </a:defRPr>
       </a:lvl4pPr>
-      <a:lvl5pPr algn="l" defTabSz="342900" eaLnBrk="1" hangingPunct="1" latinLnBrk="0" marL="1371600" rtl="0">
-        <a:defRPr kern="1200" sz="1350">
+      <a:lvl5pPr marL="1371600" algn="l" defTabSz="342900" rtl="0" eaLnBrk="1" latinLnBrk="0" hangingPunct="1">
+        <a:defRPr sz="1350" kern="1200">
           <a:solidFill>
             <a:schemeClr val="tx1"/>
           </a:solidFill>
@@ -3035,8 +7419,8 @@
           <a:cs typeface="+mn-cs"/>
         </a:defRPr>
       </a:lvl5pPr>
-      <a:lvl6pPr algn="l" defTabSz="342900" eaLnBrk="1" hangingPunct="1" latinLnBrk="0" marL="1714500" rtl="0">
-        <a:defRPr kern="1200" sz="1350">
+      <a:lvl6pPr marL="1714500" algn="l" defTabSz="342900" rtl="0" eaLnBrk="1" latinLnBrk="0" hangingPunct="1">
+        <a:defRPr sz="1350" kern="1200">
           <a:solidFill>
             <a:schemeClr val="tx1"/>
           </a:solidFill>
@@ -3045,8 +7429,8 @@
           <a:cs typeface="+mn-cs"/>
         </a:defRPr>
       </a:lvl6pPr>
-      <a:lvl7pPr algn="l" defTabSz="342900" eaLnBrk="1" hangingPunct="1" latinLnBrk="0" marL="2057400" rtl="0">
-        <a:defRPr kern="1200" sz="1350">
+      <a:lvl7pPr marL="2057400" algn="l" defTabSz="342900" rtl="0" eaLnBrk="1" latinLnBrk="0" hangingPunct="1">
+        <a:defRPr sz="1350" kern="1200">
           <a:solidFill>
             <a:schemeClr val="tx1"/>
           </a:solidFill>
@@ -3055,8 +7439,8 @@
           <a:cs typeface="+mn-cs"/>
         </a:defRPr>
       </a:lvl7pPr>
-      <a:lvl8pPr algn="l" defTabSz="342900" eaLnBrk="1" hangingPunct="1" latinLnBrk="0" marL="2400300" rtl="0">
-        <a:defRPr kern="1200" sz="1350">
+      <a:lvl8pPr marL="2400300" algn="l" defTabSz="342900" rtl="0" eaLnBrk="1" latinLnBrk="0" hangingPunct="1">
+        <a:defRPr sz="1350" kern="1200">
           <a:solidFill>
             <a:schemeClr val="tx1"/>
           </a:solidFill>
@@ -3065,8 +7449,8 @@
           <a:cs typeface="+mn-cs"/>
         </a:defRPr>
       </a:lvl8pPr>
-      <a:lvl9pPr algn="l" defTabSz="342900" eaLnBrk="1" hangingPunct="1" latinLnBrk="0" marL="2743200" rtl="0">
-        <a:defRPr kern="1200" sz="1350">
+      <a:lvl9pPr marL="2743200" algn="l" defTabSz="342900" rtl="0" eaLnBrk="1" latinLnBrk="0" hangingPunct="1">
+        <a:defRPr sz="1350" kern="1200">
           <a:solidFill>
             <a:schemeClr val="tx1"/>
           </a:solidFill>
@@ -3107,66 +7491,150 @@
             <p:ph type="ctrTitle"/>
           </p:nvPr>
         </p:nvSpPr>
+        <p:spPr/>
+        <p:txBody>
+          <a:bodyPr>
+            <a:normAutofit fontScale="90000"/>
+          </a:bodyPr>
+          <a:lstStyle/>
+          <a:p>
+            <a:pPr marL="0" lvl="0" indent="0">
+              <a:buNone/>
+            </a:pPr>
+            <a:r>
+              <a:t>Navigating Chicago’s Cyclistic Bike-Share Company’s Success</a:t>
+            </a:r>
+          </a:p>
+        </p:txBody>
+      </p:sp>
+      <p:sp>
+        <p:nvSpPr>
+          <p:cNvPr id="3" name="Subtitle 2"/>
+          <p:cNvSpPr>
+            <a:spLocks noGrp="1"/>
+          </p:cNvSpPr>
+          <p:nvPr>
+            <p:ph type="subTitle" idx="1"/>
+          </p:nvPr>
+        </p:nvSpPr>
+        <p:spPr/>
+        <p:txBody>
+          <a:bodyPr/>
+          <a:lstStyle/>
+          <a:p>
+            <a:pPr marL="0" lvl="0" indent="0">
+              <a:buNone/>
+            </a:pPr>
+            <a:br>
+              <a:rPr dirty="0"/>
+            </a:br>
+            <a:br>
+              <a:rPr dirty="0"/>
+            </a:br>
+            <a:r>
+              <a:rPr b="1" dirty="0"/>
+              <a:t>Patricia</a:t>
+            </a:r>
+          </a:p>
+        </p:txBody>
+      </p:sp>
+      <p:sp>
+        <p:nvSpPr>
+          <p:cNvPr id="4" name="Date Placeholder 3"/>
+          <p:cNvSpPr>
+            <a:spLocks noGrp="1"/>
+          </p:cNvSpPr>
+          <p:nvPr>
+            <p:ph type="dt" sz="half" idx="10"/>
+          </p:nvPr>
+        </p:nvSpPr>
         <p:spPr>
           <a:xfrm>
-            <a:off x="685800" y="1597819"/>
-            <a:ext cx="7772400" cy="1102519"/>
+            <a:off x="4114800" y="4145797"/>
+            <a:ext cx="798163" cy="895310"/>
           </a:xfrm>
         </p:spPr>
         <p:txBody>
           <a:bodyPr/>
           <a:lstStyle/>
           <a:p>
-            <a:pPr lvl="0" indent="0" marL="0">
+            <a:pPr marL="0" lvl="0" indent="0">
               <a:buNone/>
             </a:pPr>
             <a:r>
-              <a:rPr/>
-              <a:t>Navigating Chicago’s Cyclistic Bike-Share Company’s Success</a:t>
-            </a:r>
-          </a:p>
-        </p:txBody>
-      </p:sp>
-      <p:sp>
-        <p:nvSpPr>
-          <p:cNvPr id="3" name="Subtitle 2"/>
-          <p:cNvSpPr>
-            <a:spLocks noGrp="1"/>
-          </p:cNvSpPr>
-          <p:nvPr>
-            <p:ph idx="1" type="subTitle"/>
+              <a:rPr b="1" dirty="0"/>
+              <a:t>2025-12-29</a:t>
+            </a:r>
+          </a:p>
+        </p:txBody>
+      </p:sp>
+    </p:spTree>
+  </p:cSld>
+  <p:clrMapOvr>
+    <a:masterClrMapping/>
+  </p:clrMapOvr>
+</p:sld>
+</file>
+
+<file path=ppt/slides/slide10.xml><?xml version="1.0" encoding="utf-8"?>
+<p:sld xmlns:a="http://schemas.openxmlformats.org/drawingml/2006/main" xmlns:r="http://schemas.openxmlformats.org/officeDocument/2006/relationships" xmlns:p="http://schemas.openxmlformats.org/presentationml/2006/main">
+  <p:cSld>
+    <p:spTree>
+      <p:nvGrpSpPr>
+        <p:cNvPr id="1" name=""/>
+        <p:cNvGrpSpPr/>
+        <p:nvPr/>
+      </p:nvGrpSpPr>
+      <p:grpSpPr>
+        <a:xfrm>
+          <a:off x="0" y="0"/>
+          <a:ext cx="0" cy="0"/>
+          <a:chOff x="0" y="0"/>
+          <a:chExt cx="0" cy="0"/>
+        </a:xfrm>
+      </p:grpSpPr>
+      <p:sp>
+        <p:nvSpPr>
+          <p:cNvPr id="2" name="Title 1"/>
+          <p:cNvSpPr>
+            <a:spLocks noGrp="1"/>
+          </p:cNvSpPr>
+          <p:nvPr>
+            <p:ph type="title"/>
           </p:nvPr>
         </p:nvSpPr>
         <p:spPr>
           <a:xfrm>
-            <a:off x="1371600" y="2914650"/>
-            <a:ext cx="6400800" cy="1314450"/>
+            <a:off x="508001" y="457200"/>
+            <a:ext cx="6447501" cy="990600"/>
           </a:xfrm>
         </p:spPr>
         <p:txBody>
           <a:bodyPr/>
           <a:lstStyle/>
           <a:p>
-            <a:pPr lvl="0" indent="0" marL="0">
-              <a:buNone/>
-            </a:pPr>
-            <a:br/>
-            <a:br/>
-            <a:r>
-              <a:rPr/>
-              <a:t>Patricia</a:t>
-            </a:r>
-          </a:p>
-        </p:txBody>
-      </p:sp>
-      <p:sp>
-        <p:nvSpPr>
-          <p:cNvPr id="4" name="Date Placeholder 3"/>
-          <p:cNvSpPr>
-            <a:spLocks noGrp="1"/>
-          </p:cNvSpPr>
-          <p:nvPr>
-            <p:ph idx="10" sz="half" type="dt"/>
+            <a:pPr lvl="0"/>
+            <a:r>
+              <a:rPr lang="en-US" dirty="0"/>
+              <a:t>Recommendations</a:t>
+            </a:r>
+          </a:p>
+        </p:txBody>
+      </p:sp>
+      <p:sp>
+        <p:nvSpPr>
+          <p:cNvPr id="4" name="Content Placeholder 3">
+            <a:extLst>
+              <a:ext uri="{FF2B5EF4-FFF2-40B4-BE49-F238E27FC236}">
+                <a16:creationId xmlns:a16="http://schemas.microsoft.com/office/drawing/2014/main" id="{38BF063D-693D-B6F5-7C9C-381ACD15F31E}"/>
+              </a:ext>
+            </a:extLst>
+          </p:cNvPr>
+          <p:cNvSpPr>
+            <a:spLocks noGrp="1"/>
+          </p:cNvSpPr>
+          <p:nvPr>
+            <p:ph idx="1"/>
           </p:nvPr>
         </p:nvSpPr>
         <p:spPr/>
@@ -3174,18 +7642,98 @@
           <a:bodyPr/>
           <a:lstStyle/>
           <a:p>
-            <a:pPr lvl="0" indent="0" marL="0">
-              <a:buNone/>
-            </a:pPr>
-            <a:r>
-              <a:rPr/>
-              <a:t>2025-12-29</a:t>
-            </a:r>
+            <a:r>
+              <a:rPr lang="en-US" dirty="0"/>
+              <a:t>Since most of the casual riders would naturally avoid annual subscriptions because they do not commute daily, less-expensive and flexible membership tiers like Weekend-Only Memberships (which would include unlimited rides) and Monthly Subscription Options should be provided.</a:t>
+            </a:r>
+          </a:p>
+          <a:p>
+            <a:r>
+              <a:rPr lang="en-US" dirty="0"/>
+              <a:t>Some sort of reward system should also be implemented, for example, casual riders can earn points as they use the serviced towards a discounted annual membership. Also, the existing annual members can also earn points by referring frequent casual users.</a:t>
+            </a:r>
+          </a:p>
+          <a:p>
+            <a:r>
+              <a:rPr lang="en-US" dirty="0"/>
+              <a:t>Digital marketing campaigns during peak summer months should be launched when casual rider activity is highest.</a:t>
+            </a:r>
+          </a:p>
+          <a:p>
+            <a:endParaRPr lang="en-US" dirty="0"/>
           </a:p>
         </p:txBody>
       </p:sp>
     </p:spTree>
   </p:cSld>
+  <p:clrMapOvr>
+    <a:masterClrMapping/>
+  </p:clrMapOvr>
+</p:sld>
+</file>
+
+<file path=ppt/slides/slide11.xml><?xml version="1.0" encoding="utf-8"?>
+<p:sld xmlns:a="http://schemas.openxmlformats.org/drawingml/2006/main" xmlns:r="http://schemas.openxmlformats.org/officeDocument/2006/relationships" xmlns:p="http://schemas.openxmlformats.org/presentationml/2006/main">
+  <p:cSld>
+    <p:spTree>
+      <p:nvGrpSpPr>
+        <p:cNvPr id="1" name=""/>
+        <p:cNvGrpSpPr/>
+        <p:nvPr/>
+      </p:nvGrpSpPr>
+      <p:grpSpPr>
+        <a:xfrm>
+          <a:off x="0" y="0"/>
+          <a:ext cx="0" cy="0"/>
+          <a:chOff x="0" y="0"/>
+          <a:chExt cx="0" cy="0"/>
+        </a:xfrm>
+      </p:grpSpPr>
+      <p:sp>
+        <p:nvSpPr>
+          <p:cNvPr id="3" name="TextBox 2">
+            <a:extLst>
+              <a:ext uri="{FF2B5EF4-FFF2-40B4-BE49-F238E27FC236}">
+                <a16:creationId xmlns:a16="http://schemas.microsoft.com/office/drawing/2014/main" id="{61B1D799-F788-E1E6-AFF7-176E257818BC}"/>
+              </a:ext>
+            </a:extLst>
+          </p:cNvPr>
+          <p:cNvSpPr txBox="1"/>
+          <p:nvPr/>
+        </p:nvSpPr>
+        <p:spPr>
+          <a:xfrm>
+            <a:off x="1270861" y="1867546"/>
+            <a:ext cx="6842502" cy="369332"/>
+          </a:xfrm>
+          <a:prstGeom prst="rect">
+            <a:avLst/>
+          </a:prstGeom>
+          <a:noFill/>
+        </p:spPr>
+        <p:txBody>
+          <a:bodyPr wrap="square" rtlCol="0">
+            <a:spAutoFit/>
+          </a:bodyPr>
+          <a:lstStyle/>
+          <a:p>
+            <a:r>
+              <a:rPr lang="en-US" dirty="0"/>
+              <a:t>THANK    YOU</a:t>
+            </a:r>
+          </a:p>
+        </p:txBody>
+      </p:sp>
+    </p:spTree>
+    <p:extLst>
+      <p:ext uri="{BB962C8B-B14F-4D97-AF65-F5344CB8AC3E}">
+        <p14:creationId xmlns:p14="http://schemas.microsoft.com/office/powerpoint/2010/main" val="270299384"/>
+      </p:ext>
+    </p:extLst>
+  </p:cSld>
+  <p:clrMapOvr>
+    <a:masterClrMapping/>
+  </p:clrMapOvr>
 </p:sld>
 </file>
 
@@ -3208,7 +7756,13 @@
       </p:grpSpPr>
       <p:sp>
         <p:nvSpPr>
-          <p:cNvPr id="2" name="Title 1"/>
+          <p:cNvPr id="2" name="Title 1">
+            <a:extLst>
+              <a:ext uri="{FF2B5EF4-FFF2-40B4-BE49-F238E27FC236}">
+                <a16:creationId xmlns:a16="http://schemas.microsoft.com/office/drawing/2014/main" id="{8380F227-3A9C-B6FD-A1EE-2C751CCB47E2}"/>
+              </a:ext>
+            </a:extLst>
+          </p:cNvPr>
           <p:cNvSpPr>
             <a:spLocks noGrp="1"/>
           </p:cNvSpPr>
@@ -3216,107 +7770,110 @@
             <p:ph type="title"/>
           </p:nvPr>
         </p:nvSpPr>
-        <p:spPr>
-          <a:xfrm>
-            <a:off x="457201" y="204787"/>
-            <a:ext cx="3008313" cy="871538"/>
-          </a:xfrm>
-        </p:spPr>
-        <p:txBody>
-          <a:bodyPr/>
+        <p:spPr/>
+        <p:txBody>
+          <a:bodyPr>
+            <a:normAutofit/>
+          </a:bodyPr>
           <a:lstStyle/>
           <a:p>
-            <a:pPr lvl="0" indent="0" marL="0">
+            <a:r>
+              <a:rPr lang="en-US" dirty="0"/>
+              <a:t>Ensuring Data Integrity: Sourcing and Transformation</a:t>
+            </a:r>
+          </a:p>
+        </p:txBody>
+      </p:sp>
+      <p:sp>
+        <p:nvSpPr>
+          <p:cNvPr id="3" name="Content Placeholder 2">
+            <a:extLst>
+              <a:ext uri="{FF2B5EF4-FFF2-40B4-BE49-F238E27FC236}">
+                <a16:creationId xmlns:a16="http://schemas.microsoft.com/office/drawing/2014/main" id="{081C5F2A-15EE-8648-56F4-38A6E147F0F1}"/>
+              </a:ext>
+            </a:extLst>
+          </p:cNvPr>
+          <p:cNvSpPr>
+            <a:spLocks noGrp="1"/>
+          </p:cNvSpPr>
+          <p:nvPr>
+            <p:ph idx="1"/>
+          </p:nvPr>
+        </p:nvSpPr>
+        <p:spPr/>
+        <p:txBody>
+          <a:bodyPr>
+            <a:normAutofit/>
+          </a:bodyPr>
+          <a:lstStyle/>
+          <a:p>
+            <a:pPr marL="0" indent="0">
               <a:buNone/>
             </a:pPr>
             <a:r>
-              <a:rPr/>
-              <a:t>Converting Casual Users to Annual Members for Speedy Success</a:t>
-            </a:r>
-          </a:p>
-        </p:txBody>
-      </p:sp>
-      <p:sp>
-        <p:nvSpPr>
-          <p:cNvPr id="4" name="Text Placeholder 3"/>
-          <p:cNvSpPr>
-            <a:spLocks noGrp="1"/>
-          </p:cNvSpPr>
-          <p:nvPr>
-            <p:ph idx="2" sz="half" type="body"/>
-          </p:nvPr>
-        </p:nvSpPr>
-        <p:spPr/>
-        <p:txBody>
-          <a:bodyPr/>
-          <a:lstStyle/>
-          <a:p>
-            <a:pPr lvl="0" indent="0" marL="0">
-              <a:spcBef>
-                <a:spcPts val="3000"/>
-              </a:spcBef>
+              <a:rPr lang="en-US" dirty="0"/>
+              <a:t>The data used for this analysis was provided by Motivate International Incorporation which was made public under a specific Data License Agreement. </a:t>
+            </a:r>
+          </a:p>
+          <a:p>
+            <a:pPr marL="0" indent="0">
               <a:buNone/>
             </a:pPr>
             <a:r>
-              <a:rPr b="1"/>
-              <a:t>Average Ride Length</a:t>
-            </a:r>
-          </a:p>
-          <a:p>
-            <a:pPr lvl="0" indent="0" marL="0">
+              <a:rPr lang="en-US" dirty="0"/>
+              <a:t>Two datasets were provided under the original names; Divvy Trips 2019 and Divvy Trips 2020.</a:t>
+            </a:r>
+          </a:p>
+          <a:p>
+            <a:pPr marL="0" indent="0">
               <a:buNone/>
             </a:pPr>
             <a:r>
-              <a:rPr/>
-              <a:t>The analysis of the 2019 Trip data shows that Subscribers have an average ride length of 13.89 minutes while Customers average 61.93 minutes. The 2020 Trip data shows that Subscribers average 12.68 minutes while Customers average 95.79 minutes.</a:t>
-            </a:r>
-          </a:p>
-          <a:p>
-            <a:pPr lvl="0" indent="0" marL="0">
-              <a:spcBef>
-                <a:spcPts val="3000"/>
-              </a:spcBef>
+              <a:rPr lang="en-US" dirty="0"/>
+              <a:t>Both of the above datasets were </a:t>
+            </a:r>
+            <a:r>
+              <a:rPr lang="en-US" dirty="0" err="1"/>
+              <a:t>analysed</a:t>
+            </a:r>
+            <a:r>
+              <a:rPr lang="en-US" dirty="0"/>
+              <a:t> and there were no significant changes made to them during the course of the analysis.</a:t>
+            </a:r>
+          </a:p>
+          <a:p>
+            <a:pPr marL="0" indent="0">
               <a:buNone/>
             </a:pPr>
             <a:r>
-              <a:rPr b="1"/>
-              <a:t>Number of Rides by Day and User Type</a:t>
-            </a:r>
-          </a:p>
-        </p:txBody>
-      </p:sp>
-      <p:pic>
-        <p:nvPicPr>
-          <p:cNvPr descr="Cyclistic-Analysis_files/figure-pptx/setup2-1.png" id="0" name="Picture 1"/>
-          <p:cNvPicPr>
-            <a:picLocks noGrp="1" noChangeAspect="1"/>
-          </p:cNvPicPr>
-          <p:nvPr/>
-        </p:nvPicPr>
-        <p:blipFill>
-          <a:blip r:embed="rId2"/>
-          <a:stretch>
-            <a:fillRect/>
-          </a:stretch>
-        </p:blipFill>
-        <p:spPr bwMode="auto">
-          <a:xfrm>
-            <a:off x="3568700" y="355600"/>
-            <a:ext cx="5105400" cy="4089400"/>
-          </a:xfrm>
-          <a:prstGeom prst="rect">
-            <a:avLst/>
-          </a:prstGeom>
-          <a:noFill/>
-          <a:ln w="9525">
-            <a:noFill/>
-            <a:headEnd/>
-            <a:tailEnd/>
-          </a:ln>
-        </p:spPr>
-      </p:pic>
+              <a:rPr lang="en-US" dirty="0"/>
+              <a:t> </a:t>
+            </a:r>
+          </a:p>
+          <a:p>
+            <a:pPr marL="0" indent="0">
+              <a:buNone/>
+            </a:pPr>
+            <a:endParaRPr lang="en-US" dirty="0"/>
+          </a:p>
+          <a:p>
+            <a:pPr marL="0" indent="0">
+              <a:buNone/>
+            </a:pPr>
+            <a:endParaRPr lang="en-US" dirty="0"/>
+          </a:p>
+        </p:txBody>
+      </p:sp>
     </p:spTree>
+    <p:extLst>
+      <p:ext uri="{BB962C8B-B14F-4D97-AF65-F5344CB8AC3E}">
+        <p14:creationId xmlns:p14="http://schemas.microsoft.com/office/powerpoint/2010/main" val="1087490322"/>
+      </p:ext>
+    </p:extLst>
   </p:cSld>
+  <p:clrMapOvr>
+    <a:masterClrMapping/>
+  </p:clrMapOvr>
 </p:sld>
 </file>
 
@@ -3339,12 +7896,53 @@
       </p:grpSpPr>
       <p:sp>
         <p:nvSpPr>
-          <p:cNvPr id="4" name="Text Placeholder 3"/>
-          <p:cNvSpPr>
-            <a:spLocks noGrp="1"/>
-          </p:cNvSpPr>
-          <p:nvPr>
-            <p:ph idx="2" sz="half" type="body"/>
+          <p:cNvPr id="2" name="Title 1"/>
+          <p:cNvSpPr>
+            <a:spLocks noGrp="1"/>
+          </p:cNvSpPr>
+          <p:nvPr>
+            <p:ph type="title"/>
+          </p:nvPr>
+        </p:nvSpPr>
+        <p:spPr/>
+        <p:txBody>
+          <a:bodyPr>
+            <a:normAutofit/>
+          </a:bodyPr>
+          <a:lstStyle/>
+          <a:p>
+            <a:pPr marL="0" lvl="0" indent="0">
+              <a:buNone/>
+            </a:pPr>
+            <a:r>
+              <a:rPr dirty="0"/>
+              <a:t>Converting Casual Users to</a:t>
+            </a:r>
+            <a:r>
+              <a:rPr lang="en-US" dirty="0"/>
+              <a:t> Subscribers</a:t>
+            </a:r>
+            <a:r>
+              <a:rPr dirty="0"/>
+              <a:t> for Speedy Success</a:t>
+            </a:r>
+          </a:p>
+        </p:txBody>
+      </p:sp>
+      <p:sp>
+        <p:nvSpPr>
+          <p:cNvPr id="3" name="Content Placeholder 2">
+            <a:extLst>
+              <a:ext uri="{FF2B5EF4-FFF2-40B4-BE49-F238E27FC236}">
+                <a16:creationId xmlns:a16="http://schemas.microsoft.com/office/drawing/2014/main" id="{4CAA316A-EDB4-F728-E79D-9FA094DF8124}"/>
+              </a:ext>
+            </a:extLst>
+          </p:cNvPr>
+          <p:cNvSpPr>
+            <a:spLocks noGrp="1"/>
+          </p:cNvSpPr>
+          <p:nvPr>
+            <p:ph idx="1"/>
           </p:nvPr>
         </p:nvSpPr>
         <p:spPr/>
@@ -3352,44 +7950,30 @@
           <a:bodyPr/>
           <a:lstStyle/>
           <a:p>
-            <a:pPr lvl="0" indent="0" marL="0">
+            <a:pPr marL="0" indent="0">
               <a:buNone/>
             </a:pPr>
-          </a:p>
-        </p:txBody>
-      </p:sp>
-      <p:pic>
-        <p:nvPicPr>
-          <p:cNvPr descr="Cyclistic-Analysis_files/figure-pptx/setup3-1.png" id="0" name="Picture 1"/>
-          <p:cNvPicPr>
-            <a:picLocks noGrp="1" noChangeAspect="1"/>
-          </p:cNvPicPr>
-          <p:nvPr/>
-        </p:nvPicPr>
-        <p:blipFill>
-          <a:blip r:embed="rId2"/>
-          <a:stretch>
-            <a:fillRect/>
-          </a:stretch>
-        </p:blipFill>
-        <p:spPr bwMode="auto">
-          <a:xfrm>
-            <a:off x="3568700" y="355600"/>
-            <a:ext cx="5105400" cy="4089400"/>
-          </a:xfrm>
-          <a:prstGeom prst="rect">
-            <a:avLst/>
-          </a:prstGeom>
-          <a:noFill/>
-          <a:ln w="9525">
-            <a:noFill/>
-            <a:headEnd/>
-            <a:tailEnd/>
-          </a:ln>
-        </p:spPr>
-      </p:pic>
+            <a:r>
+              <a:rPr lang="en-US" dirty="0"/>
+              <a:t>PLEASE NOTE: Throughout the course of this analysis, Casual users would be referred to as Customers while Annual Members would be referred to as Subscribers.</a:t>
+            </a:r>
+          </a:p>
+          <a:p>
+            <a:pPr marL="0" indent="0">
+              <a:buNone/>
+            </a:pPr>
+            <a:r>
+              <a:rPr lang="en-US" dirty="0"/>
+              <a:t>The purpose of this analysis is to show how both of these user types differ and how the information can be used to formulate effective ways to turn most of them into Subscribers to guarantee the future success of the company.</a:t>
+            </a:r>
+          </a:p>
+        </p:txBody>
+      </p:sp>
     </p:spTree>
   </p:cSld>
+  <p:clrMapOvr>
+    <a:masterClrMapping/>
+  </p:clrMapOvr>
 </p:sld>
 </file>
 
@@ -3410,71 +7994,44 @@
           <a:chExt cx="0" cy="0"/>
         </a:xfrm>
       </p:grpSpPr>
-      <p:sp>
-        <p:nvSpPr>
-          <p:cNvPr id="4" name="Text Placeholder 3"/>
-          <p:cNvSpPr>
-            <a:spLocks noGrp="1"/>
-          </p:cNvSpPr>
-          <p:nvPr>
-            <p:ph idx="2" sz="half" type="body"/>
-          </p:nvPr>
-        </p:nvSpPr>
-        <p:spPr/>
-        <p:txBody>
-          <a:bodyPr/>
-          <a:lstStyle/>
-          <a:p>
-            <a:pPr lvl="0" indent="0" marL="0">
-              <a:buNone/>
-            </a:pPr>
-          </a:p>
-          <a:p>
-            <a:pPr lvl="0" indent="0" marL="0">
-              <a:spcBef>
-                <a:spcPts val="3000"/>
-              </a:spcBef>
-              <a:buNone/>
-            </a:pPr>
-            <a:r>
-              <a:rPr b="1"/>
-              <a:t>Hourly Usage</a:t>
-            </a:r>
-          </a:p>
-        </p:txBody>
-      </p:sp>
-      <p:pic>
-        <p:nvPicPr>
-          <p:cNvPr descr="Cyclistic-Analysis_files/figure-pptx/setup4-1.png" id="0" name="Picture 1"/>
-          <p:cNvPicPr>
-            <a:picLocks noGrp="1" noChangeAspect="1"/>
-          </p:cNvPicPr>
-          <p:nvPr/>
-        </p:nvPicPr>
-        <p:blipFill>
-          <a:blip r:embed="rId2"/>
-          <a:stretch>
-            <a:fillRect/>
-          </a:stretch>
-        </p:blipFill>
-        <p:spPr bwMode="auto">
-          <a:xfrm>
-            <a:off x="3568700" y="355600"/>
-            <a:ext cx="5105400" cy="4089400"/>
-          </a:xfrm>
-          <a:prstGeom prst="rect">
-            <a:avLst/>
-          </a:prstGeom>
-          <a:noFill/>
-          <a:ln w="9525">
-            <a:noFill/>
-            <a:headEnd/>
-            <a:tailEnd/>
-          </a:ln>
-        </p:spPr>
-      </p:pic>
+      <p:graphicFrame>
+        <p:nvGraphicFramePr>
+          <p:cNvPr id="4" name="Chart 3">
+            <a:extLst>
+              <a:ext uri="{FF2B5EF4-FFF2-40B4-BE49-F238E27FC236}">
+                <a16:creationId xmlns:a16="http://schemas.microsoft.com/office/drawing/2014/main" id="{06DB10E0-B6B5-46A9-EAA3-0EB4470B09EB}"/>
+              </a:ext>
+            </a:extLst>
+          </p:cNvPr>
+          <p:cNvGraphicFramePr/>
+          <p:nvPr>
+            <p:extLst>
+              <p:ext uri="{D42A27DB-BD31-4B8C-83A1-F6EECF244321}">
+                <p14:modId xmlns:p14="http://schemas.microsoft.com/office/powerpoint/2010/main" val="109008136"/>
+              </p:ext>
+            </p:extLst>
+          </p:nvPr>
+        </p:nvGraphicFramePr>
+        <p:xfrm>
+          <a:off x="1469756" y="640489"/>
+          <a:ext cx="6096000" cy="4064000"/>
+        </p:xfrm>
+        <a:graphic>
+          <a:graphicData uri="http://schemas.openxmlformats.org/drawingml/2006/chart">
+            <c:chart xmlns:c="http://schemas.openxmlformats.org/drawingml/2006/chart" xmlns:r="http://schemas.openxmlformats.org/officeDocument/2006/relationships" r:id="rId3"/>
+          </a:graphicData>
+        </a:graphic>
+      </p:graphicFrame>
     </p:spTree>
+    <p:extLst>
+      <p:ext uri="{BB962C8B-B14F-4D97-AF65-F5344CB8AC3E}">
+        <p14:creationId xmlns:p14="http://schemas.microsoft.com/office/powerpoint/2010/main" val="332054231"/>
+      </p:ext>
+    </p:extLst>
   </p:cSld>
+  <p:clrMapOvr>
+    <a:masterClrMapping/>
+  </p:clrMapOvr>
 </p:sld>
 </file>
 
@@ -3495,45 +8052,42 @@
           <a:chExt cx="0" cy="0"/>
         </a:xfrm>
       </p:grpSpPr>
-      <p:sp>
-        <p:nvSpPr>
-          <p:cNvPr id="4" name="Text Placeholder 3"/>
-          <p:cNvSpPr>
-            <a:spLocks noGrp="1"/>
-          </p:cNvSpPr>
-          <p:nvPr>
-            <p:ph idx="2" sz="half" type="body"/>
-          </p:nvPr>
-        </p:nvSpPr>
-        <p:spPr/>
-        <p:txBody>
-          <a:bodyPr/>
-          <a:lstStyle/>
-          <a:p>
-            <a:pPr lvl="0" indent="0" marL="0">
-              <a:buNone/>
-            </a:pPr>
-          </a:p>
-        </p:txBody>
-      </p:sp>
       <p:pic>
         <p:nvPicPr>
-          <p:cNvPr descr="Cyclistic-Analysis_files/figure-pptx/setup5-1.png" id="0" name="Picture 1"/>
+          <p:cNvPr id="2" name="Picture 1" descr="Cyclistic-Analysis_files/figure-pptx/setup2-1.png">
+            <a:extLst>
+              <a:ext uri="{FF2B5EF4-FFF2-40B4-BE49-F238E27FC236}">
+                <a16:creationId xmlns:a16="http://schemas.microsoft.com/office/drawing/2014/main" id="{8FC4B27B-45E9-B75A-6B97-ADB8AA536BE6}"/>
+              </a:ext>
+            </a:extLst>
+          </p:cNvPr>
           <p:cNvPicPr>
             <a:picLocks noGrp="1" noChangeAspect="1"/>
           </p:cNvPicPr>
           <p:nvPr/>
         </p:nvPicPr>
         <p:blipFill>
-          <a:blip r:embed="rId2"/>
+          <a:blip r:embed="rId2">
+            <a:extLst>
+              <a:ext uri="{BEBA8EAE-BF5A-486C-A8C5-ECC9F3942E4B}">
+                <a14:imgProps xmlns:a14="http://schemas.microsoft.com/office/drawing/2010/main">
+                  <a14:imgLayer r:embed="rId3">
+                    <a14:imgEffect>
+                      <a14:brightnessContrast bright="-20000" contrast="20000"/>
+                    </a14:imgEffect>
+                  </a14:imgLayer>
+                </a14:imgProps>
+              </a:ext>
+            </a:extLst>
+          </a:blip>
           <a:stretch>
             <a:fillRect/>
           </a:stretch>
         </p:blipFill>
         <p:spPr bwMode="auto">
           <a:xfrm>
-            <a:off x="3568700" y="355600"/>
-            <a:ext cx="5105400" cy="4089400"/>
+            <a:off x="1069383" y="419100"/>
+            <a:ext cx="7604717" cy="3784600"/>
           </a:xfrm>
           <a:prstGeom prst="rect">
             <a:avLst/>
@@ -3546,8 +8100,64 @@
           </a:ln>
         </p:spPr>
       </p:pic>
+      <p:sp>
+        <p:nvSpPr>
+          <p:cNvPr id="5" name="TextBox 4">
+            <a:extLst>
+              <a:ext uri="{FF2B5EF4-FFF2-40B4-BE49-F238E27FC236}">
+                <a16:creationId xmlns:a16="http://schemas.microsoft.com/office/drawing/2014/main" id="{939D74A8-7FBA-0D02-1CEA-4198B20EF3C1}"/>
+              </a:ext>
+            </a:extLst>
+          </p:cNvPr>
+          <p:cNvSpPr txBox="1"/>
+          <p:nvPr/>
+        </p:nvSpPr>
+        <p:spPr>
+          <a:xfrm>
+            <a:off x="6902450" y="3124200"/>
+            <a:ext cx="1771650" cy="738664"/>
+          </a:xfrm>
+          <a:prstGeom prst="rect">
+            <a:avLst/>
+          </a:prstGeom>
+          <a:noFill/>
+        </p:spPr>
+        <p:txBody>
+          <a:bodyPr wrap="square" rtlCol="0">
+            <a:spAutoFit/>
+          </a:bodyPr>
+          <a:lstStyle/>
+          <a:p>
+            <a:r>
+              <a:rPr lang="en-US" sz="1400" dirty="0" err="1"/>
+              <a:t>Day_of_Week</a:t>
+            </a:r>
+            <a:endParaRPr lang="en-US" sz="1400" dirty="0"/>
+          </a:p>
+          <a:p>
+            <a:r>
+              <a:rPr lang="en-US" sz="1400" dirty="0"/>
+              <a:t>Sunday=1</a:t>
+            </a:r>
+          </a:p>
+          <a:p>
+            <a:r>
+              <a:rPr lang="en-US" sz="1400" dirty="0"/>
+              <a:t>Saturday=7</a:t>
+            </a:r>
+          </a:p>
+        </p:txBody>
+      </p:sp>
     </p:spTree>
+    <p:extLst>
+      <p:ext uri="{BB962C8B-B14F-4D97-AF65-F5344CB8AC3E}">
+        <p14:creationId xmlns:p14="http://schemas.microsoft.com/office/powerpoint/2010/main" val="1487653055"/>
+      </p:ext>
+    </p:extLst>
   </p:cSld>
+  <p:clrMapOvr>
+    <a:masterClrMapping/>
+  </p:clrMapOvr>
 </p:sld>
 </file>
 
@@ -3568,70 +8178,112 @@
           <a:chExt cx="0" cy="0"/>
         </a:xfrm>
       </p:grpSpPr>
-      <p:sp>
-        <p:nvSpPr>
-          <p:cNvPr id="2" name="Title 1"/>
-          <p:cNvSpPr>
-            <a:spLocks noGrp="1"/>
-          </p:cNvSpPr>
-          <p:nvPr>
-            <p:ph type="title"/>
-          </p:nvPr>
-        </p:nvSpPr>
-        <p:spPr/>
-        <p:txBody>
-          <a:bodyPr/>
+      <p:pic>
+        <p:nvPicPr>
+          <p:cNvPr id="2" name="Picture 1" descr="Cyclistic-Analysis_files/figure-pptx/setup3-1.png">
+            <a:extLst>
+              <a:ext uri="{FF2B5EF4-FFF2-40B4-BE49-F238E27FC236}">
+                <a16:creationId xmlns:a16="http://schemas.microsoft.com/office/drawing/2014/main" id="{F87B2E74-D9E5-79DA-DEA6-AD56FE199EC1}"/>
+              </a:ext>
+            </a:extLst>
+          </p:cNvPr>
+          <p:cNvPicPr>
+            <a:picLocks noGrp="1" noChangeAspect="1"/>
+          </p:cNvPicPr>
+          <p:nvPr/>
+        </p:nvPicPr>
+        <p:blipFill>
+          <a:blip r:embed="rId2">
+            <a:extLst>
+              <a:ext uri="{BEBA8EAE-BF5A-486C-A8C5-ECC9F3942E4B}">
+                <a14:imgProps xmlns:a14="http://schemas.microsoft.com/office/drawing/2010/main">
+                  <a14:imgLayer r:embed="rId3">
+                    <a14:imgEffect>
+                      <a14:brightnessContrast bright="-20000" contrast="20000"/>
+                    </a14:imgEffect>
+                  </a14:imgLayer>
+                </a14:imgProps>
+              </a:ext>
+            </a:extLst>
+          </a:blip>
+          <a:stretch>
+            <a:fillRect/>
+          </a:stretch>
+        </p:blipFill>
+        <p:spPr bwMode="auto">
+          <a:xfrm>
+            <a:off x="999641" y="224725"/>
+            <a:ext cx="7674459" cy="4220275"/>
+          </a:xfrm>
+          <a:prstGeom prst="rect">
+            <a:avLst/>
+          </a:prstGeom>
+          <a:noFill/>
+          <a:ln w="9525">
+            <a:noFill/>
+            <a:headEnd/>
+            <a:tailEnd/>
+          </a:ln>
+        </p:spPr>
+      </p:pic>
+      <p:sp>
+        <p:nvSpPr>
+          <p:cNvPr id="3" name="TextBox 2">
+            <a:extLst>
+              <a:ext uri="{FF2B5EF4-FFF2-40B4-BE49-F238E27FC236}">
+                <a16:creationId xmlns:a16="http://schemas.microsoft.com/office/drawing/2014/main" id="{FB13BF66-76F6-D3A4-E848-E3F9C627E468}"/>
+              </a:ext>
+            </a:extLst>
+          </p:cNvPr>
+          <p:cNvSpPr txBox="1"/>
+          <p:nvPr/>
+        </p:nvSpPr>
+        <p:spPr>
+          <a:xfrm>
+            <a:off x="6902450" y="3124200"/>
+            <a:ext cx="1771650" cy="738664"/>
+          </a:xfrm>
+          <a:prstGeom prst="rect">
+            <a:avLst/>
+          </a:prstGeom>
+          <a:noFill/>
+        </p:spPr>
+        <p:txBody>
+          <a:bodyPr wrap="square" rtlCol="0">
+            <a:spAutoFit/>
+          </a:bodyPr>
           <a:lstStyle/>
           <a:p>
-            <a:pPr lvl="0" indent="0" marL="0">
-              <a:buNone/>
-            </a:pPr>
-            <a:r>
-              <a:rPr/>
-              <a:t>Summary</a:t>
-            </a:r>
-          </a:p>
-        </p:txBody>
-      </p:sp>
-      <p:sp>
-        <p:nvSpPr>
-          <p:cNvPr id="3" name="Content Placeholder 2"/>
-          <p:cNvSpPr>
-            <a:spLocks noGrp="1"/>
-          </p:cNvSpPr>
-          <p:nvPr>
-            <p:ph idx="1"/>
-          </p:nvPr>
-        </p:nvSpPr>
-        <p:spPr/>
-        <p:txBody>
-          <a:bodyPr/>
-          <a:lstStyle/>
-          <a:p>
-            <a:pPr lvl="0"/>
-            <a:r>
-              <a:rPr/>
-              <a:t>one</a:t>
-            </a:r>
-          </a:p>
-          <a:p>
-            <a:pPr lvl="0"/>
-            <a:r>
-              <a:rPr/>
-              <a:t>two</a:t>
-            </a:r>
-          </a:p>
-          <a:p>
-            <a:pPr lvl="0"/>
-            <a:r>
-              <a:rPr/>
-              <a:t>three</a:t>
+            <a:r>
+              <a:rPr lang="en-US" sz="1400" dirty="0" err="1"/>
+              <a:t>Day_of_Week</a:t>
+            </a:r>
+            <a:endParaRPr lang="en-US" sz="1400" dirty="0"/>
+          </a:p>
+          <a:p>
+            <a:r>
+              <a:rPr lang="en-US" sz="1400" dirty="0"/>
+              <a:t>Sunday=1</a:t>
+            </a:r>
+          </a:p>
+          <a:p>
+            <a:r>
+              <a:rPr lang="en-US" sz="1400" dirty="0"/>
+              <a:t>Saturday=7</a:t>
             </a:r>
           </a:p>
         </p:txBody>
       </p:sp>
     </p:spTree>
+    <p:extLst>
+      <p:ext uri="{BB962C8B-B14F-4D97-AF65-F5344CB8AC3E}">
+        <p14:creationId xmlns:p14="http://schemas.microsoft.com/office/powerpoint/2010/main" val="3682355482"/>
+      </p:ext>
+    </p:extLst>
   </p:cSld>
+  <p:clrMapOvr>
+    <a:masterClrMapping/>
+  </p:clrMapOvr>
 </p:sld>
 </file>
 
@@ -3652,33 +8304,52 @@
           <a:chExt cx="0" cy="0"/>
         </a:xfrm>
       </p:grpSpPr>
-      <p:sp>
-        <p:nvSpPr>
-          <p:cNvPr id="2" name="Title 1"/>
-          <p:cNvSpPr>
-            <a:spLocks noGrp="1"/>
-          </p:cNvSpPr>
-          <p:nvPr>
-            <p:ph type="title"/>
-          </p:nvPr>
-        </p:nvSpPr>
-        <p:spPr/>
-        <p:txBody>
-          <a:bodyPr/>
-          <a:lstStyle/>
-          <a:p>
-            <a:pPr lvl="0" indent="0" marL="0">
-              <a:buNone/>
-            </a:pPr>
-            <a:r>
-              <a:rPr/>
-              <a:t>Recommendations</a:t>
-            </a:r>
-          </a:p>
-        </p:txBody>
-      </p:sp>
+      <p:pic>
+        <p:nvPicPr>
+          <p:cNvPr id="2" name="Picture 1" descr="Cyclistic-Analysis_files/figure-pptx/setup3-1.png">
+            <a:extLst>
+              <a:ext uri="{FF2B5EF4-FFF2-40B4-BE49-F238E27FC236}">
+                <a16:creationId xmlns:a16="http://schemas.microsoft.com/office/drawing/2014/main" id="{8A72579C-ED86-B7F7-93E3-2F64108C15AE}"/>
+              </a:ext>
+            </a:extLst>
+          </p:cNvPr>
+          <p:cNvPicPr>
+            <a:picLocks noGrp="1" noChangeAspect="1"/>
+          </p:cNvPicPr>
+          <p:nvPr/>
+        </p:nvPicPr>
+        <p:blipFill>
+          <a:blip r:embed="rId2"/>
+          <a:stretch>
+            <a:fillRect/>
+          </a:stretch>
+        </p:blipFill>
+        <p:spPr bwMode="auto">
+          <a:xfrm>
+            <a:off x="1239865" y="355600"/>
+            <a:ext cx="7434236" cy="4089400"/>
+          </a:xfrm>
+          <a:prstGeom prst="rect">
+            <a:avLst/>
+          </a:prstGeom>
+          <a:noFill/>
+          <a:ln w="9525">
+            <a:noFill/>
+            <a:headEnd/>
+            <a:tailEnd/>
+          </a:ln>
+        </p:spPr>
+      </p:pic>
     </p:spTree>
+    <p:extLst>
+      <p:ext uri="{BB962C8B-B14F-4D97-AF65-F5344CB8AC3E}">
+        <p14:creationId xmlns:p14="http://schemas.microsoft.com/office/powerpoint/2010/main" val="2499147774"/>
+      </p:ext>
+    </p:extLst>
   </p:cSld>
+  <p:clrMapOvr>
+    <a:masterClrMapping/>
+  </p:clrMapOvr>
 </p:sld>
 </file>
 
@@ -3699,6 +8370,72 @@
           <a:chExt cx="0" cy="0"/>
         </a:xfrm>
       </p:grpSpPr>
+      <p:pic>
+        <p:nvPicPr>
+          <p:cNvPr id="2" name="Picture 1" descr="Cyclistic-Analysis_files/figure-pptx/setup5-1.png">
+            <a:extLst>
+              <a:ext uri="{FF2B5EF4-FFF2-40B4-BE49-F238E27FC236}">
+                <a16:creationId xmlns:a16="http://schemas.microsoft.com/office/drawing/2014/main" id="{A2C5D8FC-BE35-CA7A-C04C-23C8B7B5AC01}"/>
+              </a:ext>
+            </a:extLst>
+          </p:cNvPr>
+          <p:cNvPicPr>
+            <a:picLocks noGrp="1" noChangeAspect="1"/>
+          </p:cNvPicPr>
+          <p:nvPr/>
+        </p:nvPicPr>
+        <p:blipFill>
+          <a:blip r:embed="rId2"/>
+          <a:stretch>
+            <a:fillRect/>
+          </a:stretch>
+        </p:blipFill>
+        <p:spPr bwMode="auto">
+          <a:xfrm>
+            <a:off x="1394847" y="209227"/>
+            <a:ext cx="7279253" cy="4235773"/>
+          </a:xfrm>
+          <a:prstGeom prst="rect">
+            <a:avLst/>
+          </a:prstGeom>
+          <a:noFill/>
+          <a:ln w="9525">
+            <a:noFill/>
+            <a:headEnd/>
+            <a:tailEnd/>
+          </a:ln>
+        </p:spPr>
+      </p:pic>
+    </p:spTree>
+    <p:extLst>
+      <p:ext uri="{BB962C8B-B14F-4D97-AF65-F5344CB8AC3E}">
+        <p14:creationId xmlns:p14="http://schemas.microsoft.com/office/powerpoint/2010/main" val="26823438"/>
+      </p:ext>
+    </p:extLst>
+  </p:cSld>
+  <p:clrMapOvr>
+    <a:masterClrMapping/>
+  </p:clrMapOvr>
+</p:sld>
+</file>
+
+<file path=ppt/slides/slide9.xml><?xml version="1.0" encoding="utf-8"?>
+<p:sld xmlns:a="http://schemas.openxmlformats.org/drawingml/2006/main" xmlns:r="http://schemas.openxmlformats.org/officeDocument/2006/relationships" xmlns:p="http://schemas.openxmlformats.org/presentationml/2006/main">
+  <p:cSld>
+    <p:spTree>
+      <p:nvGrpSpPr>
+        <p:cNvPr id="1" name=""/>
+        <p:cNvGrpSpPr/>
+        <p:nvPr/>
+      </p:nvGrpSpPr>
+      <p:grpSpPr>
+        <a:xfrm>
+          <a:off x="0" y="0"/>
+          <a:ext cx="0" cy="0"/>
+          <a:chOff x="0" y="0"/>
+          <a:chExt cx="0" cy="0"/>
+        </a:xfrm>
+      </p:grpSpPr>
       <p:sp>
         <p:nvSpPr>
           <p:cNvPr id="2" name="Title 1"/>
@@ -3714,22 +8451,324 @@
           <a:bodyPr/>
           <a:lstStyle/>
           <a:p>
-            <a:pPr lvl="0" indent="0" marL="0">
+            <a:pPr marL="0" lvl="0" indent="0">
               <a:buNone/>
             </a:pPr>
             <a:r>
-              <a:rPr/>
-              <a:t>Questions</a:t>
-            </a:r>
+              <a:t>Summary</a:t>
+            </a:r>
+          </a:p>
+        </p:txBody>
+      </p:sp>
+      <p:sp>
+        <p:nvSpPr>
+          <p:cNvPr id="3" name="Content Placeholder 2"/>
+          <p:cNvSpPr>
+            <a:spLocks noGrp="1"/>
+          </p:cNvSpPr>
+          <p:nvPr>
+            <p:ph idx="1"/>
+          </p:nvPr>
+        </p:nvSpPr>
+        <p:spPr/>
+        <p:txBody>
+          <a:bodyPr/>
+          <a:lstStyle/>
+          <a:p>
+            <a:r>
+              <a:rPr lang="en-US" dirty="0"/>
+              <a:t>The average ride length for customers (casual users) exceeds that of the Annual subscribers even though we have a significantly higher number of rides from these subscribers.</a:t>
+            </a:r>
+          </a:p>
+          <a:p>
+            <a:r>
+              <a:rPr lang="en-US" dirty="0"/>
+              <a:t>From the analysis, it is clear that unlike the subscribers, the casual users generally do not follow a traditional 9 to 5 worker profile for their bike usage. Rather, the way they use the bike share service reflects leisure and recreation rather than daily commuting.</a:t>
+            </a:r>
+          </a:p>
+          <a:p>
+            <a:endParaRPr lang="en-US" dirty="0"/>
+          </a:p>
+          <a:p>
+            <a:endParaRPr lang="en-US" dirty="0"/>
+          </a:p>
+          <a:p>
+            <a:endParaRPr dirty="0"/>
+          </a:p>
+          <a:p>
+            <a:pPr marL="0" lvl="0" indent="0">
+              <a:buNone/>
+            </a:pPr>
+            <a:endParaRPr dirty="0"/>
           </a:p>
         </p:txBody>
       </p:sp>
     </p:spTree>
   </p:cSld>
+  <p:clrMapOvr>
+    <a:masterClrMapping/>
+  </p:clrMapOvr>
 </p:sld>
 </file>
 
 <file path=ppt/theme/theme1.xml><?xml version="1.0" encoding="utf-8"?>
+<a:theme xmlns:a="http://schemas.openxmlformats.org/drawingml/2006/main" name="Facet">
+  <a:themeElements>
+    <a:clrScheme name="Facet">
+      <a:dk1>
+        <a:sysClr val="windowText" lastClr="000000"/>
+      </a:dk1>
+      <a:lt1>
+        <a:sysClr val="window" lastClr="FFFFFF"/>
+      </a:lt1>
+      <a:dk2>
+        <a:srgbClr val="2C3C43"/>
+      </a:dk2>
+      <a:lt2>
+        <a:srgbClr val="EBEBEB"/>
+      </a:lt2>
+      <a:accent1>
+        <a:srgbClr val="5FCBEF"/>
+      </a:accent1>
+      <a:accent2>
+        <a:srgbClr val="2E83C3"/>
+      </a:accent2>
+      <a:accent3>
+        <a:srgbClr val="42D0A2"/>
+      </a:accent3>
+      <a:accent4>
+        <a:srgbClr val="2E946B"/>
+      </a:accent4>
+      <a:accent5>
+        <a:srgbClr val="42B051"/>
+      </a:accent5>
+      <a:accent6>
+        <a:srgbClr val="96D141"/>
+      </a:accent6>
+      <a:hlink>
+        <a:srgbClr val="3FCDE7"/>
+      </a:hlink>
+      <a:folHlink>
+        <a:srgbClr val="A9D3E1"/>
+      </a:folHlink>
+    </a:clrScheme>
+    <a:fontScheme name="Facet">
+      <a:majorFont>
+        <a:latin typeface="Trebuchet MS" panose="020B0603020202020204"/>
+        <a:ea typeface=""/>
+        <a:cs typeface=""/>
+        <a:font script="Jpan" typeface="メイリオ"/>
+        <a:font script="Hang" typeface="맑은 고딕"/>
+        <a:font script="Hans" typeface="方正姚体"/>
+        <a:font script="Hant" typeface="微軟正黑體"/>
+        <a:font script="Arab" typeface="Tahoma"/>
+        <a:font script="Hebr" typeface="Arial"/>
+        <a:font script="Thai" typeface="Cordia New"/>
+        <a:font script="Ethi" typeface="Nyala"/>
+        <a:font script="Beng" typeface="Vrinda"/>
+        <a:font script="Gujr" typeface="Shruti"/>
+        <a:font script="Khmr" typeface="DaunPenh"/>
+        <a:font script="Knda" typeface="Tunga"/>
+        <a:font script="Guru" typeface="Raavi"/>
+        <a:font script="Cans" typeface="Euphemia"/>
+        <a:font script="Cher" typeface="Plantagenet Cherokee"/>
+        <a:font script="Yiii" typeface="Microsoft Yi Baiti"/>
+        <a:font script="Tibt" typeface="Microsoft Himalaya"/>
+        <a:font script="Thaa" typeface="MV Boli"/>
+        <a:font script="Deva" typeface="Mangal"/>
+        <a:font script="Telu" typeface="Gautami"/>
+        <a:font script="Taml" typeface="Latha"/>
+        <a:font script="Syrc" typeface="Estrangelo Edessa"/>
+        <a:font script="Orya" typeface="Kalinga"/>
+        <a:font script="Mlym" typeface="Kartika"/>
+        <a:font script="Laoo" typeface="DokChampa"/>
+        <a:font script="Sinh" typeface="Iskoola Pota"/>
+        <a:font script="Mong" typeface="Mongolian Baiti"/>
+        <a:font script="Viet" typeface="Tahoma"/>
+        <a:font script="Uigh" typeface="Microsoft Uighur"/>
+        <a:font script="Geor" typeface="Sylfaen"/>
+      </a:majorFont>
+      <a:minorFont>
+        <a:latin typeface="Trebuchet MS" panose="020B0603020202020204"/>
+        <a:ea typeface=""/>
+        <a:cs typeface=""/>
+        <a:font script="Jpan" typeface="メイリオ"/>
+        <a:font script="Hang" typeface="HY그래픽M"/>
+        <a:font script="Hans" typeface="华文新魏"/>
+        <a:font script="Hant" typeface="微軟正黑體"/>
+        <a:font script="Arab" typeface="Tahoma"/>
+        <a:font script="Hebr" typeface="Gisha"/>
+        <a:font script="Thai" typeface="IrisUPC"/>
+        <a:font script="Ethi" typeface="Nyala"/>
+        <a:font script="Beng" typeface="Vrinda"/>
+        <a:font script="Gujr" typeface="Shruti"/>
+        <a:font script="Khmr" typeface="DaunPenh"/>
+        <a:font script="Knda" typeface="Tunga"/>
+        <a:font script="Guru" typeface="Raavi"/>
+        <a:font script="Cans" typeface="Euphemia"/>
+        <a:font script="Cher" typeface="Plantagenet Cherokee"/>
+        <a:font script="Yiii" typeface="Microsoft Yi Baiti"/>
+        <a:font script="Tibt" typeface="Microsoft Himalaya"/>
+        <a:font script="Thaa" typeface="MV Boli"/>
+        <a:font script="Deva" typeface="Mangal"/>
+        <a:font script="Telu" typeface="Gautami"/>
+        <a:font script="Taml" typeface="Latha"/>
+        <a:font script="Syrc" typeface="Estrangelo Edessa"/>
+        <a:font script="Orya" typeface="Kalinga"/>
+        <a:font script="Mlym" typeface="Kartika"/>
+        <a:font script="Laoo" typeface="DokChampa"/>
+        <a:font script="Sinh" typeface="Iskoola Pota"/>
+        <a:font script="Mong" typeface="Mongolian Baiti"/>
+        <a:font script="Viet" typeface="Arial"/>
+        <a:font script="Uigh" typeface="Microsoft Uighur"/>
+        <a:font script="Geor" typeface="Sylfaen"/>
+      </a:minorFont>
+    </a:fontScheme>
+    <a:fmtScheme name="Facet">
+      <a:fillStyleLst>
+        <a:solidFill>
+          <a:schemeClr val="phClr"/>
+        </a:solidFill>
+        <a:gradFill rotWithShape="1">
+          <a:gsLst>
+            <a:gs pos="0">
+              <a:schemeClr val="phClr">
+                <a:tint val="65000"/>
+                <a:lumMod val="110000"/>
+              </a:schemeClr>
+            </a:gs>
+            <a:gs pos="88000">
+              <a:schemeClr val="phClr">
+                <a:tint val="90000"/>
+              </a:schemeClr>
+            </a:gs>
+          </a:gsLst>
+          <a:lin ang="5400000" scaled="0"/>
+        </a:gradFill>
+        <a:gradFill rotWithShape="1">
+          <a:gsLst>
+            <a:gs pos="0">
+              <a:schemeClr val="phClr">
+                <a:tint val="96000"/>
+                <a:lumMod val="100000"/>
+              </a:schemeClr>
+            </a:gs>
+            <a:gs pos="78000">
+              <a:schemeClr val="phClr">
+                <a:shade val="94000"/>
+                <a:lumMod val="94000"/>
+              </a:schemeClr>
+            </a:gs>
+          </a:gsLst>
+          <a:lin ang="5400000" scaled="0"/>
+        </a:gradFill>
+      </a:fillStyleLst>
+      <a:lnStyleLst>
+        <a:ln w="12700" cap="rnd" cmpd="sng" algn="ctr">
+          <a:solidFill>
+            <a:schemeClr val="phClr"/>
+          </a:solidFill>
+          <a:prstDash val="solid"/>
+        </a:ln>
+        <a:ln w="19050" cap="rnd" cmpd="sng" algn="ctr">
+          <a:solidFill>
+            <a:schemeClr val="phClr"/>
+          </a:solidFill>
+          <a:prstDash val="solid"/>
+        </a:ln>
+        <a:ln w="25400" cap="rnd" cmpd="sng" algn="ctr">
+          <a:solidFill>
+            <a:schemeClr val="phClr"/>
+          </a:solidFill>
+          <a:prstDash val="solid"/>
+        </a:ln>
+      </a:lnStyleLst>
+      <a:effectStyleLst>
+        <a:effectStyle>
+          <a:effectLst/>
+        </a:effectStyle>
+        <a:effectStyle>
+          <a:effectLst>
+            <a:outerShdw blurRad="38100" dist="25400" dir="5400000" rotWithShape="0">
+              <a:srgbClr val="000000">
+                <a:alpha val="35000"/>
+              </a:srgbClr>
+            </a:outerShdw>
+          </a:effectLst>
+        </a:effectStyle>
+        <a:effectStyle>
+          <a:effectLst>
+            <a:outerShdw blurRad="50800" dist="38100" dir="5400000" rotWithShape="0">
+              <a:srgbClr val="000000">
+                <a:alpha val="35000"/>
+              </a:srgbClr>
+            </a:outerShdw>
+          </a:effectLst>
+          <a:scene3d>
+            <a:camera prst="orthographicFront">
+              <a:rot lat="0" lon="0" rev="0"/>
+            </a:camera>
+            <a:lightRig rig="threePt" dir="tl"/>
+          </a:scene3d>
+          <a:sp3d prstMaterial="plastic">
+            <a:bevelT w="0" h="0"/>
+          </a:sp3d>
+        </a:effectStyle>
+      </a:effectStyleLst>
+      <a:bgFillStyleLst>
+        <a:solidFill>
+          <a:schemeClr val="phClr"/>
+        </a:solidFill>
+        <a:gradFill rotWithShape="1">
+          <a:gsLst>
+            <a:gs pos="0">
+              <a:schemeClr val="phClr">
+                <a:tint val="90000"/>
+                <a:lumMod val="104000"/>
+              </a:schemeClr>
+            </a:gs>
+            <a:gs pos="94000">
+              <a:schemeClr val="phClr">
+                <a:shade val="96000"/>
+                <a:lumMod val="82000"/>
+              </a:schemeClr>
+            </a:gs>
+          </a:gsLst>
+          <a:lin ang="5400000" scaled="0"/>
+        </a:gradFill>
+        <a:gradFill rotWithShape="1">
+          <a:gsLst>
+            <a:gs pos="0">
+              <a:schemeClr val="phClr">
+                <a:tint val="90000"/>
+                <a:lumMod val="110000"/>
+              </a:schemeClr>
+            </a:gs>
+            <a:gs pos="100000">
+              <a:schemeClr val="phClr">
+                <a:shade val="94000"/>
+                <a:lumMod val="96000"/>
+              </a:schemeClr>
+            </a:gs>
+          </a:gsLst>
+          <a:path path="circle">
+            <a:fillToRect l="50000" t="50000" r="100000" b="100000"/>
+          </a:path>
+        </a:gradFill>
+      </a:bgFillStyleLst>
+    </a:fmtScheme>
+  </a:themeElements>
+  <a:objectDefaults/>
+  <a:extraClrSchemeLst/>
+  <a:extLst>
+    <a:ext uri="{05A4C25C-085E-4340-85A3-A5531E510DB2}">
+      <thm15:themeFamily xmlns:thm15="http://schemas.microsoft.com/office/thememl/2012/main" name="Facet" id="{C0C680CD-088A-49FC-A102-D699147F32B2}" vid="{0B5AB586-D108-4FC1-8368-649FE654B894}"/>
+    </a:ext>
+  </a:extLst>
+</a:theme>
+</file>
+
+<file path=ppt/theme/theme2.xml><?xml version="1.0" encoding="utf-8"?>
 <a:theme xmlns:a="http://schemas.openxmlformats.org/drawingml/2006/main" name="Office Theme">
   <a:themeElements>
     <a:clrScheme name="Office">
@@ -3740,44 +8779,44 @@
         <a:sysClr val="window" lastClr="FFFFFF"/>
       </a:lt1>
       <a:dk2>
-        <a:srgbClr val="1F497D"/>
+        <a:srgbClr val="44546A"/>
       </a:dk2>
       <a:lt2>
-        <a:srgbClr val="EEECE1"/>
+        <a:srgbClr val="E7E6E6"/>
       </a:lt2>
       <a:accent1>
-        <a:srgbClr val="4F81BD"/>
+        <a:srgbClr val="4472C4"/>
       </a:accent1>
       <a:accent2>
-        <a:srgbClr val="C0504D"/>
+        <a:srgbClr val="ED7D31"/>
       </a:accent2>
       <a:accent3>
-        <a:srgbClr val="9BBB59"/>
+        <a:srgbClr val="A5A5A5"/>
       </a:accent3>
       <a:accent4>
-        <a:srgbClr val="8064A2"/>
+        <a:srgbClr val="FFC000"/>
       </a:accent4>
       <a:accent5>
-        <a:srgbClr val="4BACC6"/>
+        <a:srgbClr val="5B9BD5"/>
       </a:accent5>
       <a:accent6>
-        <a:srgbClr val="F79646"/>
+        <a:srgbClr val="70AD47"/>
       </a:accent6>
       <a:hlink>
-        <a:srgbClr val="0000FF"/>
+        <a:srgbClr val="0563C1"/>
       </a:hlink>
       <a:folHlink>
-        <a:srgbClr val="800080"/>
+        <a:srgbClr val="954F72"/>
       </a:folHlink>
     </a:clrScheme>
     <a:fontScheme name="Office">
       <a:majorFont>
-        <a:latin typeface="Calibri"/>
+        <a:latin typeface="Calibri Light" panose="020F0302020204030204"/>
         <a:ea typeface=""/>
         <a:cs typeface=""/>
-        <a:font script="Jpan" typeface="ＭＳ Ｐゴシック"/>
+        <a:font script="Jpan" typeface="游ゴシック Light"/>
         <a:font script="Hang" typeface="맑은 고딕"/>
-        <a:font script="Hans" typeface="宋体"/>
+        <a:font script="Hans" typeface="等线 Light"/>
         <a:font script="Hant" typeface="新細明體"/>
         <a:font script="Arab" typeface="Times New Roman"/>
         <a:font script="Hebr" typeface="Times New Roman"/>
@@ -3805,14 +8844,31 @@
         <a:font script="Viet" typeface="Times New Roman"/>
         <a:font script="Uigh" typeface="Microsoft Uighur"/>
         <a:font script="Geor" typeface="Sylfaen"/>
+        <a:font script="Armn" typeface="Arial"/>
+        <a:font script="Bugi" typeface="Leelawadee UI"/>
+        <a:font script="Bopo" typeface="Microsoft JhengHei"/>
+        <a:font script="Java" typeface="Javanese Text"/>
+        <a:font script="Lisu" typeface="Segoe UI"/>
+        <a:font script="Mymr" typeface="Myanmar Text"/>
+        <a:font script="Nkoo" typeface="Ebrima"/>
+        <a:font script="Olck" typeface="Nirmala UI"/>
+        <a:font script="Osma" typeface="Ebrima"/>
+        <a:font script="Phag" typeface="Phagspa"/>
+        <a:font script="Syrn" typeface="Estrangelo Edessa"/>
+        <a:font script="Syrj" typeface="Estrangelo Edessa"/>
+        <a:font script="Syre" typeface="Estrangelo Edessa"/>
+        <a:font script="Sora" typeface="Nirmala UI"/>
+        <a:font script="Tale" typeface="Microsoft Tai Le"/>
+        <a:font script="Talu" typeface="Microsoft New Tai Lue"/>
+        <a:font script="Tfng" typeface="Ebrima"/>
       </a:majorFont>
       <a:minorFont>
-        <a:latin typeface="Calibri"/>
+        <a:latin typeface="Calibri" panose="020F0502020204030204"/>
         <a:ea typeface=""/>
         <a:cs typeface=""/>
-        <a:font script="Jpan" typeface="ＭＳ Ｐゴシック"/>
+        <a:font script="Jpan" typeface="游ゴシック"/>
         <a:font script="Hang" typeface="맑은 고딕"/>
-        <a:font script="Hans" typeface="宋体"/>
+        <a:font script="Hans" typeface="等线"/>
         <a:font script="Hant" typeface="新細明體"/>
         <a:font script="Arab" typeface="Arial"/>
         <a:font script="Hebr" typeface="Arial"/>
@@ -3840,326 +8896,23 @@
         <a:font script="Viet" typeface="Arial"/>
         <a:font script="Uigh" typeface="Microsoft Uighur"/>
         <a:font script="Geor" typeface="Sylfaen"/>
-      </a:minorFont>
-    </a:fontScheme>
-    <a:fmtScheme name="Office">
-      <a:fillStyleLst>
-        <a:solidFill>
-          <a:schemeClr val="phClr"/>
-        </a:solidFill>
-        <a:gradFill rotWithShape="1">
-          <a:gsLst>
-            <a:gs pos="0">
-              <a:schemeClr val="phClr">
-                <a:tint val="50000"/>
-                <a:satMod val="300000"/>
-              </a:schemeClr>
-            </a:gs>
-            <a:gs pos="35000">
-              <a:schemeClr val="phClr">
-                <a:tint val="37000"/>
-                <a:satMod val="300000"/>
-              </a:schemeClr>
-            </a:gs>
-            <a:gs pos="100000">
-              <a:schemeClr val="phClr">
-                <a:tint val="15000"/>
-                <a:satMod val="350000"/>
-              </a:schemeClr>
-            </a:gs>
-          </a:gsLst>
-          <a:lin ang="16200000" scaled="1"/>
-        </a:gradFill>
-        <a:gradFill rotWithShape="1">
-          <a:gsLst>
-            <a:gs pos="0">
-              <a:schemeClr val="phClr">
-                <a:tint val="100000"/>
-                <a:shade val="100000"/>
-                <a:satMod val="130000"/>
-              </a:schemeClr>
-            </a:gs>
-            <a:gs pos="100000">
-              <a:schemeClr val="phClr">
-                <a:tint val="50000"/>
-                <a:shade val="100000"/>
-                <a:satMod val="350000"/>
-              </a:schemeClr>
-            </a:gs>
-          </a:gsLst>
-          <a:lin ang="16200000" scaled="0"/>
-        </a:gradFill>
-      </a:fillStyleLst>
-      <a:lnStyleLst>
-        <a:ln w="9525" cap="flat" cmpd="sng" algn="ctr">
-          <a:solidFill>
-            <a:schemeClr val="phClr">
-              <a:shade val="95000"/>
-              <a:satMod val="105000"/>
-            </a:schemeClr>
-          </a:solidFill>
-          <a:prstDash val="solid"/>
-        </a:ln>
-        <a:ln w="25400" cap="flat" cmpd="sng" algn="ctr">
-          <a:solidFill>
-            <a:schemeClr val="phClr"/>
-          </a:solidFill>
-          <a:prstDash val="solid"/>
-        </a:ln>
-        <a:ln w="38100" cap="flat" cmpd="sng" algn="ctr">
-          <a:solidFill>
-            <a:schemeClr val="phClr"/>
-          </a:solidFill>
-          <a:prstDash val="solid"/>
-        </a:ln>
-      </a:lnStyleLst>
-      <a:effectStyleLst>
-        <a:effectStyle>
-          <a:effectLst>
-            <a:outerShdw blurRad="40000" dist="20000" dir="5400000" rotWithShape="0">
-              <a:srgbClr val="000000">
-                <a:alpha val="38000"/>
-              </a:srgbClr>
-            </a:outerShdw>
-          </a:effectLst>
-        </a:effectStyle>
-        <a:effectStyle>
-          <a:effectLst>
-            <a:outerShdw blurRad="40000" dist="23000" dir="5400000" rotWithShape="0">
-              <a:srgbClr val="000000">
-                <a:alpha val="35000"/>
-              </a:srgbClr>
-            </a:outerShdw>
-          </a:effectLst>
-        </a:effectStyle>
-        <a:effectStyle>
-          <a:effectLst>
-            <a:outerShdw blurRad="40000" dist="23000" dir="5400000" rotWithShape="0">
-              <a:srgbClr val="000000">
-                <a:alpha val="35000"/>
-              </a:srgbClr>
-            </a:outerShdw>
-          </a:effectLst>
-          <a:scene3d>
-            <a:camera prst="orthographicFront">
-              <a:rot lat="0" lon="0" rev="0"/>
-            </a:camera>
-            <a:lightRig rig="threePt" dir="t">
-              <a:rot lat="0" lon="0" rev="1200000"/>
-            </a:lightRig>
-          </a:scene3d>
-          <a:sp3d>
-            <a:bevelT w="63500" h="25400"/>
-          </a:sp3d>
-        </a:effectStyle>
-      </a:effectStyleLst>
-      <a:bgFillStyleLst>
-        <a:solidFill>
-          <a:schemeClr val="phClr"/>
-        </a:solidFill>
-        <a:gradFill rotWithShape="1">
-          <a:gsLst>
-            <a:gs pos="0">
-              <a:schemeClr val="phClr">
-                <a:tint val="40000"/>
-                <a:satMod val="350000"/>
-              </a:schemeClr>
-            </a:gs>
-            <a:gs pos="40000">
-              <a:schemeClr val="phClr">
-                <a:tint val="45000"/>
-                <a:shade val="99000"/>
-                <a:satMod val="350000"/>
-              </a:schemeClr>
-            </a:gs>
-            <a:gs pos="100000">
-              <a:schemeClr val="phClr">
-                <a:shade val="20000"/>
-                <a:satMod val="255000"/>
-              </a:schemeClr>
-            </a:gs>
-          </a:gsLst>
-          <a:path path="circle">
-            <a:fillToRect l="50000" t="-80000" r="50000" b="180000"/>
-          </a:path>
-        </a:gradFill>
-        <a:gradFill rotWithShape="1">
-          <a:gsLst>
-            <a:gs pos="0">
-              <a:schemeClr val="phClr">
-                <a:tint val="80000"/>
-                <a:satMod val="300000"/>
-              </a:schemeClr>
-            </a:gs>
-            <a:gs pos="100000">
-              <a:schemeClr val="phClr">
-                <a:shade val="30000"/>
-                <a:satMod val="200000"/>
-              </a:schemeClr>
-            </a:gs>
-          </a:gsLst>
-          <a:path path="circle">
-            <a:fillToRect l="50000" t="50000" r="50000" b="50000"/>
-          </a:path>
-        </a:gradFill>
-      </a:bgFillStyleLst>
-    </a:fmtScheme>
-  </a:themeElements>
-  <a:objectDefaults>
-    <a:spDef>
-      <a:spPr/>
-      <a:bodyPr/>
-      <a:lstStyle/>
-      <a:style>
-        <a:lnRef idx="1">
-          <a:schemeClr val="accent1"/>
-        </a:lnRef>
-        <a:fillRef idx="3">
-          <a:schemeClr val="accent1"/>
-        </a:fillRef>
-        <a:effectRef idx="2">
-          <a:schemeClr val="accent1"/>
-        </a:effectRef>
-        <a:fontRef idx="minor">
-          <a:schemeClr val="lt1"/>
-        </a:fontRef>
-      </a:style>
-    </a:spDef>
-    <a:lnDef>
-      <a:spPr/>
-      <a:bodyPr/>
-      <a:lstStyle/>
-      <a:style>
-        <a:lnRef idx="2">
-          <a:schemeClr val="accent1"/>
-        </a:lnRef>
-        <a:fillRef idx="0">
-          <a:schemeClr val="accent1"/>
-        </a:fillRef>
-        <a:effectRef idx="1">
-          <a:schemeClr val="accent1"/>
-        </a:effectRef>
-        <a:fontRef idx="minor">
-          <a:schemeClr val="tx1"/>
-        </a:fontRef>
-      </a:style>
-    </a:lnDef>
-  </a:objectDefaults>
-  <a:extraClrSchemeLst/>
-</a:theme>
-</file>
-
-<file path=ppt/theme/theme2.xml><?xml version="1.0" encoding="utf-8"?>
-<a:theme xmlns:a="http://schemas.openxmlformats.org/drawingml/2006/main" name="Office Theme">
-  <a:themeElements>
-    <a:clrScheme name="Office">
-      <a:dk1>
-        <a:sysClr val="windowText" lastClr="000000"/>
-      </a:dk1>
-      <a:lt1>
-        <a:sysClr val="window" lastClr="FFFFFF"/>
-      </a:lt1>
-      <a:dk2>
-        <a:srgbClr val="44546A"/>
-      </a:dk2>
-      <a:lt2>
-        <a:srgbClr val="E7E6E6"/>
-      </a:lt2>
-      <a:accent1>
-        <a:srgbClr val="5B9BD5"/>
-      </a:accent1>
-      <a:accent2>
-        <a:srgbClr val="ED7D31"/>
-      </a:accent2>
-      <a:accent3>
-        <a:srgbClr val="A5A5A5"/>
-      </a:accent3>
-      <a:accent4>
-        <a:srgbClr val="FFC000"/>
-      </a:accent4>
-      <a:accent5>
-        <a:srgbClr val="4472C4"/>
-      </a:accent5>
-      <a:accent6>
-        <a:srgbClr val="70AD47"/>
-      </a:accent6>
-      <a:hlink>
-        <a:srgbClr val="0563C1"/>
-      </a:hlink>
-      <a:folHlink>
-        <a:srgbClr val="954F72"/>
-      </a:folHlink>
-    </a:clrScheme>
-    <a:fontScheme name="Office">
-      <a:majorFont>
-        <a:latin typeface="Calibri Light" panose="020F0302020204030204"/>
-        <a:ea typeface=""/>
-        <a:cs typeface=""/>
-        <a:font script="Jpan" typeface="ＭＳ Ｐゴシック"/>
-        <a:font script="Hang" typeface="맑은 고딕"/>
-        <a:font script="Hans" typeface="宋体"/>
-        <a:font script="Hant" typeface="新細明體"/>
-        <a:font script="Arab" typeface="Times New Roman"/>
-        <a:font script="Hebr" typeface="Times New Roman"/>
-        <a:font script="Thai" typeface="Angsana New"/>
-        <a:font script="Ethi" typeface="Nyala"/>
-        <a:font script="Beng" typeface="Vrinda"/>
-        <a:font script="Gujr" typeface="Shruti"/>
-        <a:font script="Khmr" typeface="MoolBoran"/>
-        <a:font script="Knda" typeface="Tunga"/>
-        <a:font script="Guru" typeface="Raavi"/>
-        <a:font script="Cans" typeface="Euphemia"/>
-        <a:font script="Cher" typeface="Plantagenet Cherokee"/>
-        <a:font script="Yiii" typeface="Microsoft Yi Baiti"/>
-        <a:font script="Tibt" typeface="Microsoft Himalaya"/>
-        <a:font script="Thaa" typeface="MV Boli"/>
-        <a:font script="Deva" typeface="Mangal"/>
-        <a:font script="Telu" typeface="Gautami"/>
-        <a:font script="Taml" typeface="Latha"/>
-        <a:font script="Syrc" typeface="Estrangelo Edessa"/>
-        <a:font script="Orya" typeface="Kalinga"/>
-        <a:font script="Mlym" typeface="Kartika"/>
-        <a:font script="Laoo" typeface="DokChampa"/>
-        <a:font script="Sinh" typeface="Iskoola Pota"/>
-        <a:font script="Mong" typeface="Mongolian Baiti"/>
-        <a:font script="Viet" typeface="Times New Roman"/>
-        <a:font script="Uigh" typeface="Microsoft Uighur"/>
-        <a:font script="Geor" typeface="Sylfaen"/>
-      </a:majorFont>
-      <a:minorFont>
-        <a:latin typeface="Calibri" panose="020F0502020204030204"/>
-        <a:ea typeface=""/>
-        <a:cs typeface=""/>
-        <a:font script="Jpan" typeface="ＭＳ Ｐゴシック"/>
-        <a:font script="Hang" typeface="맑은 고딕"/>
-        <a:font script="Hans" typeface="宋体"/>
-        <a:font script="Hant" typeface="新細明體"/>
-        <a:font script="Arab" typeface="Arial"/>
-        <a:font script="Hebr" typeface="Arial"/>
-        <a:font script="Thai" typeface="Cordia New"/>
-        <a:font script="Ethi" typeface="Nyala"/>
-        <a:font script="Beng" typeface="Vrinda"/>
-        <a:font script="Gujr" typeface="Shruti"/>
-        <a:font script="Khmr" typeface="DaunPenh"/>
-        <a:font script="Knda" typeface="Tunga"/>
-        <a:font script="Guru" typeface="Raavi"/>
-        <a:font script="Cans" typeface="Euphemia"/>
-        <a:font script="Cher" typeface="Plantagenet Cherokee"/>
-        <a:font script="Yiii" typeface="Microsoft Yi Baiti"/>
-        <a:font script="Tibt" typeface="Microsoft Himalaya"/>
-        <a:font script="Thaa" typeface="MV Boli"/>
-        <a:font script="Deva" typeface="Mangal"/>
-        <a:font script="Telu" typeface="Gautami"/>
-        <a:font script="Taml" typeface="Latha"/>
-        <a:font script="Syrc" typeface="Estrangelo Edessa"/>
-        <a:font script="Orya" typeface="Kalinga"/>
-        <a:font script="Mlym" typeface="Kartika"/>
-        <a:font script="Laoo" typeface="DokChampa"/>
-        <a:font script="Sinh" typeface="Iskoola Pota"/>
-        <a:font script="Mong" typeface="Mongolian Baiti"/>
-        <a:font script="Viet" typeface="Arial"/>
-        <a:font script="Uigh" typeface="Microsoft Uighur"/>
-        <a:font script="Geor" typeface="Sylfaen"/>
+        <a:font script="Armn" typeface="Arial"/>
+        <a:font script="Bugi" typeface="Leelawadee UI"/>
+        <a:font script="Bopo" typeface="Microsoft JhengHei"/>
+        <a:font script="Java" typeface="Javanese Text"/>
+        <a:font script="Lisu" typeface="Segoe UI"/>
+        <a:font script="Mymr" typeface="Myanmar Text"/>
+        <a:font script="Nkoo" typeface="Ebrima"/>
+        <a:font script="Olck" typeface="Nirmala UI"/>
+        <a:font script="Osma" typeface="Ebrima"/>
+        <a:font script="Phag" typeface="Phagspa"/>
+        <a:font script="Syrn" typeface="Estrangelo Edessa"/>
+        <a:font script="Syrj" typeface="Estrangelo Edessa"/>
+        <a:font script="Syre" typeface="Estrangelo Edessa"/>
+        <a:font script="Sora" typeface="Nirmala UI"/>
+        <a:font script="Tale" typeface="Microsoft Tai Le"/>
+        <a:font script="Talu" typeface="Microsoft New Tai Lue"/>
+        <a:font script="Tfng" typeface="Ebrima"/>
       </a:minorFont>
     </a:fontScheme>
     <a:fmtScheme name="Office">
